--- a/docs/presentation/student-retention.pptx
+++ b/docs/presentation/student-retention.pptx
@@ -2,54 +2,42 @@
 <file path=ppt/presentation.xml><?xml version="1.0" encoding="utf-8"?>
 <p:presentation xmlns:a="http://schemas.openxmlformats.org/drawingml/2006/main" xmlns:r="http://schemas.openxmlformats.org/officeDocument/2006/relationships" xmlns:mc="http://schemas.openxmlformats.org/markup-compatibility/2006" xmlns:mv="urn:schemas-microsoft-com:mac:vml" xmlns:p="http://schemas.openxmlformats.org/presentationml/2006/main" xmlns:c="http://schemas.openxmlformats.org/drawingml/2006/chart" xmlns:dgm="http://schemas.openxmlformats.org/drawingml/2006/diagram" xmlns:o="urn:schemas-microsoft-com:office:office" xmlns:v="urn:schemas-microsoft-com:vml" xmlns:pvml="urn:schemas-microsoft-com:office:powerpoint" xmlns:com="http://schemas.openxmlformats.org/drawingml/2006/compatibility" xmlns:p14="http://schemas.microsoft.com/office/powerpoint/2010/main" xmlns:p15="http://schemas.microsoft.com/office/powerpoint/2012/main" xmlns:ahyp="http://schemas.microsoft.com/office/drawing/2018/hyperlinkcolor" autoCompressPictures="0" embedTrueTypeFonts="1" strictFirstAndLastChars="0" saveSubsetFonts="1">
   <p:sldMasterIdLst>
-    <p:sldMasterId id="2147483687" r:id="rId4"/>
-    <p:sldMasterId id="2147483688" r:id="rId5"/>
+    <p:sldMasterId id="2147483687" r:id="rId3"/>
+    <p:sldMasterId id="2147483688" r:id="rId4"/>
   </p:sldMasterIdLst>
   <p:notesMasterIdLst>
-    <p:notesMasterId r:id="rId6"/>
+    <p:notesMasterId r:id="rId5"/>
   </p:notesMasterIdLst>
   <p:sldIdLst>
-    <p:sldId id="354" r:id="rId119"/>
-    <p:sldId id="355" r:id="rId120"/>
-    <p:sldId id="356" r:id="rId121"/>
-    <p:sldId id="357" r:id="rId122"/>
-    <p:sldId id="358" r:id="rId123"/>
-    <p:sldId id="359" r:id="rId124"/>
-    <p:sldId id="360" r:id="rId125"/>
-    <p:sldId id="361" r:id="rId126"/>
-    <p:sldId id="362" r:id="rId127"/>
-    <p:sldId id="363" r:id="rId128"/>
-    <p:sldId id="364" r:id="rId129"/>
-    <p:sldId id="365" r:id="rId130"/>
+    <p:sldId id="256" r:id="rId6"/>
+    <p:sldId id="257" r:id="rId7"/>
+    <p:sldId id="258" r:id="rId8"/>
+    <p:sldId id="259" r:id="rId9"/>
+    <p:sldId id="260" r:id="rId10"/>
+    <p:sldId id="261" r:id="rId11"/>
+    <p:sldId id="262" r:id="rId12"/>
+    <p:sldId id="263" r:id="rId13"/>
+    <p:sldId id="264" r:id="rId14"/>
+    <p:sldId id="265" r:id="rId15"/>
+    <p:sldId id="266" r:id="rId16"/>
+    <p:sldId id="267" r:id="rId17"/>
   </p:sldIdLst>
   <p:sldSz cy="6858000" cx="12188950"/>
   <p:notesSz cx="6858000" cy="9144000"/>
   <p:embeddedFontLst>
     <p:embeddedFont>
       <p:font typeface="DM Sans Medium"/>
-      <p:regular r:id="rId105"/>
-      <p:bold r:id="rId106"/>
-      <p:italic r:id="rId107"/>
-      <p:boldItalic r:id="rId108"/>
+      <p:regular r:id="rId18"/>
+      <p:bold r:id="rId19"/>
+      <p:italic r:id="rId20"/>
+      <p:boldItalic r:id="rId21"/>
     </p:embeddedFont>
     <p:embeddedFont>
       <p:font typeface="DM Sans"/>
-      <p:regular r:id="rId109"/>
-      <p:bold r:id="rId110"/>
-      <p:italic r:id="rId111"/>
-      <p:boldItalic r:id="rId112"/>
-    </p:embeddedFont>
-    <p:embeddedFont>
-      <p:font typeface="Barlow"/>
-      <p:regular r:id="rId113"/>
-      <p:bold r:id="rId114"/>
-      <p:italic r:id="rId115"/>
-      <p:boldItalic r:id="rId116"/>
-    </p:embeddedFont>
-    <p:embeddedFont>
-      <p:font typeface="DM Mono"/>
-      <p:regular r:id="rId117"/>
-      <p:italic r:id="rId118"/>
+      <p:regular r:id="rId22"/>
+      <p:bold r:id="rId23"/>
+      <p:italic r:id="rId24"/>
+      <p:boldItalic r:id="rId25"/>
     </p:embeddedFont>
   </p:embeddedFontLst>
   <p:defaultTextStyle>
@@ -708,6 +696,1194 @@
     </a:lvl9pPr>
   </p:notesStyle>
 </p:notesMaster>
+</file>
+
+<file path=ppt/notesSlides/notesSlide1.xml><?xml version="1.0" encoding="utf-8"?>
+<p:notes xmlns:a="http://schemas.openxmlformats.org/drawingml/2006/main" xmlns:r="http://schemas.openxmlformats.org/officeDocument/2006/relationships" xmlns:mc="http://schemas.openxmlformats.org/markup-compatibility/2006" xmlns:mv="urn:schemas-microsoft-com:mac:vml" xmlns:p="http://schemas.openxmlformats.org/presentationml/2006/main" xmlns:c="http://schemas.openxmlformats.org/drawingml/2006/chart" xmlns:dgm="http://schemas.openxmlformats.org/drawingml/2006/diagram" xmlns:o="urn:schemas-microsoft-com:office:office" xmlns:v="urn:schemas-microsoft-com:vml" xmlns:pvml="urn:schemas-microsoft-com:office:powerpoint" xmlns:com="http://schemas.openxmlformats.org/drawingml/2006/compatibility" xmlns:p14="http://schemas.microsoft.com/office/powerpoint/2010/main" xmlns:p15="http://schemas.microsoft.com/office/powerpoint/2012/main" xmlns:ahyp="http://schemas.microsoft.com/office/drawing/2018/hyperlinkcolor" showMasterPhAnim="0" showMasterSp="0">
+  <p:cSld>
+    <p:spTree>
+      <p:nvGrpSpPr>
+        <p:cNvPr id="301" name="Shape 301"/>
+        <p:cNvGrpSpPr/>
+        <p:nvPr/>
+      </p:nvGrpSpPr>
+      <p:grpSpPr>
+        <a:xfrm>
+          <a:off x="0" y="0"/>
+          <a:ext cx="0" cy="0"/>
+          <a:chOff x="0" y="0"/>
+          <a:chExt cx="0" cy="0"/>
+        </a:xfrm>
+      </p:grpSpPr>
+      <p:sp>
+        <p:nvSpPr>
+          <p:cNvPr id="302" name="Google Shape;302;obj_a6bda59ea55e:notes"/>
+          <p:cNvSpPr/>
+          <p:nvPr>
+            <p:ph idx="2" type="sldImg"/>
+          </p:nvPr>
+        </p:nvSpPr>
+        <p:spPr>
+          <a:xfrm>
+            <a:off x="382063" y="685800"/>
+            <a:ext cx="6094500" cy="3429000"/>
+          </a:xfrm>
+          <a:custGeom>
+            <a:rect b="b" l="l" r="r" t="t"/>
+            <a:pathLst>
+              <a:path extrusionOk="0" h="120000" w="120000">
+                <a:moveTo>
+                  <a:pt x="0" y="0"/>
+                </a:moveTo>
+                <a:lnTo>
+                  <a:pt x="120000" y="0"/>
+                </a:lnTo>
+                <a:lnTo>
+                  <a:pt x="120000" y="120000"/>
+                </a:lnTo>
+                <a:lnTo>
+                  <a:pt x="0" y="120000"/>
+                </a:lnTo>
+                <a:close/>
+              </a:path>
+            </a:pathLst>
+          </a:custGeom>
+        </p:spPr>
+      </p:sp>
+      <p:sp>
+        <p:nvSpPr>
+          <p:cNvPr id="303" name="Google Shape;303;obj_a6bda59ea55e:notes"/>
+          <p:cNvSpPr txBox="1"/>
+          <p:nvPr>
+            <p:ph idx="1" type="body"/>
+          </p:nvPr>
+        </p:nvSpPr>
+        <p:spPr>
+          <a:xfrm>
+            <a:off x="685800" y="4343400"/>
+            <a:ext cx="5486400" cy="4114800"/>
+          </a:xfrm>
+          <a:prstGeom prst="rect">
+            <a:avLst/>
+          </a:prstGeom>
+        </p:spPr>
+        <p:txBody>
+          <a:bodyPr anchorCtr="0" anchor="t" bIns="91425" lIns="91425" spcFirstLastPara="1" rIns="91425" wrap="square" tIns="91425">
+            <a:noAutofit/>
+          </a:bodyPr>
+          <a:lstStyle/>
+          <a:p>
+            <a:pPr indent="0" lvl="0" marL="0" rtl="0" algn="l">
+              <a:spcBef>
+                <a:spcPts val="0"/>
+              </a:spcBef>
+              <a:spcAft>
+                <a:spcPts val="0"/>
+              </a:spcAft>
+              <a:buNone/>
+            </a:pPr>
+            <a:r>
+              <a:t/>
+            </a:r>
+            <a:endParaRPr/>
+          </a:p>
+        </p:txBody>
+      </p:sp>
+    </p:spTree>
+  </p:cSld>
+  <p:clrMapOvr>
+    <a:masterClrMapping/>
+  </p:clrMapOvr>
+</p:notes>
+</file>
+
+<file path=ppt/notesSlides/notesSlide10.xml><?xml version="1.0" encoding="utf-8"?>
+<p:notes xmlns:a="http://schemas.openxmlformats.org/drawingml/2006/main" xmlns:r="http://schemas.openxmlformats.org/officeDocument/2006/relationships" xmlns:mc="http://schemas.openxmlformats.org/markup-compatibility/2006" xmlns:mv="urn:schemas-microsoft-com:mac:vml" xmlns:p="http://schemas.openxmlformats.org/presentationml/2006/main" xmlns:c="http://schemas.openxmlformats.org/drawingml/2006/chart" xmlns:dgm="http://schemas.openxmlformats.org/drawingml/2006/diagram" xmlns:o="urn:schemas-microsoft-com:office:office" xmlns:v="urn:schemas-microsoft-com:vml" xmlns:pvml="urn:schemas-microsoft-com:office:powerpoint" xmlns:com="http://schemas.openxmlformats.org/drawingml/2006/compatibility" xmlns:p14="http://schemas.microsoft.com/office/powerpoint/2010/main" xmlns:p15="http://schemas.microsoft.com/office/powerpoint/2012/main" xmlns:ahyp="http://schemas.microsoft.com/office/drawing/2018/hyperlinkcolor" showMasterPhAnim="0" showMasterSp="0">
+  <p:cSld>
+    <p:spTree>
+      <p:nvGrpSpPr>
+        <p:cNvPr id="395" name="Shape 395"/>
+        <p:cNvGrpSpPr/>
+        <p:nvPr/>
+      </p:nvGrpSpPr>
+      <p:grpSpPr>
+        <a:xfrm>
+          <a:off x="0" y="0"/>
+          <a:ext cx="0" cy="0"/>
+          <a:chOff x="0" y="0"/>
+          <a:chExt cx="0" cy="0"/>
+        </a:xfrm>
+      </p:grpSpPr>
+      <p:sp>
+        <p:nvSpPr>
+          <p:cNvPr id="396" name="Google Shape;396;obj_70c452deb101:notes"/>
+          <p:cNvSpPr/>
+          <p:nvPr>
+            <p:ph idx="2" type="sldImg"/>
+          </p:nvPr>
+        </p:nvSpPr>
+        <p:spPr>
+          <a:xfrm>
+            <a:off x="382063" y="685800"/>
+            <a:ext cx="6094500" cy="3429000"/>
+          </a:xfrm>
+          <a:custGeom>
+            <a:rect b="b" l="l" r="r" t="t"/>
+            <a:pathLst>
+              <a:path extrusionOk="0" h="120000" w="120000">
+                <a:moveTo>
+                  <a:pt x="0" y="0"/>
+                </a:moveTo>
+                <a:lnTo>
+                  <a:pt x="120000" y="0"/>
+                </a:lnTo>
+                <a:lnTo>
+                  <a:pt x="120000" y="120000"/>
+                </a:lnTo>
+                <a:lnTo>
+                  <a:pt x="0" y="120000"/>
+                </a:lnTo>
+                <a:close/>
+              </a:path>
+            </a:pathLst>
+          </a:custGeom>
+        </p:spPr>
+      </p:sp>
+      <p:sp>
+        <p:nvSpPr>
+          <p:cNvPr id="397" name="Google Shape;397;obj_70c452deb101:notes"/>
+          <p:cNvSpPr txBox="1"/>
+          <p:nvPr>
+            <p:ph idx="1" type="body"/>
+          </p:nvPr>
+        </p:nvSpPr>
+        <p:spPr>
+          <a:xfrm>
+            <a:off x="685800" y="4343400"/>
+            <a:ext cx="5486400" cy="4114800"/>
+          </a:xfrm>
+          <a:prstGeom prst="rect">
+            <a:avLst/>
+          </a:prstGeom>
+        </p:spPr>
+        <p:txBody>
+          <a:bodyPr anchorCtr="0" anchor="t" bIns="91425" lIns="91425" spcFirstLastPara="1" rIns="91425" wrap="square" tIns="91425">
+            <a:noAutofit/>
+          </a:bodyPr>
+          <a:lstStyle/>
+          <a:p>
+            <a:pPr indent="0" lvl="0" marL="0" rtl="0" algn="l">
+              <a:spcBef>
+                <a:spcPts val="0"/>
+              </a:spcBef>
+              <a:spcAft>
+                <a:spcPts val="0"/>
+              </a:spcAft>
+              <a:buNone/>
+            </a:pPr>
+            <a:r>
+              <a:t/>
+            </a:r>
+            <a:endParaRPr/>
+          </a:p>
+        </p:txBody>
+      </p:sp>
+    </p:spTree>
+  </p:cSld>
+  <p:clrMapOvr>
+    <a:masterClrMapping/>
+  </p:clrMapOvr>
+</p:notes>
+</file>
+
+<file path=ppt/notesSlides/notesSlide11.xml><?xml version="1.0" encoding="utf-8"?>
+<p:notes xmlns:a="http://schemas.openxmlformats.org/drawingml/2006/main" xmlns:r="http://schemas.openxmlformats.org/officeDocument/2006/relationships" xmlns:mc="http://schemas.openxmlformats.org/markup-compatibility/2006" xmlns:mv="urn:schemas-microsoft-com:mac:vml" xmlns:p="http://schemas.openxmlformats.org/presentationml/2006/main" xmlns:c="http://schemas.openxmlformats.org/drawingml/2006/chart" xmlns:dgm="http://schemas.openxmlformats.org/drawingml/2006/diagram" xmlns:o="urn:schemas-microsoft-com:office:office" xmlns:v="urn:schemas-microsoft-com:vml" xmlns:pvml="urn:schemas-microsoft-com:office:powerpoint" xmlns:com="http://schemas.openxmlformats.org/drawingml/2006/compatibility" xmlns:p14="http://schemas.microsoft.com/office/powerpoint/2010/main" xmlns:p15="http://schemas.microsoft.com/office/powerpoint/2012/main" xmlns:ahyp="http://schemas.microsoft.com/office/drawing/2018/hyperlinkcolor" showMasterPhAnim="0" showMasterSp="0">
+  <p:cSld>
+    <p:spTree>
+      <p:nvGrpSpPr>
+        <p:cNvPr id="406" name="Shape 406"/>
+        <p:cNvGrpSpPr/>
+        <p:nvPr/>
+      </p:nvGrpSpPr>
+      <p:grpSpPr>
+        <a:xfrm>
+          <a:off x="0" y="0"/>
+          <a:ext cx="0" cy="0"/>
+          <a:chOff x="0" y="0"/>
+          <a:chExt cx="0" cy="0"/>
+        </a:xfrm>
+      </p:grpSpPr>
+      <p:sp>
+        <p:nvSpPr>
+          <p:cNvPr id="407" name="Google Shape;407;obj_37735e72d716:notes"/>
+          <p:cNvSpPr/>
+          <p:nvPr>
+            <p:ph idx="2" type="sldImg"/>
+          </p:nvPr>
+        </p:nvSpPr>
+        <p:spPr>
+          <a:xfrm>
+            <a:off x="382063" y="685800"/>
+            <a:ext cx="6094500" cy="3429000"/>
+          </a:xfrm>
+          <a:custGeom>
+            <a:rect b="b" l="l" r="r" t="t"/>
+            <a:pathLst>
+              <a:path extrusionOk="0" h="120000" w="120000">
+                <a:moveTo>
+                  <a:pt x="0" y="0"/>
+                </a:moveTo>
+                <a:lnTo>
+                  <a:pt x="120000" y="0"/>
+                </a:lnTo>
+                <a:lnTo>
+                  <a:pt x="120000" y="120000"/>
+                </a:lnTo>
+                <a:lnTo>
+                  <a:pt x="0" y="120000"/>
+                </a:lnTo>
+                <a:close/>
+              </a:path>
+            </a:pathLst>
+          </a:custGeom>
+        </p:spPr>
+      </p:sp>
+      <p:sp>
+        <p:nvSpPr>
+          <p:cNvPr id="408" name="Google Shape;408;obj_37735e72d716:notes"/>
+          <p:cNvSpPr txBox="1"/>
+          <p:nvPr>
+            <p:ph idx="1" type="body"/>
+          </p:nvPr>
+        </p:nvSpPr>
+        <p:spPr>
+          <a:xfrm>
+            <a:off x="685800" y="4343400"/>
+            <a:ext cx="5486400" cy="4114800"/>
+          </a:xfrm>
+          <a:prstGeom prst="rect">
+            <a:avLst/>
+          </a:prstGeom>
+        </p:spPr>
+        <p:txBody>
+          <a:bodyPr anchorCtr="0" anchor="t" bIns="91425" lIns="91425" spcFirstLastPara="1" rIns="91425" wrap="square" tIns="91425">
+            <a:noAutofit/>
+          </a:bodyPr>
+          <a:lstStyle/>
+          <a:p>
+            <a:pPr indent="0" lvl="0" marL="0" rtl="0" algn="l">
+              <a:spcBef>
+                <a:spcPts val="0"/>
+              </a:spcBef>
+              <a:spcAft>
+                <a:spcPts val="0"/>
+              </a:spcAft>
+              <a:buNone/>
+            </a:pPr>
+            <a:r>
+              <a:t/>
+            </a:r>
+            <a:endParaRPr/>
+          </a:p>
+        </p:txBody>
+      </p:sp>
+    </p:spTree>
+  </p:cSld>
+  <p:clrMapOvr>
+    <a:masterClrMapping/>
+  </p:clrMapOvr>
+</p:notes>
+</file>
+
+<file path=ppt/notesSlides/notesSlide12.xml><?xml version="1.0" encoding="utf-8"?>
+<p:notes xmlns:a="http://schemas.openxmlformats.org/drawingml/2006/main" xmlns:r="http://schemas.openxmlformats.org/officeDocument/2006/relationships" xmlns:mc="http://schemas.openxmlformats.org/markup-compatibility/2006" xmlns:mv="urn:schemas-microsoft-com:mac:vml" xmlns:p="http://schemas.openxmlformats.org/presentationml/2006/main" xmlns:c="http://schemas.openxmlformats.org/drawingml/2006/chart" xmlns:dgm="http://schemas.openxmlformats.org/drawingml/2006/diagram" xmlns:o="urn:schemas-microsoft-com:office:office" xmlns:v="urn:schemas-microsoft-com:vml" xmlns:pvml="urn:schemas-microsoft-com:office:powerpoint" xmlns:com="http://schemas.openxmlformats.org/drawingml/2006/compatibility" xmlns:p14="http://schemas.microsoft.com/office/powerpoint/2010/main" xmlns:p15="http://schemas.microsoft.com/office/powerpoint/2012/main" xmlns:ahyp="http://schemas.microsoft.com/office/drawing/2018/hyperlinkcolor" showMasterPhAnim="0" showMasterSp="0">
+  <p:cSld>
+    <p:spTree>
+      <p:nvGrpSpPr>
+        <p:cNvPr id="417" name="Shape 417"/>
+        <p:cNvGrpSpPr/>
+        <p:nvPr/>
+      </p:nvGrpSpPr>
+      <p:grpSpPr>
+        <a:xfrm>
+          <a:off x="0" y="0"/>
+          <a:ext cx="0" cy="0"/>
+          <a:chOff x="0" y="0"/>
+          <a:chExt cx="0" cy="0"/>
+        </a:xfrm>
+      </p:grpSpPr>
+      <p:sp>
+        <p:nvSpPr>
+          <p:cNvPr id="418" name="Google Shape;418;obj_73ca185cb351:notes"/>
+          <p:cNvSpPr/>
+          <p:nvPr>
+            <p:ph idx="2" type="sldImg"/>
+          </p:nvPr>
+        </p:nvSpPr>
+        <p:spPr>
+          <a:xfrm>
+            <a:off x="382063" y="685800"/>
+            <a:ext cx="6094500" cy="3429000"/>
+          </a:xfrm>
+          <a:custGeom>
+            <a:rect b="b" l="l" r="r" t="t"/>
+            <a:pathLst>
+              <a:path extrusionOk="0" h="120000" w="120000">
+                <a:moveTo>
+                  <a:pt x="0" y="0"/>
+                </a:moveTo>
+                <a:lnTo>
+                  <a:pt x="120000" y="0"/>
+                </a:lnTo>
+                <a:lnTo>
+                  <a:pt x="120000" y="120000"/>
+                </a:lnTo>
+                <a:lnTo>
+                  <a:pt x="0" y="120000"/>
+                </a:lnTo>
+                <a:close/>
+              </a:path>
+            </a:pathLst>
+          </a:custGeom>
+        </p:spPr>
+      </p:sp>
+      <p:sp>
+        <p:nvSpPr>
+          <p:cNvPr id="419" name="Google Shape;419;obj_73ca185cb351:notes"/>
+          <p:cNvSpPr txBox="1"/>
+          <p:nvPr>
+            <p:ph idx="1" type="body"/>
+          </p:nvPr>
+        </p:nvSpPr>
+        <p:spPr>
+          <a:xfrm>
+            <a:off x="685800" y="4343400"/>
+            <a:ext cx="5486400" cy="4114800"/>
+          </a:xfrm>
+          <a:prstGeom prst="rect">
+            <a:avLst/>
+          </a:prstGeom>
+        </p:spPr>
+        <p:txBody>
+          <a:bodyPr anchorCtr="0" anchor="t" bIns="91425" lIns="91425" spcFirstLastPara="1" rIns="91425" wrap="square" tIns="91425">
+            <a:noAutofit/>
+          </a:bodyPr>
+          <a:lstStyle/>
+          <a:p>
+            <a:pPr indent="0" lvl="0" marL="0" rtl="0" algn="l">
+              <a:spcBef>
+                <a:spcPts val="0"/>
+              </a:spcBef>
+              <a:spcAft>
+                <a:spcPts val="0"/>
+              </a:spcAft>
+              <a:buNone/>
+            </a:pPr>
+            <a:r>
+              <a:t/>
+            </a:r>
+            <a:endParaRPr/>
+          </a:p>
+        </p:txBody>
+      </p:sp>
+    </p:spTree>
+  </p:cSld>
+  <p:clrMapOvr>
+    <a:masterClrMapping/>
+  </p:clrMapOvr>
+</p:notes>
+</file>
+
+<file path=ppt/notesSlides/notesSlide2.xml><?xml version="1.0" encoding="utf-8"?>
+<p:notes xmlns:a="http://schemas.openxmlformats.org/drawingml/2006/main" xmlns:r="http://schemas.openxmlformats.org/officeDocument/2006/relationships" xmlns:mc="http://schemas.openxmlformats.org/markup-compatibility/2006" xmlns:mv="urn:schemas-microsoft-com:mac:vml" xmlns:p="http://schemas.openxmlformats.org/presentationml/2006/main" xmlns:c="http://schemas.openxmlformats.org/drawingml/2006/chart" xmlns:dgm="http://schemas.openxmlformats.org/drawingml/2006/diagram" xmlns:o="urn:schemas-microsoft-com:office:office" xmlns:v="urn:schemas-microsoft-com:vml" xmlns:pvml="urn:schemas-microsoft-com:office:powerpoint" xmlns:com="http://schemas.openxmlformats.org/drawingml/2006/compatibility" xmlns:p14="http://schemas.microsoft.com/office/powerpoint/2010/main" xmlns:p15="http://schemas.microsoft.com/office/powerpoint/2012/main" xmlns:ahyp="http://schemas.microsoft.com/office/drawing/2018/hyperlinkcolor" showMasterPhAnim="0" showMasterSp="0">
+  <p:cSld>
+    <p:spTree>
+      <p:nvGrpSpPr>
+        <p:cNvPr id="309" name="Shape 309"/>
+        <p:cNvGrpSpPr/>
+        <p:nvPr/>
+      </p:nvGrpSpPr>
+      <p:grpSpPr>
+        <a:xfrm>
+          <a:off x="0" y="0"/>
+          <a:ext cx="0" cy="0"/>
+          <a:chOff x="0" y="0"/>
+          <a:chExt cx="0" cy="0"/>
+        </a:xfrm>
+      </p:grpSpPr>
+      <p:sp>
+        <p:nvSpPr>
+          <p:cNvPr id="310" name="Google Shape;310;obj_7886faec63d3:notes"/>
+          <p:cNvSpPr/>
+          <p:nvPr>
+            <p:ph idx="2" type="sldImg"/>
+          </p:nvPr>
+        </p:nvSpPr>
+        <p:spPr>
+          <a:xfrm>
+            <a:off x="382063" y="685800"/>
+            <a:ext cx="6094500" cy="3429000"/>
+          </a:xfrm>
+          <a:custGeom>
+            <a:rect b="b" l="l" r="r" t="t"/>
+            <a:pathLst>
+              <a:path extrusionOk="0" h="120000" w="120000">
+                <a:moveTo>
+                  <a:pt x="0" y="0"/>
+                </a:moveTo>
+                <a:lnTo>
+                  <a:pt x="120000" y="0"/>
+                </a:lnTo>
+                <a:lnTo>
+                  <a:pt x="120000" y="120000"/>
+                </a:lnTo>
+                <a:lnTo>
+                  <a:pt x="0" y="120000"/>
+                </a:lnTo>
+                <a:close/>
+              </a:path>
+            </a:pathLst>
+          </a:custGeom>
+        </p:spPr>
+      </p:sp>
+      <p:sp>
+        <p:nvSpPr>
+          <p:cNvPr id="311" name="Google Shape;311;obj_7886faec63d3:notes"/>
+          <p:cNvSpPr txBox="1"/>
+          <p:nvPr>
+            <p:ph idx="1" type="body"/>
+          </p:nvPr>
+        </p:nvSpPr>
+        <p:spPr>
+          <a:xfrm>
+            <a:off x="685800" y="4343400"/>
+            <a:ext cx="5486400" cy="4114800"/>
+          </a:xfrm>
+          <a:prstGeom prst="rect">
+            <a:avLst/>
+          </a:prstGeom>
+        </p:spPr>
+        <p:txBody>
+          <a:bodyPr anchorCtr="0" anchor="t" bIns="91425" lIns="91425" spcFirstLastPara="1" rIns="91425" wrap="square" tIns="91425">
+            <a:noAutofit/>
+          </a:bodyPr>
+          <a:lstStyle/>
+          <a:p>
+            <a:pPr indent="0" lvl="0" marL="0" rtl="0" algn="l">
+              <a:spcBef>
+                <a:spcPts val="0"/>
+              </a:spcBef>
+              <a:spcAft>
+                <a:spcPts val="0"/>
+              </a:spcAft>
+              <a:buNone/>
+            </a:pPr>
+            <a:r>
+              <a:t/>
+            </a:r>
+            <a:endParaRPr/>
+          </a:p>
+        </p:txBody>
+      </p:sp>
+    </p:spTree>
+  </p:cSld>
+  <p:clrMapOvr>
+    <a:masterClrMapping/>
+  </p:clrMapOvr>
+</p:notes>
+</file>
+
+<file path=ppt/notesSlides/notesSlide3.xml><?xml version="1.0" encoding="utf-8"?>
+<p:notes xmlns:a="http://schemas.openxmlformats.org/drawingml/2006/main" xmlns:r="http://schemas.openxmlformats.org/officeDocument/2006/relationships" xmlns:mc="http://schemas.openxmlformats.org/markup-compatibility/2006" xmlns:mv="urn:schemas-microsoft-com:mac:vml" xmlns:p="http://schemas.openxmlformats.org/presentationml/2006/main" xmlns:c="http://schemas.openxmlformats.org/drawingml/2006/chart" xmlns:dgm="http://schemas.openxmlformats.org/drawingml/2006/diagram" xmlns:o="urn:schemas-microsoft-com:office:office" xmlns:v="urn:schemas-microsoft-com:vml" xmlns:pvml="urn:schemas-microsoft-com:office:powerpoint" xmlns:com="http://schemas.openxmlformats.org/drawingml/2006/compatibility" xmlns:p14="http://schemas.microsoft.com/office/powerpoint/2010/main" xmlns:p15="http://schemas.microsoft.com/office/powerpoint/2012/main" xmlns:ahyp="http://schemas.microsoft.com/office/drawing/2018/hyperlinkcolor" showMasterPhAnim="0" showMasterSp="0">
+  <p:cSld>
+    <p:spTree>
+      <p:nvGrpSpPr>
+        <p:cNvPr id="315" name="Shape 315"/>
+        <p:cNvGrpSpPr/>
+        <p:nvPr/>
+      </p:nvGrpSpPr>
+      <p:grpSpPr>
+        <a:xfrm>
+          <a:off x="0" y="0"/>
+          <a:ext cx="0" cy="0"/>
+          <a:chOff x="0" y="0"/>
+          <a:chExt cx="0" cy="0"/>
+        </a:xfrm>
+      </p:grpSpPr>
+      <p:sp>
+        <p:nvSpPr>
+          <p:cNvPr id="316" name="Google Shape;316;obj_2ac8cfdf8fc0:notes"/>
+          <p:cNvSpPr/>
+          <p:nvPr>
+            <p:ph idx="2" type="sldImg"/>
+          </p:nvPr>
+        </p:nvSpPr>
+        <p:spPr>
+          <a:xfrm>
+            <a:off x="382063" y="685800"/>
+            <a:ext cx="6094500" cy="3429000"/>
+          </a:xfrm>
+          <a:custGeom>
+            <a:rect b="b" l="l" r="r" t="t"/>
+            <a:pathLst>
+              <a:path extrusionOk="0" h="120000" w="120000">
+                <a:moveTo>
+                  <a:pt x="0" y="0"/>
+                </a:moveTo>
+                <a:lnTo>
+                  <a:pt x="120000" y="0"/>
+                </a:lnTo>
+                <a:lnTo>
+                  <a:pt x="120000" y="120000"/>
+                </a:lnTo>
+                <a:lnTo>
+                  <a:pt x="0" y="120000"/>
+                </a:lnTo>
+                <a:close/>
+              </a:path>
+            </a:pathLst>
+          </a:custGeom>
+        </p:spPr>
+      </p:sp>
+      <p:sp>
+        <p:nvSpPr>
+          <p:cNvPr id="317" name="Google Shape;317;obj_2ac8cfdf8fc0:notes"/>
+          <p:cNvSpPr txBox="1"/>
+          <p:nvPr>
+            <p:ph idx="1" type="body"/>
+          </p:nvPr>
+        </p:nvSpPr>
+        <p:spPr>
+          <a:xfrm>
+            <a:off x="685800" y="4343400"/>
+            <a:ext cx="5486400" cy="4114800"/>
+          </a:xfrm>
+          <a:prstGeom prst="rect">
+            <a:avLst/>
+          </a:prstGeom>
+        </p:spPr>
+        <p:txBody>
+          <a:bodyPr anchorCtr="0" anchor="t" bIns="91425" lIns="91425" spcFirstLastPara="1" rIns="91425" wrap="square" tIns="91425">
+            <a:noAutofit/>
+          </a:bodyPr>
+          <a:lstStyle/>
+          <a:p>
+            <a:pPr indent="0" lvl="0" marL="0" rtl="0" algn="l">
+              <a:spcBef>
+                <a:spcPts val="0"/>
+              </a:spcBef>
+              <a:spcAft>
+                <a:spcPts val="0"/>
+              </a:spcAft>
+              <a:buNone/>
+            </a:pPr>
+            <a:r>
+              <a:t/>
+            </a:r>
+            <a:endParaRPr/>
+          </a:p>
+        </p:txBody>
+      </p:sp>
+    </p:spTree>
+  </p:cSld>
+  <p:clrMapOvr>
+    <a:masterClrMapping/>
+  </p:clrMapOvr>
+</p:notes>
+</file>
+
+<file path=ppt/notesSlides/notesSlide4.xml><?xml version="1.0" encoding="utf-8"?>
+<p:notes xmlns:a="http://schemas.openxmlformats.org/drawingml/2006/main" xmlns:r="http://schemas.openxmlformats.org/officeDocument/2006/relationships" xmlns:mc="http://schemas.openxmlformats.org/markup-compatibility/2006" xmlns:mv="urn:schemas-microsoft-com:mac:vml" xmlns:p="http://schemas.openxmlformats.org/presentationml/2006/main" xmlns:c="http://schemas.openxmlformats.org/drawingml/2006/chart" xmlns:dgm="http://schemas.openxmlformats.org/drawingml/2006/diagram" xmlns:o="urn:schemas-microsoft-com:office:office" xmlns:v="urn:schemas-microsoft-com:vml" xmlns:pvml="urn:schemas-microsoft-com:office:powerpoint" xmlns:com="http://schemas.openxmlformats.org/drawingml/2006/compatibility" xmlns:p14="http://schemas.microsoft.com/office/powerpoint/2010/main" xmlns:p15="http://schemas.microsoft.com/office/powerpoint/2012/main" xmlns:ahyp="http://schemas.microsoft.com/office/drawing/2018/hyperlinkcolor" showMasterPhAnim="0" showMasterSp="0">
+  <p:cSld>
+    <p:spTree>
+      <p:nvGrpSpPr>
+        <p:cNvPr id="326" name="Shape 326"/>
+        <p:cNvGrpSpPr/>
+        <p:nvPr/>
+      </p:nvGrpSpPr>
+      <p:grpSpPr>
+        <a:xfrm>
+          <a:off x="0" y="0"/>
+          <a:ext cx="0" cy="0"/>
+          <a:chOff x="0" y="0"/>
+          <a:chExt cx="0" cy="0"/>
+        </a:xfrm>
+      </p:grpSpPr>
+      <p:sp>
+        <p:nvSpPr>
+          <p:cNvPr id="327" name="Google Shape;327;obj_b1fd0760e0f3:notes"/>
+          <p:cNvSpPr/>
+          <p:nvPr>
+            <p:ph idx="2" type="sldImg"/>
+          </p:nvPr>
+        </p:nvSpPr>
+        <p:spPr>
+          <a:xfrm>
+            <a:off x="382063" y="685800"/>
+            <a:ext cx="6094500" cy="3429000"/>
+          </a:xfrm>
+          <a:custGeom>
+            <a:rect b="b" l="l" r="r" t="t"/>
+            <a:pathLst>
+              <a:path extrusionOk="0" h="120000" w="120000">
+                <a:moveTo>
+                  <a:pt x="0" y="0"/>
+                </a:moveTo>
+                <a:lnTo>
+                  <a:pt x="120000" y="0"/>
+                </a:lnTo>
+                <a:lnTo>
+                  <a:pt x="120000" y="120000"/>
+                </a:lnTo>
+                <a:lnTo>
+                  <a:pt x="0" y="120000"/>
+                </a:lnTo>
+                <a:close/>
+              </a:path>
+            </a:pathLst>
+          </a:custGeom>
+        </p:spPr>
+      </p:sp>
+      <p:sp>
+        <p:nvSpPr>
+          <p:cNvPr id="328" name="Google Shape;328;obj_b1fd0760e0f3:notes"/>
+          <p:cNvSpPr txBox="1"/>
+          <p:nvPr>
+            <p:ph idx="1" type="body"/>
+          </p:nvPr>
+        </p:nvSpPr>
+        <p:spPr>
+          <a:xfrm>
+            <a:off x="685800" y="4343400"/>
+            <a:ext cx="5486400" cy="4114800"/>
+          </a:xfrm>
+          <a:prstGeom prst="rect">
+            <a:avLst/>
+          </a:prstGeom>
+        </p:spPr>
+        <p:txBody>
+          <a:bodyPr anchorCtr="0" anchor="t" bIns="91425" lIns="91425" spcFirstLastPara="1" rIns="91425" wrap="square" tIns="91425">
+            <a:noAutofit/>
+          </a:bodyPr>
+          <a:lstStyle/>
+          <a:p>
+            <a:pPr indent="0" lvl="0" marL="0" rtl="0" algn="l">
+              <a:spcBef>
+                <a:spcPts val="0"/>
+              </a:spcBef>
+              <a:spcAft>
+                <a:spcPts val="0"/>
+              </a:spcAft>
+              <a:buNone/>
+            </a:pPr>
+            <a:r>
+              <a:t/>
+            </a:r>
+            <a:endParaRPr/>
+          </a:p>
+        </p:txBody>
+      </p:sp>
+    </p:spTree>
+  </p:cSld>
+  <p:clrMapOvr>
+    <a:masterClrMapping/>
+  </p:clrMapOvr>
+</p:notes>
+</file>
+
+<file path=ppt/notesSlides/notesSlide5.xml><?xml version="1.0" encoding="utf-8"?>
+<p:notes xmlns:a="http://schemas.openxmlformats.org/drawingml/2006/main" xmlns:r="http://schemas.openxmlformats.org/officeDocument/2006/relationships" xmlns:mc="http://schemas.openxmlformats.org/markup-compatibility/2006" xmlns:mv="urn:schemas-microsoft-com:mac:vml" xmlns:p="http://schemas.openxmlformats.org/presentationml/2006/main" xmlns:c="http://schemas.openxmlformats.org/drawingml/2006/chart" xmlns:dgm="http://schemas.openxmlformats.org/drawingml/2006/diagram" xmlns:o="urn:schemas-microsoft-com:office:office" xmlns:v="urn:schemas-microsoft-com:vml" xmlns:pvml="urn:schemas-microsoft-com:office:powerpoint" xmlns:com="http://schemas.openxmlformats.org/drawingml/2006/compatibility" xmlns:p14="http://schemas.microsoft.com/office/powerpoint/2010/main" xmlns:p15="http://schemas.microsoft.com/office/powerpoint/2012/main" xmlns:ahyp="http://schemas.microsoft.com/office/drawing/2018/hyperlinkcolor" showMasterPhAnim="0" showMasterSp="0">
+  <p:cSld>
+    <p:spTree>
+      <p:nvGrpSpPr>
+        <p:cNvPr id="339" name="Shape 339"/>
+        <p:cNvGrpSpPr/>
+        <p:nvPr/>
+      </p:nvGrpSpPr>
+      <p:grpSpPr>
+        <a:xfrm>
+          <a:off x="0" y="0"/>
+          <a:ext cx="0" cy="0"/>
+          <a:chOff x="0" y="0"/>
+          <a:chExt cx="0" cy="0"/>
+        </a:xfrm>
+      </p:grpSpPr>
+      <p:sp>
+        <p:nvSpPr>
+          <p:cNvPr id="340" name="Google Shape;340;obj_70719680add2:notes"/>
+          <p:cNvSpPr/>
+          <p:nvPr>
+            <p:ph idx="2" type="sldImg"/>
+          </p:nvPr>
+        </p:nvSpPr>
+        <p:spPr>
+          <a:xfrm>
+            <a:off x="382063" y="685800"/>
+            <a:ext cx="6094500" cy="3429000"/>
+          </a:xfrm>
+          <a:custGeom>
+            <a:rect b="b" l="l" r="r" t="t"/>
+            <a:pathLst>
+              <a:path extrusionOk="0" h="120000" w="120000">
+                <a:moveTo>
+                  <a:pt x="0" y="0"/>
+                </a:moveTo>
+                <a:lnTo>
+                  <a:pt x="120000" y="0"/>
+                </a:lnTo>
+                <a:lnTo>
+                  <a:pt x="120000" y="120000"/>
+                </a:lnTo>
+                <a:lnTo>
+                  <a:pt x="0" y="120000"/>
+                </a:lnTo>
+                <a:close/>
+              </a:path>
+            </a:pathLst>
+          </a:custGeom>
+        </p:spPr>
+      </p:sp>
+      <p:sp>
+        <p:nvSpPr>
+          <p:cNvPr id="341" name="Google Shape;341;obj_70719680add2:notes"/>
+          <p:cNvSpPr txBox="1"/>
+          <p:nvPr>
+            <p:ph idx="1" type="body"/>
+          </p:nvPr>
+        </p:nvSpPr>
+        <p:spPr>
+          <a:xfrm>
+            <a:off x="685800" y="4343400"/>
+            <a:ext cx="5486400" cy="4114800"/>
+          </a:xfrm>
+          <a:prstGeom prst="rect">
+            <a:avLst/>
+          </a:prstGeom>
+        </p:spPr>
+        <p:txBody>
+          <a:bodyPr anchorCtr="0" anchor="t" bIns="91425" lIns="91425" spcFirstLastPara="1" rIns="91425" wrap="square" tIns="91425">
+            <a:noAutofit/>
+          </a:bodyPr>
+          <a:lstStyle/>
+          <a:p>
+            <a:pPr indent="0" lvl="0" marL="0" rtl="0" algn="l">
+              <a:spcBef>
+                <a:spcPts val="0"/>
+              </a:spcBef>
+              <a:spcAft>
+                <a:spcPts val="0"/>
+              </a:spcAft>
+              <a:buNone/>
+            </a:pPr>
+            <a:r>
+              <a:t/>
+            </a:r>
+            <a:endParaRPr/>
+          </a:p>
+        </p:txBody>
+      </p:sp>
+    </p:spTree>
+  </p:cSld>
+  <p:clrMapOvr>
+    <a:masterClrMapping/>
+  </p:clrMapOvr>
+</p:notes>
+</file>
+
+<file path=ppt/notesSlides/notesSlide6.xml><?xml version="1.0" encoding="utf-8"?>
+<p:notes xmlns:a="http://schemas.openxmlformats.org/drawingml/2006/main" xmlns:r="http://schemas.openxmlformats.org/officeDocument/2006/relationships" xmlns:mc="http://schemas.openxmlformats.org/markup-compatibility/2006" xmlns:mv="urn:schemas-microsoft-com:mac:vml" xmlns:p="http://schemas.openxmlformats.org/presentationml/2006/main" xmlns:c="http://schemas.openxmlformats.org/drawingml/2006/chart" xmlns:dgm="http://schemas.openxmlformats.org/drawingml/2006/diagram" xmlns:o="urn:schemas-microsoft-com:office:office" xmlns:v="urn:schemas-microsoft-com:vml" xmlns:pvml="urn:schemas-microsoft-com:office:powerpoint" xmlns:com="http://schemas.openxmlformats.org/drawingml/2006/compatibility" xmlns:p14="http://schemas.microsoft.com/office/powerpoint/2010/main" xmlns:p15="http://schemas.microsoft.com/office/powerpoint/2012/main" xmlns:ahyp="http://schemas.microsoft.com/office/drawing/2018/hyperlinkcolor" showMasterPhAnim="0" showMasterSp="0">
+  <p:cSld>
+    <p:spTree>
+      <p:nvGrpSpPr>
+        <p:cNvPr id="347" name="Shape 347"/>
+        <p:cNvGrpSpPr/>
+        <p:nvPr/>
+      </p:nvGrpSpPr>
+      <p:grpSpPr>
+        <a:xfrm>
+          <a:off x="0" y="0"/>
+          <a:ext cx="0" cy="0"/>
+          <a:chOff x="0" y="0"/>
+          <a:chExt cx="0" cy="0"/>
+        </a:xfrm>
+      </p:grpSpPr>
+      <p:sp>
+        <p:nvSpPr>
+          <p:cNvPr id="348" name="Google Shape;348;obj_82eae0df203d:notes"/>
+          <p:cNvSpPr/>
+          <p:nvPr>
+            <p:ph idx="2" type="sldImg"/>
+          </p:nvPr>
+        </p:nvSpPr>
+        <p:spPr>
+          <a:xfrm>
+            <a:off x="382063" y="685800"/>
+            <a:ext cx="6094500" cy="3429000"/>
+          </a:xfrm>
+          <a:custGeom>
+            <a:rect b="b" l="l" r="r" t="t"/>
+            <a:pathLst>
+              <a:path extrusionOk="0" h="120000" w="120000">
+                <a:moveTo>
+                  <a:pt x="0" y="0"/>
+                </a:moveTo>
+                <a:lnTo>
+                  <a:pt x="120000" y="0"/>
+                </a:lnTo>
+                <a:lnTo>
+                  <a:pt x="120000" y="120000"/>
+                </a:lnTo>
+                <a:lnTo>
+                  <a:pt x="0" y="120000"/>
+                </a:lnTo>
+                <a:close/>
+              </a:path>
+            </a:pathLst>
+          </a:custGeom>
+        </p:spPr>
+      </p:sp>
+      <p:sp>
+        <p:nvSpPr>
+          <p:cNvPr id="349" name="Google Shape;349;obj_82eae0df203d:notes"/>
+          <p:cNvSpPr txBox="1"/>
+          <p:nvPr>
+            <p:ph idx="1" type="body"/>
+          </p:nvPr>
+        </p:nvSpPr>
+        <p:spPr>
+          <a:xfrm>
+            <a:off x="685800" y="4343400"/>
+            <a:ext cx="5486400" cy="4114800"/>
+          </a:xfrm>
+          <a:prstGeom prst="rect">
+            <a:avLst/>
+          </a:prstGeom>
+        </p:spPr>
+        <p:txBody>
+          <a:bodyPr anchorCtr="0" anchor="t" bIns="91425" lIns="91425" spcFirstLastPara="1" rIns="91425" wrap="square" tIns="91425">
+            <a:noAutofit/>
+          </a:bodyPr>
+          <a:lstStyle/>
+          <a:p>
+            <a:pPr indent="0" lvl="0" marL="0" rtl="0" algn="l">
+              <a:spcBef>
+                <a:spcPts val="0"/>
+              </a:spcBef>
+              <a:spcAft>
+                <a:spcPts val="0"/>
+              </a:spcAft>
+              <a:buNone/>
+            </a:pPr>
+            <a:r>
+              <a:t/>
+            </a:r>
+            <a:endParaRPr/>
+          </a:p>
+        </p:txBody>
+      </p:sp>
+    </p:spTree>
+  </p:cSld>
+  <p:clrMapOvr>
+    <a:masterClrMapping/>
+  </p:clrMapOvr>
+</p:notes>
+</file>
+
+<file path=ppt/notesSlides/notesSlide7.xml><?xml version="1.0" encoding="utf-8"?>
+<p:notes xmlns:a="http://schemas.openxmlformats.org/drawingml/2006/main" xmlns:r="http://schemas.openxmlformats.org/officeDocument/2006/relationships" xmlns:mc="http://schemas.openxmlformats.org/markup-compatibility/2006" xmlns:mv="urn:schemas-microsoft-com:mac:vml" xmlns:p="http://schemas.openxmlformats.org/presentationml/2006/main" xmlns:c="http://schemas.openxmlformats.org/drawingml/2006/chart" xmlns:dgm="http://schemas.openxmlformats.org/drawingml/2006/diagram" xmlns:o="urn:schemas-microsoft-com:office:office" xmlns:v="urn:schemas-microsoft-com:vml" xmlns:pvml="urn:schemas-microsoft-com:office:powerpoint" xmlns:com="http://schemas.openxmlformats.org/drawingml/2006/compatibility" xmlns:p14="http://schemas.microsoft.com/office/powerpoint/2010/main" xmlns:p15="http://schemas.microsoft.com/office/powerpoint/2012/main" xmlns:ahyp="http://schemas.microsoft.com/office/drawing/2018/hyperlinkcolor" showMasterPhAnim="0" showMasterSp="0">
+  <p:cSld>
+    <p:spTree>
+      <p:nvGrpSpPr>
+        <p:cNvPr id="358" name="Shape 358"/>
+        <p:cNvGrpSpPr/>
+        <p:nvPr/>
+      </p:nvGrpSpPr>
+      <p:grpSpPr>
+        <a:xfrm>
+          <a:off x="0" y="0"/>
+          <a:ext cx="0" cy="0"/>
+          <a:chOff x="0" y="0"/>
+          <a:chExt cx="0" cy="0"/>
+        </a:xfrm>
+      </p:grpSpPr>
+      <p:sp>
+        <p:nvSpPr>
+          <p:cNvPr id="359" name="Google Shape;359;obj_7b90bc416518:notes"/>
+          <p:cNvSpPr/>
+          <p:nvPr>
+            <p:ph idx="2" type="sldImg"/>
+          </p:nvPr>
+        </p:nvSpPr>
+        <p:spPr>
+          <a:xfrm>
+            <a:off x="382063" y="685800"/>
+            <a:ext cx="6094500" cy="3429000"/>
+          </a:xfrm>
+          <a:custGeom>
+            <a:rect b="b" l="l" r="r" t="t"/>
+            <a:pathLst>
+              <a:path extrusionOk="0" h="120000" w="120000">
+                <a:moveTo>
+                  <a:pt x="0" y="0"/>
+                </a:moveTo>
+                <a:lnTo>
+                  <a:pt x="120000" y="0"/>
+                </a:lnTo>
+                <a:lnTo>
+                  <a:pt x="120000" y="120000"/>
+                </a:lnTo>
+                <a:lnTo>
+                  <a:pt x="0" y="120000"/>
+                </a:lnTo>
+                <a:close/>
+              </a:path>
+            </a:pathLst>
+          </a:custGeom>
+        </p:spPr>
+      </p:sp>
+      <p:sp>
+        <p:nvSpPr>
+          <p:cNvPr id="360" name="Google Shape;360;obj_7b90bc416518:notes"/>
+          <p:cNvSpPr txBox="1"/>
+          <p:nvPr>
+            <p:ph idx="1" type="body"/>
+          </p:nvPr>
+        </p:nvSpPr>
+        <p:spPr>
+          <a:xfrm>
+            <a:off x="685800" y="4343400"/>
+            <a:ext cx="5486400" cy="4114800"/>
+          </a:xfrm>
+          <a:prstGeom prst="rect">
+            <a:avLst/>
+          </a:prstGeom>
+        </p:spPr>
+        <p:txBody>
+          <a:bodyPr anchorCtr="0" anchor="t" bIns="91425" lIns="91425" spcFirstLastPara="1" rIns="91425" wrap="square" tIns="91425">
+            <a:noAutofit/>
+          </a:bodyPr>
+          <a:lstStyle/>
+          <a:p>
+            <a:pPr indent="0" lvl="0" marL="0" rtl="0" algn="l">
+              <a:spcBef>
+                <a:spcPts val="0"/>
+              </a:spcBef>
+              <a:spcAft>
+                <a:spcPts val="0"/>
+              </a:spcAft>
+              <a:buNone/>
+            </a:pPr>
+            <a:r>
+              <a:t/>
+            </a:r>
+            <a:endParaRPr/>
+          </a:p>
+        </p:txBody>
+      </p:sp>
+    </p:spTree>
+  </p:cSld>
+  <p:clrMapOvr>
+    <a:masterClrMapping/>
+  </p:clrMapOvr>
+</p:notes>
+</file>
+
+<file path=ppt/notesSlides/notesSlide8.xml><?xml version="1.0" encoding="utf-8"?>
+<p:notes xmlns:a="http://schemas.openxmlformats.org/drawingml/2006/main" xmlns:r="http://schemas.openxmlformats.org/officeDocument/2006/relationships" xmlns:mc="http://schemas.openxmlformats.org/markup-compatibility/2006" xmlns:mv="urn:schemas-microsoft-com:mac:vml" xmlns:p="http://schemas.openxmlformats.org/presentationml/2006/main" xmlns:c="http://schemas.openxmlformats.org/drawingml/2006/chart" xmlns:dgm="http://schemas.openxmlformats.org/drawingml/2006/diagram" xmlns:o="urn:schemas-microsoft-com:office:office" xmlns:v="urn:schemas-microsoft-com:vml" xmlns:pvml="urn:schemas-microsoft-com:office:powerpoint" xmlns:com="http://schemas.openxmlformats.org/drawingml/2006/compatibility" xmlns:p14="http://schemas.microsoft.com/office/powerpoint/2010/main" xmlns:p15="http://schemas.microsoft.com/office/powerpoint/2012/main" xmlns:ahyp="http://schemas.microsoft.com/office/drawing/2018/hyperlinkcolor" showMasterPhAnim="0" showMasterSp="0">
+  <p:cSld>
+    <p:spTree>
+      <p:nvGrpSpPr>
+        <p:cNvPr id="371" name="Shape 371"/>
+        <p:cNvGrpSpPr/>
+        <p:nvPr/>
+      </p:nvGrpSpPr>
+      <p:grpSpPr>
+        <a:xfrm>
+          <a:off x="0" y="0"/>
+          <a:ext cx="0" cy="0"/>
+          <a:chOff x="0" y="0"/>
+          <a:chExt cx="0" cy="0"/>
+        </a:xfrm>
+      </p:grpSpPr>
+      <p:sp>
+        <p:nvSpPr>
+          <p:cNvPr id="372" name="Google Shape;372;obj_34164a1f1d75:notes"/>
+          <p:cNvSpPr/>
+          <p:nvPr>
+            <p:ph idx="2" type="sldImg"/>
+          </p:nvPr>
+        </p:nvSpPr>
+        <p:spPr>
+          <a:xfrm>
+            <a:off x="382063" y="685800"/>
+            <a:ext cx="6094500" cy="3429000"/>
+          </a:xfrm>
+          <a:custGeom>
+            <a:rect b="b" l="l" r="r" t="t"/>
+            <a:pathLst>
+              <a:path extrusionOk="0" h="120000" w="120000">
+                <a:moveTo>
+                  <a:pt x="0" y="0"/>
+                </a:moveTo>
+                <a:lnTo>
+                  <a:pt x="120000" y="0"/>
+                </a:lnTo>
+                <a:lnTo>
+                  <a:pt x="120000" y="120000"/>
+                </a:lnTo>
+                <a:lnTo>
+                  <a:pt x="0" y="120000"/>
+                </a:lnTo>
+                <a:close/>
+              </a:path>
+            </a:pathLst>
+          </a:custGeom>
+        </p:spPr>
+      </p:sp>
+      <p:sp>
+        <p:nvSpPr>
+          <p:cNvPr id="373" name="Google Shape;373;obj_34164a1f1d75:notes"/>
+          <p:cNvSpPr txBox="1"/>
+          <p:nvPr>
+            <p:ph idx="1" type="body"/>
+          </p:nvPr>
+        </p:nvSpPr>
+        <p:spPr>
+          <a:xfrm>
+            <a:off x="685800" y="4343400"/>
+            <a:ext cx="5486400" cy="4114800"/>
+          </a:xfrm>
+          <a:prstGeom prst="rect">
+            <a:avLst/>
+          </a:prstGeom>
+        </p:spPr>
+        <p:txBody>
+          <a:bodyPr anchorCtr="0" anchor="t" bIns="91425" lIns="91425" spcFirstLastPara="1" rIns="91425" wrap="square" tIns="91425">
+            <a:noAutofit/>
+          </a:bodyPr>
+          <a:lstStyle/>
+          <a:p>
+            <a:pPr indent="0" lvl="0" marL="0" rtl="0" algn="l">
+              <a:spcBef>
+                <a:spcPts val="0"/>
+              </a:spcBef>
+              <a:spcAft>
+                <a:spcPts val="0"/>
+              </a:spcAft>
+              <a:buNone/>
+            </a:pPr>
+            <a:r>
+              <a:t/>
+            </a:r>
+            <a:endParaRPr/>
+          </a:p>
+        </p:txBody>
+      </p:sp>
+    </p:spTree>
+  </p:cSld>
+  <p:clrMapOvr>
+    <a:masterClrMapping/>
+  </p:clrMapOvr>
+</p:notes>
+</file>
+
+<file path=ppt/notesSlides/notesSlide9.xml><?xml version="1.0" encoding="utf-8"?>
+<p:notes xmlns:a="http://schemas.openxmlformats.org/drawingml/2006/main" xmlns:r="http://schemas.openxmlformats.org/officeDocument/2006/relationships" xmlns:mc="http://schemas.openxmlformats.org/markup-compatibility/2006" xmlns:mv="urn:schemas-microsoft-com:mac:vml" xmlns:p="http://schemas.openxmlformats.org/presentationml/2006/main" xmlns:c="http://schemas.openxmlformats.org/drawingml/2006/chart" xmlns:dgm="http://schemas.openxmlformats.org/drawingml/2006/diagram" xmlns:o="urn:schemas-microsoft-com:office:office" xmlns:v="urn:schemas-microsoft-com:vml" xmlns:pvml="urn:schemas-microsoft-com:office:powerpoint" xmlns:com="http://schemas.openxmlformats.org/drawingml/2006/compatibility" xmlns:p14="http://schemas.microsoft.com/office/powerpoint/2010/main" xmlns:p15="http://schemas.microsoft.com/office/powerpoint/2012/main" xmlns:ahyp="http://schemas.microsoft.com/office/drawing/2018/hyperlinkcolor" showMasterPhAnim="0" showMasterSp="0">
+  <p:cSld>
+    <p:spTree>
+      <p:nvGrpSpPr>
+        <p:cNvPr id="384" name="Shape 384"/>
+        <p:cNvGrpSpPr/>
+        <p:nvPr/>
+      </p:nvGrpSpPr>
+      <p:grpSpPr>
+        <a:xfrm>
+          <a:off x="0" y="0"/>
+          <a:ext cx="0" cy="0"/>
+          <a:chOff x="0" y="0"/>
+          <a:chExt cx="0" cy="0"/>
+        </a:xfrm>
+      </p:grpSpPr>
+      <p:sp>
+        <p:nvSpPr>
+          <p:cNvPr id="385" name="Google Shape;385;obj_ed6fe7cea2ed:notes"/>
+          <p:cNvSpPr/>
+          <p:nvPr>
+            <p:ph idx="2" type="sldImg"/>
+          </p:nvPr>
+        </p:nvSpPr>
+        <p:spPr>
+          <a:xfrm>
+            <a:off x="382063" y="685800"/>
+            <a:ext cx="6094500" cy="3429000"/>
+          </a:xfrm>
+          <a:custGeom>
+            <a:rect b="b" l="l" r="r" t="t"/>
+            <a:pathLst>
+              <a:path extrusionOk="0" h="120000" w="120000">
+                <a:moveTo>
+                  <a:pt x="0" y="0"/>
+                </a:moveTo>
+                <a:lnTo>
+                  <a:pt x="120000" y="0"/>
+                </a:lnTo>
+                <a:lnTo>
+                  <a:pt x="120000" y="120000"/>
+                </a:lnTo>
+                <a:lnTo>
+                  <a:pt x="0" y="120000"/>
+                </a:lnTo>
+                <a:close/>
+              </a:path>
+            </a:pathLst>
+          </a:custGeom>
+        </p:spPr>
+      </p:sp>
+      <p:sp>
+        <p:nvSpPr>
+          <p:cNvPr id="386" name="Google Shape;386;obj_ed6fe7cea2ed:notes"/>
+          <p:cNvSpPr txBox="1"/>
+          <p:nvPr>
+            <p:ph idx="1" type="body"/>
+          </p:nvPr>
+        </p:nvSpPr>
+        <p:spPr>
+          <a:xfrm>
+            <a:off x="685800" y="4343400"/>
+            <a:ext cx="5486400" cy="4114800"/>
+          </a:xfrm>
+          <a:prstGeom prst="rect">
+            <a:avLst/>
+          </a:prstGeom>
+        </p:spPr>
+        <p:txBody>
+          <a:bodyPr anchorCtr="0" anchor="t" bIns="91425" lIns="91425" spcFirstLastPara="1" rIns="91425" wrap="square" tIns="91425">
+            <a:noAutofit/>
+          </a:bodyPr>
+          <a:lstStyle/>
+          <a:p>
+            <a:pPr indent="0" lvl="0" marL="0" rtl="0" algn="l">
+              <a:spcBef>
+                <a:spcPts val="0"/>
+              </a:spcBef>
+              <a:spcAft>
+                <a:spcPts val="0"/>
+              </a:spcAft>
+              <a:buNone/>
+            </a:pPr>
+            <a:r>
+              <a:t/>
+            </a:r>
+            <a:endParaRPr/>
+          </a:p>
+        </p:txBody>
+      </p:sp>
+    </p:spTree>
+  </p:cSld>
+  <p:clrMapOvr>
+    <a:masterClrMapping/>
+  </p:clrMapOvr>
+</p:notes>
 </file>
 
 <file path=ppt/slideLayouts/slideLayout1.xml><?xml version="1.0" encoding="utf-8"?>
@@ -28149,28 +29325,75 @@
 </p:sldMaster>
 </file>
 
-<file path=ppt/slides/slide100.xml><?xml version="1.0" encoding="utf-8"?>
-<p:sld xmlns:a="http://schemas.openxmlformats.org/drawingml/2006/main" xmlns:p="http://schemas.openxmlformats.org/presentationml/2006/main" xmlns:r="http://schemas.openxmlformats.org/officeDocument/2006/relationships">
+<file path=ppt/slides/slide1.xml><?xml version="1.0" encoding="utf-8"?>
+<p:sld xmlns:a="http://schemas.openxmlformats.org/drawingml/2006/main" xmlns:r="http://schemas.openxmlformats.org/officeDocument/2006/relationships" xmlns:mc="http://schemas.openxmlformats.org/markup-compatibility/2006" xmlns:mv="urn:schemas-microsoft-com:mac:vml" xmlns:p="http://schemas.openxmlformats.org/presentationml/2006/main" xmlns:c="http://schemas.openxmlformats.org/drawingml/2006/chart" xmlns:dgm="http://schemas.openxmlformats.org/drawingml/2006/diagram" xmlns:o="urn:schemas-microsoft-com:office:office" xmlns:v="urn:schemas-microsoft-com:vml" xmlns:pvml="urn:schemas-microsoft-com:office:powerpoint" xmlns:com="http://schemas.openxmlformats.org/drawingml/2006/compatibility" xmlns:p14="http://schemas.microsoft.com/office/powerpoint/2010/main" xmlns:p15="http://schemas.microsoft.com/office/powerpoint/2012/main" xmlns:ahyp="http://schemas.microsoft.com/office/drawing/2018/hyperlinkcolor">
   <p:cSld>
     <p:spTree>
       <p:nvGrpSpPr>
-        <p:cNvPr id="1" name=""/>
+        <p:cNvPr id="304" name="Shape 304"/>
         <p:cNvGrpSpPr/>
         <p:nvPr/>
       </p:nvGrpSpPr>
-      <p:grpSpPr/>
+      <p:grpSpPr>
+        <a:xfrm>
+          <a:off x="0" y="0"/>
+          <a:ext cx="0" cy="0"/>
+          <a:chOff x="0" y="0"/>
+          <a:chExt cx="0" cy="0"/>
+        </a:xfrm>
+      </p:grpSpPr>
       <p:sp>
         <p:nvSpPr>
-          <p:cNvPr id="664" name="Google Shape;664;p71"/>
+          <p:cNvPr id="305" name="Google Shape;305;p42"/>
           <p:cNvSpPr txBox="1"/>
           <p:nvPr>
-            <p:ph idx="12" type="sldNum"/>
+            <p:ph type="ctrTitle"/>
           </p:nvPr>
         </p:nvSpPr>
         <p:spPr>
           <a:xfrm>
-            <a:off x="11097669" y="6473300"/>
-            <a:ext cx="324300" cy="186600"/>
+            <a:off x="761800" y="1186975"/>
+            <a:ext cx="5332800" cy="2387700"/>
+          </a:xfrm>
+          <a:prstGeom prst="rect">
+            <a:avLst/>
+          </a:prstGeom>
+        </p:spPr>
+        <p:txBody>
+          <a:bodyPr anchorCtr="0" anchor="b" bIns="0" lIns="0" spcFirstLastPara="1" rIns="0" wrap="square" tIns="0">
+            <a:noAutofit/>
+          </a:bodyPr>
+          <a:lstStyle/>
+          <a:p>
+            <a:pPr indent="0" lvl="0" marL="0" rtl="0" algn="l">
+              <a:spcBef>
+                <a:spcPts val="0"/>
+              </a:spcBef>
+              <a:spcAft>
+                <a:spcPts val="0"/>
+              </a:spcAft>
+              <a:buNone/>
+            </a:pPr>
+            <a:r>
+              <a:rPr lang="en"/>
+              <a:t>Timely Student Support</a:t>
+            </a:r>
+            <a:endParaRPr/>
+          </a:p>
+        </p:txBody>
+      </p:sp>
+      <p:sp>
+        <p:nvSpPr>
+          <p:cNvPr id="306" name="Google Shape;306;p42"/>
+          <p:cNvSpPr txBox="1"/>
+          <p:nvPr>
+            <p:ph idx="1" type="subTitle"/>
+          </p:nvPr>
+        </p:nvSpPr>
+        <p:spPr>
+          <a:xfrm>
+            <a:off x="761809" y="3835400"/>
+            <a:ext cx="6170100" cy="1224300"/>
           </a:xfrm>
           <a:prstGeom prst="rect">
             <a:avLst/>
@@ -28182,38 +29405,99 @@
           </a:bodyPr>
           <a:lstStyle/>
           <a:p>
+            <a:pPr indent="0" lvl="0" marL="0" rtl="0" algn="l">
+              <a:spcBef>
+                <a:spcPts val="1100"/>
+              </a:spcBef>
+              <a:spcAft>
+                <a:spcPts val="0"/>
+              </a:spcAft>
+              <a:buNone/>
+            </a:pPr>
             <a:r>
-              <a:t>2</a:t>
+              <a:rPr lang="en"/>
+              <a:t>From fragmented signals to governed action on Databricks • Synthetic demonstration</a:t>
             </a:r>
+            <a:endParaRPr/>
           </a:p>
         </p:txBody>
       </p:sp>
       <p:sp>
         <p:nvSpPr>
-          <p:cNvPr id="665" name="Google Shape;665;p71"/>
+          <p:cNvPr id="307" name="Google Shape;307;p42"/>
           <p:cNvSpPr txBox="1"/>
           <p:nvPr>
-            <p:ph type="title"/>
+            <p:ph idx="2" type="subTitle"/>
           </p:nvPr>
         </p:nvSpPr>
         <p:spPr>
           <a:xfrm>
-            <a:off x="1341898" y="535633"/>
-            <a:ext cx="9474000" cy="5712900"/>
+            <a:off x="761809" y="5756000"/>
+            <a:ext cx="5262300" cy="492300"/>
           </a:xfrm>
           <a:prstGeom prst="rect">
             <a:avLst/>
           </a:prstGeom>
         </p:spPr>
         <p:txBody>
-          <a:bodyPr anchorCtr="0" anchor="ctr" bIns="0" lIns="0" spcFirstLastPara="1" rIns="0" wrap="square" tIns="0">
+          <a:bodyPr anchorCtr="0" anchor="t" bIns="0" lIns="0" spcFirstLastPara="1" rIns="0" wrap="square" tIns="0">
             <a:noAutofit/>
           </a:bodyPr>
           <a:lstStyle/>
           <a:p>
+            <a:pPr indent="0" lvl="0" marL="0" rtl="0" algn="l">
+              <a:spcBef>
+                <a:spcPts val="1100"/>
+              </a:spcBef>
+              <a:spcAft>
+                <a:spcPts val="0"/>
+              </a:spcAft>
+              <a:buNone/>
+            </a:pPr>
             <a:r>
-              <a:t>Advisors need to know who needs attention today—and why—without compromising trust.</a:t>
+              <a:t/>
             </a:r>
+            <a:endParaRPr/>
+          </a:p>
+        </p:txBody>
+      </p:sp>
+      <p:sp>
+        <p:nvSpPr>
+          <p:cNvPr id="308" name="Google Shape;308;p42"/>
+          <p:cNvSpPr txBox="1"/>
+          <p:nvPr>
+            <p:ph idx="12" type="sldNum"/>
+          </p:nvPr>
+        </p:nvSpPr>
+        <p:spPr>
+          <a:xfrm>
+            <a:off x="11097669" y="6473300"/>
+            <a:ext cx="324300" cy="186600"/>
+          </a:xfrm>
+          <a:prstGeom prst="rect">
+            <a:avLst/>
+          </a:prstGeom>
+        </p:spPr>
+        <p:txBody>
+          <a:bodyPr anchorCtr="0" anchor="t" bIns="0" lIns="0" spcFirstLastPara="1" rIns="0" wrap="square" tIns="0">
+            <a:noAutofit/>
+          </a:bodyPr>
+          <a:lstStyle/>
+          <a:p>
+            <a:pPr indent="0" lvl="0" marL="0" rtl="0" algn="r">
+              <a:spcBef>
+                <a:spcPts val="0"/>
+              </a:spcBef>
+              <a:spcAft>
+                <a:spcPts val="0"/>
+              </a:spcAft>
+              <a:buNone/>
+            </a:pPr>
+            <a:fld id="{00000000-1234-1234-1234-123412341234}" type="slidenum">
+              <a:rPr lang="en"/>
+              <a:t>‹#›</a:t>
+            </a:fld>
+            <a:endParaRPr/>
           </a:p>
         </p:txBody>
       </p:sp>
@@ -28225,28 +29509,75 @@
 </p:sld>
 </file>
 
-<file path=ppt/slides/slide101.xml><?xml version="1.0" encoding="utf-8"?>
-<p:sld xmlns:a="http://schemas.openxmlformats.org/drawingml/2006/main" xmlns:p="http://schemas.openxmlformats.org/presentationml/2006/main" xmlns:r="http://schemas.openxmlformats.org/officeDocument/2006/relationships">
+<file path=ppt/slides/slide10.xml><?xml version="1.0" encoding="utf-8"?>
+<p:sld xmlns:a="http://schemas.openxmlformats.org/drawingml/2006/main" xmlns:r="http://schemas.openxmlformats.org/officeDocument/2006/relationships" xmlns:mc="http://schemas.openxmlformats.org/markup-compatibility/2006" xmlns:mv="urn:schemas-microsoft-com:mac:vml" xmlns:p="http://schemas.openxmlformats.org/presentationml/2006/main" xmlns:c="http://schemas.openxmlformats.org/drawingml/2006/chart" xmlns:dgm="http://schemas.openxmlformats.org/drawingml/2006/diagram" xmlns:o="urn:schemas-microsoft-com:office:office" xmlns:v="urn:schemas-microsoft-com:vml" xmlns:pvml="urn:schemas-microsoft-com:office:powerpoint" xmlns:com="http://schemas.openxmlformats.org/drawingml/2006/compatibility" xmlns:p14="http://schemas.microsoft.com/office/powerpoint/2010/main" xmlns:p15="http://schemas.microsoft.com/office/powerpoint/2012/main" xmlns:ahyp="http://schemas.microsoft.com/office/drawing/2018/hyperlinkcolor">
   <p:cSld>
     <p:spTree>
       <p:nvGrpSpPr>
-        <p:cNvPr id="1" name=""/>
+        <p:cNvPr id="398" name="Shape 398"/>
         <p:cNvGrpSpPr/>
         <p:nvPr/>
       </p:nvGrpSpPr>
-      <p:grpSpPr/>
+      <p:grpSpPr>
+        <a:xfrm>
+          <a:off x="0" y="0"/>
+          <a:ext cx="0" cy="0"/>
+          <a:chOff x="0" y="0"/>
+          <a:chExt cx="0" cy="0"/>
+        </a:xfrm>
+      </p:grpSpPr>
       <p:sp>
         <p:nvSpPr>
-          <p:cNvPr id="744" name="Google Shape;744;p81"/>
+          <p:cNvPr id="399" name="Google Shape;399;p51"/>
           <p:cNvSpPr txBox="1"/>
           <p:nvPr>
-            <p:ph idx="12" type="sldNum"/>
+            <p:ph type="title"/>
           </p:nvPr>
         </p:nvSpPr>
         <p:spPr>
           <a:xfrm>
-            <a:off x="11097669" y="6473300"/>
-            <a:ext cx="324300" cy="186600"/>
+            <a:off x="749245" y="535597"/>
+            <a:ext cx="10659300" cy="583500"/>
+          </a:xfrm>
+          <a:prstGeom prst="rect">
+            <a:avLst/>
+          </a:prstGeom>
+        </p:spPr>
+        <p:txBody>
+          <a:bodyPr anchorCtr="0" anchor="ctr" bIns="0" lIns="0" spcFirstLastPara="1" rIns="0" wrap="square" tIns="0">
+            <a:noAutofit/>
+          </a:bodyPr>
+          <a:lstStyle/>
+          <a:p>
+            <a:pPr indent="0" lvl="0" marL="0" rtl="0" algn="l">
+              <a:spcBef>
+                <a:spcPts val="0"/>
+              </a:spcBef>
+              <a:spcAft>
+                <a:spcPts val="0"/>
+              </a:spcAft>
+              <a:buNone/>
+            </a:pPr>
+            <a:r>
+              <a:rPr lang="en"/>
+              <a:t>Execution evidence—not screenshots</a:t>
+            </a:r>
+            <a:endParaRPr/>
+          </a:p>
+        </p:txBody>
+      </p:sp>
+      <p:sp>
+        <p:nvSpPr>
+          <p:cNvPr id="400" name="Google Shape;400;p51"/>
+          <p:cNvSpPr txBox="1"/>
+          <p:nvPr>
+            <p:ph idx="1" type="subTitle"/>
+          </p:nvPr>
+        </p:nvSpPr>
+        <p:spPr>
+          <a:xfrm>
+            <a:off x="764809" y="1174702"/>
+            <a:ext cx="10659300" cy="583500"/>
           </a:xfrm>
           <a:prstGeom prst="rect">
             <a:avLst/>
@@ -28258,53 +29589,34 @@
           </a:bodyPr>
           <a:lstStyle/>
           <a:p>
+            <a:pPr indent="0" lvl="0" marL="0" rtl="0" algn="l">
+              <a:spcBef>
+                <a:spcPts val="1100"/>
+              </a:spcBef>
+              <a:spcAft>
+                <a:spcPts val="0"/>
+              </a:spcAft>
+              <a:buNone/>
+            </a:pPr>
             <a:r>
-              <a:t>3</a:t>
+              <a:t/>
             </a:r>
+            <a:endParaRPr/>
           </a:p>
         </p:txBody>
       </p:sp>
       <p:sp>
         <p:nvSpPr>
-          <p:cNvPr id="745" name="Google Shape;745;p81"/>
+          <p:cNvPr id="401" name="Google Shape;401;p51"/>
           <p:cNvSpPr txBox="1"/>
           <p:nvPr>
-            <p:ph type="title"/>
+            <p:ph idx="2" type="subTitle"/>
           </p:nvPr>
         </p:nvSpPr>
         <p:spPr>
           <a:xfrm>
-            <a:off x="749245" y="535597"/>
-            <a:ext cx="10659300" cy="583500"/>
-          </a:xfrm>
-          <a:prstGeom prst="rect">
-            <a:avLst/>
-          </a:prstGeom>
-        </p:spPr>
-        <p:txBody>
-          <a:bodyPr anchorCtr="0" anchor="ctr" bIns="0" lIns="0" spcFirstLastPara="1" rIns="0" wrap="square" tIns="0">
-            <a:noAutofit/>
-          </a:bodyPr>
-          <a:lstStyle/>
-          <a:p>
-            <a:r>
-              <a:t>Buyer KPIs and synthetic demo baseline</a:t>
-            </a:r>
-          </a:p>
-        </p:txBody>
-      </p:sp>
-      <p:sp>
-        <p:nvSpPr>
-          <p:cNvPr id="746" name="Google Shape;746;p81"/>
-          <p:cNvSpPr txBox="1"/>
-          <p:nvPr>
-            <p:ph idx="1" type="subTitle"/>
-          </p:nvPr>
-        </p:nvSpPr>
-        <p:spPr>
-          <a:xfrm>
-            <a:off x="764809" y="1174702"/>
-            <a:ext cx="10659300" cy="583500"/>
+            <a:off x="764709" y="1988833"/>
+            <a:ext cx="5110800" cy="1785300"/>
           </a:xfrm>
           <a:prstGeom prst="rect">
             <a:avLst/>
@@ -28316,23 +29628,50 @@
           </a:bodyPr>
           <a:lstStyle/>
           <a:p>
+            <a:pPr indent="0" lvl="0" marL="0" rtl="0" algn="l">
+              <a:spcBef>
+                <a:spcPts val="1100"/>
+              </a:spcBef>
+              <a:spcAft>
+                <a:spcPts val="0"/>
+              </a:spcAft>
+              <a:buNone/>
+            </a:pPr>
             <a:r>
-              <a:t>Designed values demonstrate the workflow—not real institutional performance.</a:t>
+              <a:rPr lang="en"/>
+              <a:t>60,000</a:t>
             </a:r>
+            <a:endParaRPr/>
+          </a:p>
+          <a:p>
+            <a:pPr indent="0" lvl="0" marL="0" rtl="0" algn="l">
+              <a:spcBef>
+                <a:spcPts val="1100"/>
+              </a:spcBef>
+              <a:spcAft>
+                <a:spcPts val="0"/>
+              </a:spcAft>
+              <a:buNone/>
+            </a:pPr>
+            <a:r>
+              <a:rPr lang="en"/>
+              <a:t>Immutable daily risk-history rows</a:t>
+            </a:r>
+            <a:endParaRPr/>
           </a:p>
         </p:txBody>
       </p:sp>
       <p:sp>
         <p:nvSpPr>
-          <p:cNvPr id="747" name="Google Shape;747;p81"/>
+          <p:cNvPr id="402" name="Google Shape;402;p51"/>
           <p:cNvSpPr txBox="1"/>
           <p:nvPr>
-            <p:ph idx="2" type="subTitle"/>
+            <p:ph idx="3" type="subTitle"/>
           </p:nvPr>
         </p:nvSpPr>
         <p:spPr>
           <a:xfrm>
-            <a:off x="764709" y="1988833"/>
+            <a:off x="6313520" y="1988833"/>
             <a:ext cx="5110800" cy="1785300"/>
           </a:xfrm>
           <a:prstGeom prst="rect">
@@ -28345,28 +29684,50 @@
           </a:bodyPr>
           <a:lstStyle/>
           <a:p>
+            <a:pPr indent="0" lvl="0" marL="0" rtl="0" algn="l">
+              <a:spcBef>
+                <a:spcPts val="1100"/>
+              </a:spcBef>
+              <a:spcAft>
+                <a:spcPts val="0"/>
+              </a:spcAft>
+              <a:buNone/>
+            </a:pPr>
             <a:r>
-              <a:t>88.88%</a:t>
+              <a:rPr lang="en"/>
+              <a:t>0.9669</a:t>
             </a:r>
+            <a:endParaRPr/>
           </a:p>
           <a:p>
+            <a:pPr indent="0" lvl="0" marL="0" rtl="0" algn="l">
+              <a:spcBef>
+                <a:spcPts val="1100"/>
+              </a:spcBef>
+              <a:spcAft>
+                <a:spcPts val="0"/>
+              </a:spcAft>
+              <a:buNone/>
+            </a:pPr>
             <a:r>
-              <a:t>Synthetic retention rate</a:t>
+              <a:rPr lang="en"/>
+              <a:t>Synthetic validation PR-AUC</a:t>
             </a:r>
+            <a:endParaRPr/>
           </a:p>
         </p:txBody>
       </p:sp>
       <p:sp>
         <p:nvSpPr>
-          <p:cNvPr id="748" name="Google Shape;748;p81"/>
+          <p:cNvPr id="403" name="Google Shape;403;p51"/>
           <p:cNvSpPr txBox="1"/>
           <p:nvPr>
-            <p:ph idx="3" type="subTitle"/>
+            <p:ph idx="4" type="subTitle"/>
           </p:nvPr>
         </p:nvSpPr>
         <p:spPr>
           <a:xfrm>
-            <a:off x="6313520" y="1988833"/>
+            <a:off x="764709" y="4302068"/>
             <a:ext cx="5110800" cy="1785300"/>
           </a:xfrm>
           <a:prstGeom prst="rect">
@@ -28379,28 +29740,50 @@
           </a:bodyPr>
           <a:lstStyle/>
           <a:p>
+            <a:pPr indent="0" lvl="0" marL="0" rtl="0" algn="l">
+              <a:spcBef>
+                <a:spcPts val="1100"/>
+              </a:spcBef>
+              <a:spcAft>
+                <a:spcPts val="0"/>
+              </a:spcAft>
+              <a:buNone/>
+            </a:pPr>
             <a:r>
-              <a:t>2,664</a:t>
+              <a:rPr lang="en"/>
+              <a:t>SUCCESS</a:t>
             </a:r>
+            <a:endParaRPr/>
           </a:p>
           <a:p>
+            <a:pPr indent="0" lvl="0" marL="0" rtl="0" algn="l">
+              <a:spcBef>
+                <a:spcPts val="1100"/>
+              </a:spcBef>
+              <a:spcAft>
+                <a:spcPts val="0"/>
+              </a:spcAft>
+              <a:buNone/>
+            </a:pPr>
             <a:r>
-              <a:t>Initially elevated-risk students</a:t>
+              <a:rPr lang="en"/>
+              <a:t>Full workflow and idempotent replay</a:t>
             </a:r>
+            <a:endParaRPr/>
           </a:p>
         </p:txBody>
       </p:sp>
       <p:sp>
         <p:nvSpPr>
-          <p:cNvPr id="749" name="Google Shape;749;p81"/>
+          <p:cNvPr id="404" name="Google Shape;404;p51"/>
           <p:cNvSpPr txBox="1"/>
           <p:nvPr>
-            <p:ph idx="4" type="subTitle"/>
+            <p:ph idx="5" type="subTitle"/>
           </p:nvPr>
         </p:nvSpPr>
         <p:spPr>
           <a:xfrm>
-            <a:off x="764709" y="4302068"/>
+            <a:off x="6313520" y="4302068"/>
             <a:ext cx="5110800" cy="1785300"/>
           </a:xfrm>
           <a:prstGeom prst="rect">
@@ -28413,29 +29796,51 @@
           </a:bodyPr>
           <a:lstStyle/>
           <a:p>
+            <a:pPr indent="0" lvl="0" marL="0" rtl="0" algn="l">
+              <a:spcBef>
+                <a:spcPts val="1100"/>
+              </a:spcBef>
+              <a:spcAft>
+                <a:spcPts val="0"/>
+              </a:spcAft>
+              <a:buNone/>
+            </a:pPr>
             <a:r>
-              <a:t>$24.1M</a:t>
+              <a:rPr lang="en"/>
+              <a:t>ONLINE</a:t>
             </a:r>
+            <a:endParaRPr/>
           </a:p>
           <a:p>
+            <a:pPr indent="0" lvl="0" marL="0" rtl="0" algn="l">
+              <a:spcBef>
+                <a:spcPts val="1100"/>
+              </a:spcBef>
+              <a:spcAft>
+                <a:spcPts val="0"/>
+              </a:spcAft>
+              <a:buNone/>
+            </a:pPr>
             <a:r>
-              <a:t>Estimated synthetic tuition exposure</a:t>
+              <a:rPr lang="en"/>
+              <a:t>Both serving sync tables</a:t>
             </a:r>
+            <a:endParaRPr/>
           </a:p>
         </p:txBody>
       </p:sp>
       <p:sp>
         <p:nvSpPr>
-          <p:cNvPr id="750" name="Google Shape;750;p81"/>
+          <p:cNvPr id="405" name="Google Shape;405;p51"/>
           <p:cNvSpPr txBox="1"/>
           <p:nvPr>
-            <p:ph idx="5" type="subTitle"/>
+            <p:ph idx="12" type="sldNum"/>
           </p:nvPr>
         </p:nvSpPr>
         <p:spPr>
           <a:xfrm>
-            <a:off x="6313520" y="4302068"/>
-            <a:ext cx="5110800" cy="1785300"/>
+            <a:off x="11097669" y="6473300"/>
+            <a:ext cx="324300" cy="186600"/>
           </a:xfrm>
           <a:prstGeom prst="rect">
             <a:avLst/>
@@ -28447,14 +29852,20 @@
           </a:bodyPr>
           <a:lstStyle/>
           <a:p>
-            <a:r>
-              <a:t>20,000</a:t>
-            </a:r>
-          </a:p>
-          <a:p>
-            <a:r>
-              <a:t>Current synthetic students</a:t>
-            </a:r>
+            <a:pPr indent="0" lvl="0" marL="0" rtl="0" algn="r">
+              <a:spcBef>
+                <a:spcPts val="0"/>
+              </a:spcBef>
+              <a:spcAft>
+                <a:spcPts val="0"/>
+              </a:spcAft>
+              <a:buNone/>
+            </a:pPr>
+            <a:fld id="{00000000-1234-1234-1234-123412341234}" type="slidenum">
+              <a:rPr lang="en"/>
+              <a:t>‹#›</a:t>
+            </a:fld>
+            <a:endParaRPr/>
           </a:p>
         </p:txBody>
       </p:sp>
@@ -28466,28 +29877,75 @@
 </p:sld>
 </file>
 
-<file path=ppt/slides/slide102.xml><?xml version="1.0" encoding="utf-8"?>
-<p:sld xmlns:a="http://schemas.openxmlformats.org/drawingml/2006/main" xmlns:p="http://schemas.openxmlformats.org/presentationml/2006/main" xmlns:r="http://schemas.openxmlformats.org/officeDocument/2006/relationships">
+<file path=ppt/slides/slide11.xml><?xml version="1.0" encoding="utf-8"?>
+<p:sld xmlns:a="http://schemas.openxmlformats.org/drawingml/2006/main" xmlns:r="http://schemas.openxmlformats.org/officeDocument/2006/relationships" xmlns:mc="http://schemas.openxmlformats.org/markup-compatibility/2006" xmlns:mv="urn:schemas-microsoft-com:mac:vml" xmlns:p="http://schemas.openxmlformats.org/presentationml/2006/main" xmlns:c="http://schemas.openxmlformats.org/drawingml/2006/chart" xmlns:dgm="http://schemas.openxmlformats.org/drawingml/2006/diagram" xmlns:o="urn:schemas-microsoft-com:office:office" xmlns:v="urn:schemas-microsoft-com:vml" xmlns:pvml="urn:schemas-microsoft-com:office:powerpoint" xmlns:com="http://schemas.openxmlformats.org/drawingml/2006/compatibility" xmlns:p14="http://schemas.microsoft.com/office/powerpoint/2010/main" xmlns:p15="http://schemas.microsoft.com/office/powerpoint/2012/main" xmlns:ahyp="http://schemas.microsoft.com/office/drawing/2018/hyperlinkcolor">
   <p:cSld>
     <p:spTree>
       <p:nvGrpSpPr>
-        <p:cNvPr id="1" name=""/>
+        <p:cNvPr id="409" name="Shape 409"/>
         <p:cNvGrpSpPr/>
         <p:nvPr/>
       </p:nvGrpSpPr>
-      <p:grpSpPr/>
+      <p:grpSpPr>
+        <a:xfrm>
+          <a:off x="0" y="0"/>
+          <a:ext cx="0" cy="0"/>
+          <a:chOff x="0" y="0"/>
+          <a:chExt cx="0" cy="0"/>
+        </a:xfrm>
+      </p:grpSpPr>
       <p:sp>
         <p:nvSpPr>
-          <p:cNvPr id="694" name="Google Shape;694;p76"/>
+          <p:cNvPr id="410" name="Google Shape;410;p52"/>
           <p:cNvSpPr txBox="1"/>
           <p:nvPr>
-            <p:ph idx="12" type="sldNum"/>
+            <p:ph type="title"/>
           </p:nvPr>
         </p:nvSpPr>
         <p:spPr>
           <a:xfrm>
-            <a:off x="11097669" y="6473300"/>
-            <a:ext cx="324300" cy="186600"/>
+            <a:off x="749245" y="535597"/>
+            <a:ext cx="10659300" cy="583500"/>
+          </a:xfrm>
+          <a:prstGeom prst="rect">
+            <a:avLst/>
+          </a:prstGeom>
+        </p:spPr>
+        <p:txBody>
+          <a:bodyPr anchorCtr="0" anchor="ctr" bIns="0" lIns="0" spcFirstLastPara="1" rIns="0" wrap="square" tIns="0">
+            <a:noAutofit/>
+          </a:bodyPr>
+          <a:lstStyle/>
+          <a:p>
+            <a:pPr indent="0" lvl="0" marL="0" rtl="0" algn="l">
+              <a:spcBef>
+                <a:spcPts val="0"/>
+              </a:spcBef>
+              <a:spcAft>
+                <a:spcPts val="0"/>
+              </a:spcAft>
+              <a:buNone/>
+            </a:pPr>
+            <a:r>
+              <a:rPr lang="en"/>
+              <a:t>Trust is designed in—and limitations stay visible</a:t>
+            </a:r>
+            <a:endParaRPr/>
+          </a:p>
+        </p:txBody>
+      </p:sp>
+      <p:sp>
+        <p:nvSpPr>
+          <p:cNvPr id="411" name="Google Shape;411;p52"/>
+          <p:cNvSpPr txBox="1"/>
+          <p:nvPr>
+            <p:ph idx="1" type="subTitle"/>
+          </p:nvPr>
+        </p:nvSpPr>
+        <p:spPr>
+          <a:xfrm>
+            <a:off x="764809" y="1174702"/>
+            <a:ext cx="10659300" cy="583500"/>
           </a:xfrm>
           <a:prstGeom prst="rect">
             <a:avLst/>
@@ -28499,53 +29957,34 @@
           </a:bodyPr>
           <a:lstStyle/>
           <a:p>
+            <a:pPr indent="0" lvl="0" marL="0" rtl="0" algn="l">
+              <a:spcBef>
+                <a:spcPts val="1100"/>
+              </a:spcBef>
+              <a:spcAft>
+                <a:spcPts val="0"/>
+              </a:spcAft>
+              <a:buNone/>
+            </a:pPr>
             <a:r>
-              <a:t>4</a:t>
+              <a:t/>
             </a:r>
+            <a:endParaRPr/>
           </a:p>
         </p:txBody>
       </p:sp>
       <p:sp>
         <p:nvSpPr>
-          <p:cNvPr id="695" name="Google Shape;695;p76"/>
+          <p:cNvPr id="412" name="Google Shape;412;p52"/>
           <p:cNvSpPr txBox="1"/>
           <p:nvPr>
-            <p:ph type="title"/>
+            <p:ph idx="2" type="body"/>
           </p:nvPr>
         </p:nvSpPr>
         <p:spPr>
           <a:xfrm>
-            <a:off x="749245" y="535597"/>
-            <a:ext cx="10659300" cy="583500"/>
-          </a:xfrm>
-          <a:prstGeom prst="rect">
-            <a:avLst/>
-          </a:prstGeom>
-        </p:spPr>
-        <p:txBody>
-          <a:bodyPr anchorCtr="0" anchor="ctr" bIns="0" lIns="0" spcFirstLastPara="1" rIns="0" wrap="square" tIns="0">
-            <a:noAutofit/>
-          </a:bodyPr>
-          <a:lstStyle/>
-          <a:p>
-            <a:r>
-              <a:t>Current-state friction delays action</a:t>
-            </a:r>
-          </a:p>
-        </p:txBody>
-      </p:sp>
-      <p:sp>
-        <p:nvSpPr>
-          <p:cNvPr id="696" name="Google Shape;696;p76"/>
-          <p:cNvSpPr txBox="1"/>
-          <p:nvPr>
-            <p:ph idx="1" type="body"/>
-          </p:nvPr>
-        </p:nvSpPr>
-        <p:spPr>
-          <a:xfrm>
-            <a:off x="761809" y="2825567"/>
-            <a:ext cx="3224100" cy="3233700"/>
+            <a:off x="761809" y="2691865"/>
+            <a:ext cx="4518900" cy="3367200"/>
           </a:xfrm>
           <a:prstGeom prst="rect">
             <a:avLst/>
@@ -28557,24 +29996,99 @@
           </a:bodyPr>
           <a:lstStyle/>
           <a:p>
+            <a:pPr indent="0" lvl="0" marL="0" rtl="0" algn="l">
+              <a:spcBef>
+                <a:spcPts val="1100"/>
+              </a:spcBef>
+              <a:spcAft>
+                <a:spcPts val="0"/>
+              </a:spcAft>
+              <a:buNone/>
+            </a:pPr>
             <a:r>
-              <a:t>Attendance, LMS, finance, enrollment, and case data arrive on different clocks.</a:t>
+              <a:rPr lang="en"/>
+              <a:t>Row-filtered advisor access</a:t>
             </a:r>
+            <a:endParaRPr/>
+          </a:p>
+          <a:p>
+            <a:pPr indent="0" lvl="0" marL="0" rtl="0" algn="l">
+              <a:spcBef>
+                <a:spcPts val="1100"/>
+              </a:spcBef>
+              <a:spcAft>
+                <a:spcPts val="0"/>
+              </a:spcAft>
+              <a:buNone/>
+            </a:pPr>
+            <a:r>
+              <a:rPr lang="en"/>
+              <a:t>Aggregate-only executive products</a:t>
+            </a:r>
+            <a:endParaRPr/>
+          </a:p>
+          <a:p>
+            <a:pPr indent="0" lvl="0" marL="0" rtl="0" algn="l">
+              <a:spcBef>
+                <a:spcPts val="1100"/>
+              </a:spcBef>
+              <a:spcAft>
+                <a:spcPts val="0"/>
+              </a:spcAft>
+              <a:buNone/>
+            </a:pPr>
+            <a:r>
+              <a:rPr lang="en"/>
+              <a:t>Read-only serving tables</a:t>
+            </a:r>
+            <a:endParaRPr/>
+          </a:p>
+          <a:p>
+            <a:pPr indent="0" lvl="0" marL="0" rtl="0" algn="l">
+              <a:spcBef>
+                <a:spcPts val="1100"/>
+              </a:spcBef>
+              <a:spcAft>
+                <a:spcPts val="0"/>
+              </a:spcAft>
+              <a:buNone/>
+            </a:pPr>
+            <a:r>
+              <a:rPr lang="en"/>
+              <a:t>Cited AI and inspectable SQL</a:t>
+            </a:r>
+            <a:endParaRPr/>
+          </a:p>
+          <a:p>
+            <a:pPr indent="0" lvl="0" marL="0" rtl="0" algn="l">
+              <a:spcBef>
+                <a:spcPts val="1100"/>
+              </a:spcBef>
+              <a:spcAft>
+                <a:spcPts val="0"/>
+              </a:spcAft>
+              <a:buNone/>
+            </a:pPr>
+            <a:r>
+              <a:rPr lang="en"/>
+              <a:t>Visible stale, partial, and error states</a:t>
+            </a:r>
+            <a:endParaRPr/>
           </a:p>
         </p:txBody>
       </p:sp>
       <p:sp>
         <p:nvSpPr>
-          <p:cNvPr id="697" name="Google Shape;697;p76"/>
+          <p:cNvPr id="413" name="Google Shape;413;p52"/>
           <p:cNvSpPr txBox="1"/>
           <p:nvPr>
-            <p:ph idx="2" type="subTitle"/>
+            <p:ph idx="3" type="body"/>
           </p:nvPr>
         </p:nvSpPr>
         <p:spPr>
           <a:xfrm>
-            <a:off x="764809" y="1174702"/>
-            <a:ext cx="10659300" cy="583500"/>
+            <a:off x="6916469" y="2691865"/>
+            <a:ext cx="4518900" cy="3367200"/>
           </a:xfrm>
           <a:prstGeom prst="rect">
             <a:avLst/>
@@ -28586,24 +30100,99 @@
           </a:bodyPr>
           <a:lstStyle/>
           <a:p>
+            <a:pPr indent="0" lvl="0" marL="0" rtl="0" algn="l">
+              <a:spcBef>
+                <a:spcPts val="1100"/>
+              </a:spcBef>
+              <a:spcAft>
+                <a:spcPts val="0"/>
+              </a:spcAft>
+              <a:buNone/>
+            </a:pPr>
             <a:r>
-              <a:t>The problem is operational, not simply predictive.</a:t>
+              <a:rPr lang="en"/>
+              <a:t>Synthetic data and designed signals</a:t>
             </a:r>
+            <a:endParaRPr/>
+          </a:p>
+          <a:p>
+            <a:pPr indent="0" lvl="0" marL="0" rtl="0" algn="l">
+              <a:spcBef>
+                <a:spcPts val="1100"/>
+              </a:spcBef>
+              <a:spcAft>
+                <a:spcPts val="0"/>
+              </a:spcAft>
+              <a:buNone/>
+            </a:pPr>
+            <a:r>
+              <a:rPr lang="en"/>
+              <a:t>No causal impact claim</a:t>
+            </a:r>
+            <a:endParaRPr/>
+          </a:p>
+          <a:p>
+            <a:pPr indent="0" lvl="0" marL="0" rtl="0" algn="l">
+              <a:spcBef>
+                <a:spcPts val="1100"/>
+              </a:spcBef>
+              <a:spcAft>
+                <a:spcPts val="0"/>
+              </a:spcAft>
+              <a:buNone/>
+            </a:pPr>
+            <a:r>
+              <a:rPr lang="en"/>
+              <a:t>No automated adverse action</a:t>
+            </a:r>
+            <a:endParaRPr/>
+          </a:p>
+          <a:p>
+            <a:pPr indent="0" lvl="0" marL="0" rtl="0" algn="l">
+              <a:spcBef>
+                <a:spcPts val="1100"/>
+              </a:spcBef>
+              <a:spcAft>
+                <a:spcPts val="0"/>
+              </a:spcAft>
+              <a:buNone/>
+            </a:pPr>
+            <a:r>
+              <a:rPr lang="en"/>
+              <a:t>No institutional validation yet</a:t>
+            </a:r>
+            <a:endParaRPr/>
+          </a:p>
+          <a:p>
+            <a:pPr indent="0" lvl="0" marL="0" rtl="0" algn="l">
+              <a:spcBef>
+                <a:spcPts val="1100"/>
+              </a:spcBef>
+              <a:spcAft>
+                <a:spcPts val="0"/>
+              </a:spcAft>
+              <a:buNone/>
+            </a:pPr>
+            <a:r>
+              <a:rPr lang="en"/>
+              <a:t>Triggered daily—not real time</a:t>
+            </a:r>
+            <a:endParaRPr/>
           </a:p>
         </p:txBody>
       </p:sp>
       <p:sp>
         <p:nvSpPr>
-          <p:cNvPr id="698" name="Google Shape;698;p76"/>
+          <p:cNvPr id="414" name="Google Shape;414;p52"/>
           <p:cNvSpPr txBox="1"/>
           <p:nvPr>
-            <p:ph idx="3" type="body"/>
+            <p:ph idx="4" type="subTitle"/>
           </p:nvPr>
         </p:nvSpPr>
         <p:spPr>
           <a:xfrm>
-            <a:off x="4482478" y="2825567"/>
-            <a:ext cx="3224100" cy="3233700"/>
+            <a:off x="795814" y="1970333"/>
+            <a:ext cx="4484400" cy="643200"/>
           </a:xfrm>
           <a:prstGeom prst="rect">
             <a:avLst/>
@@ -28615,24 +30204,35 @@
           </a:bodyPr>
           <a:lstStyle/>
           <a:p>
+            <a:pPr indent="0" lvl="0" marL="0" rtl="0" algn="l">
+              <a:spcBef>
+                <a:spcPts val="1100"/>
+              </a:spcBef>
+              <a:spcAft>
+                <a:spcPts val="0"/>
+              </a:spcAft>
+              <a:buNone/>
+            </a:pPr>
             <a:r>
-              <a:t>Advisors reconcile data manually and lack a defensible daily queue.</a:t>
+              <a:rPr lang="en"/>
+              <a:t>Trust controls</a:t>
             </a:r>
+            <a:endParaRPr/>
           </a:p>
         </p:txBody>
       </p:sp>
       <p:sp>
         <p:nvSpPr>
-          <p:cNvPr id="699" name="Google Shape;699;p76"/>
+          <p:cNvPr id="415" name="Google Shape;415;p52"/>
           <p:cNvSpPr txBox="1"/>
           <p:nvPr>
-            <p:ph idx="4" type="body"/>
+            <p:ph idx="5" type="subTitle"/>
           </p:nvPr>
         </p:nvSpPr>
         <p:spPr>
           <a:xfrm>
-            <a:off x="8167756" y="2825567"/>
-            <a:ext cx="3224100" cy="3233700"/>
+            <a:off x="6933565" y="1970333"/>
+            <a:ext cx="4485000" cy="643200"/>
           </a:xfrm>
           <a:prstGeom prst="rect">
             <a:avLst/>
@@ -28644,24 +30244,35 @@
           </a:bodyPr>
           <a:lstStyle/>
           <a:p>
+            <a:pPr indent="0" lvl="0" marL="0" rtl="0" algn="l">
+              <a:spcBef>
+                <a:spcPts val="1100"/>
+              </a:spcBef>
+              <a:spcAft>
+                <a:spcPts val="0"/>
+              </a:spcAft>
+              <a:buNone/>
+            </a:pPr>
             <a:r>
-              <a:t>Outreach and outcomes are disconnected from executive coverage and analytics.</a:t>
+              <a:rPr lang="en"/>
+              <a:t>Honest boundaries</a:t>
             </a:r>
+            <a:endParaRPr/>
           </a:p>
         </p:txBody>
       </p:sp>
       <p:sp>
         <p:nvSpPr>
-          <p:cNvPr id="700" name="Google Shape;700;p76"/>
+          <p:cNvPr id="416" name="Google Shape;416;p52"/>
           <p:cNvSpPr txBox="1"/>
           <p:nvPr>
-            <p:ph idx="5" type="subTitle"/>
+            <p:ph idx="12" type="sldNum"/>
           </p:nvPr>
         </p:nvSpPr>
         <p:spPr>
           <a:xfrm>
-            <a:off x="786070" y="1970336"/>
-            <a:ext cx="3199500" cy="643200"/>
+            <a:off x="11097669" y="6473300"/>
+            <a:ext cx="324300" cy="186600"/>
           </a:xfrm>
           <a:prstGeom prst="rect">
             <a:avLst/>
@@ -28673,67 +30284,20 @@
           </a:bodyPr>
           <a:lstStyle/>
           <a:p>
-            <a:r>
-              <a:t>Fragmented signals</a:t>
-            </a:r>
-          </a:p>
-        </p:txBody>
-      </p:sp>
-      <p:sp>
-        <p:nvSpPr>
-          <p:cNvPr id="701" name="Google Shape;701;p76"/>
-          <p:cNvSpPr txBox="1"/>
-          <p:nvPr>
-            <p:ph idx="6" type="subTitle"/>
-          </p:nvPr>
-        </p:nvSpPr>
-        <p:spPr>
-          <a:xfrm>
-            <a:off x="4494675" y="1970336"/>
-            <a:ext cx="3199500" cy="643200"/>
-          </a:xfrm>
-          <a:prstGeom prst="rect">
-            <a:avLst/>
-          </a:prstGeom>
-        </p:spPr>
-        <p:txBody>
-          <a:bodyPr anchorCtr="0" anchor="t" bIns="0" lIns="0" spcFirstLastPara="1" rIns="0" wrap="square" tIns="0">
-            <a:noAutofit/>
-          </a:bodyPr>
-          <a:lstStyle/>
-          <a:p>
-            <a:r>
-              <a:t>Inconsistent prioritization</a:t>
-            </a:r>
-          </a:p>
-        </p:txBody>
-      </p:sp>
-      <p:sp>
-        <p:nvSpPr>
-          <p:cNvPr id="702" name="Google Shape;702;p76"/>
-          <p:cNvSpPr txBox="1"/>
-          <p:nvPr>
-            <p:ph idx="7" type="subTitle"/>
-          </p:nvPr>
-        </p:nvSpPr>
-        <p:spPr>
-          <a:xfrm>
-            <a:off x="8179953" y="1970336"/>
-            <a:ext cx="3199500" cy="643200"/>
-          </a:xfrm>
-          <a:prstGeom prst="rect">
-            <a:avLst/>
-          </a:prstGeom>
-        </p:spPr>
-        <p:txBody>
-          <a:bodyPr anchorCtr="0" anchor="t" bIns="0" lIns="0" spcFirstLastPara="1" rIns="0" wrap="square" tIns="0">
-            <a:noAutofit/>
-          </a:bodyPr>
-          <a:lstStyle/>
-          <a:p>
-            <a:r>
-              <a:t>Weak feedback loop</a:t>
-            </a:r>
+            <a:pPr indent="0" lvl="0" marL="0" rtl="0" algn="r">
+              <a:spcBef>
+                <a:spcPts val="0"/>
+              </a:spcBef>
+              <a:spcAft>
+                <a:spcPts val="0"/>
+              </a:spcAft>
+              <a:buNone/>
+            </a:pPr>
+            <a:fld id="{00000000-1234-1234-1234-123412341234}" type="slidenum">
+              <a:rPr lang="en"/>
+              <a:t>‹#›</a:t>
+            </a:fld>
+            <a:endParaRPr/>
           </a:p>
         </p:txBody>
       </p:sp>
@@ -28745,19 +30309,26 @@
 </p:sld>
 </file>
 
-<file path=ppt/slides/slide103.xml><?xml version="1.0" encoding="utf-8"?>
-<p:sld xmlns:a="http://schemas.openxmlformats.org/drawingml/2006/main" xmlns:p="http://schemas.openxmlformats.org/presentationml/2006/main" xmlns:r="http://schemas.openxmlformats.org/officeDocument/2006/relationships">
+<file path=ppt/slides/slide12.xml><?xml version="1.0" encoding="utf-8"?>
+<p:sld xmlns:a="http://schemas.openxmlformats.org/drawingml/2006/main" xmlns:r="http://schemas.openxmlformats.org/officeDocument/2006/relationships" xmlns:mc="http://schemas.openxmlformats.org/markup-compatibility/2006" xmlns:mv="urn:schemas-microsoft-com:mac:vml" xmlns:p="http://schemas.openxmlformats.org/presentationml/2006/main" xmlns:c="http://schemas.openxmlformats.org/drawingml/2006/chart" xmlns:dgm="http://schemas.openxmlformats.org/drawingml/2006/diagram" xmlns:o="urn:schemas-microsoft-com:office:office" xmlns:v="urn:schemas-microsoft-com:vml" xmlns:pvml="urn:schemas-microsoft-com:office:powerpoint" xmlns:com="http://schemas.openxmlformats.org/drawingml/2006/compatibility" xmlns:p14="http://schemas.microsoft.com/office/powerpoint/2010/main" xmlns:p15="http://schemas.microsoft.com/office/powerpoint/2012/main" xmlns:ahyp="http://schemas.microsoft.com/office/drawing/2018/hyperlinkcolor">
   <p:cSld>
     <p:spTree>
       <p:nvGrpSpPr>
-        <p:cNvPr id="1" name=""/>
+        <p:cNvPr id="420" name="Shape 420"/>
         <p:cNvGrpSpPr/>
         <p:nvPr/>
       </p:nvGrpSpPr>
-      <p:grpSpPr/>
+      <p:grpSpPr>
+        <a:xfrm>
+          <a:off x="0" y="0"/>
+          <a:ext cx="0" cy="0"/>
+          <a:chOff x="0" y="0"/>
+          <a:chExt cx="0" cy="0"/>
+        </a:xfrm>
+      </p:grpSpPr>
       <p:sp>
         <p:nvSpPr>
-          <p:cNvPr id="595" name="Google Shape;595;p65"/>
+          <p:cNvPr id="421" name="Google Shape;421;p53"/>
           <p:cNvSpPr txBox="1"/>
           <p:nvPr>
             <p:ph idx="12" type="sldNum"/>
@@ -28778,126 +30349,20 @@
           </a:bodyPr>
           <a:lstStyle/>
           <a:p>
-            <a:r>
-              <a:t>5</a:t>
-            </a:r>
-          </a:p>
-        </p:txBody>
-      </p:sp>
-      <p:sp>
-        <p:nvSpPr>
-          <p:cNvPr id="596" name="Google Shape;596;p65"/>
-          <p:cNvSpPr txBox="1"/>
-          <p:nvPr>
-            <p:ph type="title"/>
-          </p:nvPr>
-        </p:nvSpPr>
-        <p:spPr>
-          <a:xfrm>
-            <a:off x="749245" y="535597"/>
-            <a:ext cx="10659300" cy="583500"/>
-          </a:xfrm>
-          <a:prstGeom prst="rect">
-            <a:avLst/>
-          </a:prstGeom>
-        </p:spPr>
-        <p:txBody>
-          <a:bodyPr anchorCtr="0" anchor="ctr" bIns="0" lIns="0" spcFirstLastPara="1" rIns="0" wrap="square" tIns="0">
-            <a:noAutofit/>
-          </a:bodyPr>
-          <a:lstStyle/>
-          <a:p>
-            <a:r>
-              <a:t>A closed-loop workflow from signal to action</a:t>
-            </a:r>
-          </a:p>
-        </p:txBody>
-      </p:sp>
-      <p:sp>
-        <p:nvSpPr>
-          <p:cNvPr id="597" name="Google Shape;597;p65"/>
-          <p:cNvSpPr txBox="1"/>
-          <p:nvPr>
-            <p:ph idx="1" type="subTitle"/>
-          </p:nvPr>
-        </p:nvSpPr>
-        <p:spPr>
-          <a:xfrm>
-            <a:off x="764809" y="1174702"/>
-            <a:ext cx="10659300" cy="583500"/>
-          </a:xfrm>
-          <a:prstGeom prst="rect">
-            <a:avLst/>
-          </a:prstGeom>
-        </p:spPr>
-        <p:txBody>
-          <a:bodyPr anchorCtr="0" anchor="t" bIns="0" lIns="0" spcFirstLastPara="1" rIns="0" wrap="square" tIns="0">
-            <a:noAutofit/>
-          </a:bodyPr>
-          <a:lstStyle/>
-          <a:p>
-            <a:r>
-              <a:t>One governed path connects observation, human action, and analytical learning.</a:t>
-            </a:r>
-          </a:p>
-        </p:txBody>
-      </p:sp>
-      <p:sp>
-        <p:nvSpPr>
-          <p:cNvPr id="598" name="Google Shape;598;p65"/>
-          <p:cNvSpPr txBox="1"/>
-          <p:nvPr>
-            <p:ph idx="2" type="body"/>
-          </p:nvPr>
-        </p:nvSpPr>
-        <p:spPr>
-          <a:xfrm>
-            <a:off x="761809" y="1988833"/>
-            <a:ext cx="10659300" cy="4149900"/>
-          </a:xfrm>
-          <a:prstGeom prst="rect">
-            <a:avLst/>
-          </a:prstGeom>
-        </p:spPr>
-        <p:txBody>
-          <a:bodyPr anchorCtr="0" anchor="t" bIns="0" lIns="0" spcFirstLastPara="1" rIns="0" wrap="square" tIns="0">
-            <a:noAutofit/>
-          </a:bodyPr>
-          <a:lstStyle/>
-          <a:p>
-            <a:r>
-              <a:t>1. Observe — trigger one deterministic synthetic day</a:t>
-            </a:r>
-          </a:p>
-          <a:p>
-            <a:r>
-              <a:t>2. Govern — apply quality, lineage, grants, and row filters</a:t>
-            </a:r>
-          </a:p>
-          <a:p>
-            <a:r>
-              <a:t>3. Prioritize — score current snapshots with a versioned ML model</a:t>
-            </a:r>
-          </a:p>
-          <a:p>
-            <a:r>
-              <a:t>4. Assist — generate cited, evaluated advisor briefings</a:t>
-            </a:r>
-          </a:p>
-          <a:p>
-            <a:r>
-              <a:t>5. Act — record interventions transactionally in Lakebase</a:t>
-            </a:r>
-          </a:p>
-          <a:p>
-            <a:r>
-              <a:t>6. Learn — return CDC to governed Gold</a:t>
-            </a:r>
-          </a:p>
-          <a:p>
-            <a:r>
-              <a:t>7. Understand — ask embedded Genie and inspect its SQL</a:t>
-            </a:r>
+            <a:pPr indent="0" lvl="0" marL="0" rtl="0" algn="r">
+              <a:spcBef>
+                <a:spcPts val="0"/>
+              </a:spcBef>
+              <a:spcAft>
+                <a:spcPts val="0"/>
+              </a:spcAft>
+              <a:buNone/>
+            </a:pPr>
+            <a:fld id="{00000000-1234-1234-1234-123412341234}" type="slidenum">
+              <a:rPr lang="en"/>
+              <a:t>‹#›</a:t>
+            </a:fld>
+            <a:endParaRPr/>
           </a:p>
         </p:txBody>
       </p:sp>
@@ -28909,19 +30374,66 @@
 </p:sld>
 </file>
 
-<file path=ppt/slides/slide104.xml><?xml version="1.0" encoding="utf-8"?>
-<p:sld xmlns:a="http://schemas.openxmlformats.org/drawingml/2006/main" xmlns:p="http://schemas.openxmlformats.org/presentationml/2006/main" xmlns:r="http://schemas.openxmlformats.org/officeDocument/2006/relationships">
+<file path=ppt/slides/slide2.xml><?xml version="1.0" encoding="utf-8"?>
+<p:sld xmlns:a="http://schemas.openxmlformats.org/drawingml/2006/main" xmlns:r="http://schemas.openxmlformats.org/officeDocument/2006/relationships" xmlns:mc="http://schemas.openxmlformats.org/markup-compatibility/2006" xmlns:mv="urn:schemas-microsoft-com:mac:vml" xmlns:p="http://schemas.openxmlformats.org/presentationml/2006/main" xmlns:c="http://schemas.openxmlformats.org/drawingml/2006/chart" xmlns:dgm="http://schemas.openxmlformats.org/drawingml/2006/diagram" xmlns:o="urn:schemas-microsoft-com:office:office" xmlns:v="urn:schemas-microsoft-com:vml" xmlns:pvml="urn:schemas-microsoft-com:office:powerpoint" xmlns:com="http://schemas.openxmlformats.org/drawingml/2006/compatibility" xmlns:p14="http://schemas.microsoft.com/office/powerpoint/2010/main" xmlns:p15="http://schemas.microsoft.com/office/powerpoint/2012/main" xmlns:ahyp="http://schemas.microsoft.com/office/drawing/2018/hyperlinkcolor">
   <p:cSld>
     <p:spTree>
       <p:nvGrpSpPr>
-        <p:cNvPr id="1" name=""/>
+        <p:cNvPr id="312" name="Shape 312"/>
         <p:cNvGrpSpPr/>
         <p:nvPr/>
       </p:nvGrpSpPr>
-      <p:grpSpPr/>
+      <p:grpSpPr>
+        <a:xfrm>
+          <a:off x="0" y="0"/>
+          <a:ext cx="0" cy="0"/>
+          <a:chOff x="0" y="0"/>
+          <a:chExt cx="0" cy="0"/>
+        </a:xfrm>
+      </p:grpSpPr>
       <p:sp>
         <p:nvSpPr>
-          <p:cNvPr id="611" name="Google Shape;611;p67"/>
+          <p:cNvPr id="313" name="Google Shape;313;p43"/>
+          <p:cNvSpPr txBox="1"/>
+          <p:nvPr>
+            <p:ph type="title"/>
+          </p:nvPr>
+        </p:nvSpPr>
+        <p:spPr>
+          <a:xfrm>
+            <a:off x="1675975" y="535625"/>
+            <a:ext cx="8837100" cy="5712900"/>
+          </a:xfrm>
+          <a:prstGeom prst="rect">
+            <a:avLst/>
+          </a:prstGeom>
+        </p:spPr>
+        <p:txBody>
+          <a:bodyPr anchorCtr="0" anchor="ctr" bIns="0" lIns="0" spcFirstLastPara="1" rIns="0" wrap="square" tIns="0">
+            <a:noAutofit/>
+          </a:bodyPr>
+          <a:lstStyle/>
+          <a:p>
+            <a:pPr indent="0" lvl="0" marL="0" rtl="0" algn="ctr">
+              <a:spcBef>
+                <a:spcPts val="0"/>
+              </a:spcBef>
+              <a:spcAft>
+                <a:spcPts val="0"/>
+              </a:spcAft>
+              <a:buNone/>
+            </a:pPr>
+            <a:r>
+              <a:rPr lang="en"/>
+              <a:t>Advisors need to know who needs attention today—and why—without compromising trust.</a:t>
+            </a:r>
+            <a:endParaRPr/>
+          </a:p>
+        </p:txBody>
+      </p:sp>
+      <p:sp>
+        <p:nvSpPr>
+          <p:cNvPr id="314" name="Google Shape;314;p43"/>
           <p:cNvSpPr txBox="1"/>
           <p:nvPr>
             <p:ph idx="12" type="sldNum"/>
@@ -28942,183 +30454,20 @@
           </a:bodyPr>
           <a:lstStyle/>
           <a:p>
-            <a:r>
-              <a:t>6</a:t>
-            </a:r>
-          </a:p>
-        </p:txBody>
-      </p:sp>
-      <p:sp>
-        <p:nvSpPr>
-          <p:cNvPr id="612" name="Google Shape;612;p67"/>
-          <p:cNvSpPr txBox="1"/>
-          <p:nvPr>
-            <p:ph type="title"/>
-          </p:nvPr>
-        </p:nvSpPr>
-        <p:spPr>
-          <a:xfrm>
-            <a:off x="749245" y="535597"/>
-            <a:ext cx="10659300" cy="583500"/>
-          </a:xfrm>
-          <a:prstGeom prst="rect">
-            <a:avLst/>
-          </a:prstGeom>
-        </p:spPr>
-        <p:txBody>
-          <a:bodyPr anchorCtr="0" anchor="ctr" bIns="0" lIns="0" spcFirstLastPara="1" rIns="0" wrap="square" tIns="0">
-            <a:noAutofit/>
-          </a:bodyPr>
-          <a:lstStyle/>
-          <a:p>
-            <a:r>
-              <a:t>Business value for two accountable owners</a:t>
-            </a:r>
-          </a:p>
-        </p:txBody>
-      </p:sp>
-      <p:sp>
-        <p:nvSpPr>
-          <p:cNvPr id="613" name="Google Shape;613;p67"/>
-          <p:cNvSpPr txBox="1"/>
-          <p:nvPr>
-            <p:ph idx="1" type="subTitle"/>
-          </p:nvPr>
-        </p:nvSpPr>
-        <p:spPr>
-          <a:xfrm>
-            <a:off x="764809" y="1174702"/>
-            <a:ext cx="10659300" cy="583500"/>
-          </a:xfrm>
-          <a:prstGeom prst="rect">
-            <a:avLst/>
-          </a:prstGeom>
-        </p:spPr>
-        <p:txBody>
-          <a:bodyPr anchorCtr="0" anchor="t" bIns="0" lIns="0" spcFirstLastPara="1" rIns="0" wrap="square" tIns="0">
-            <a:noAutofit/>
-          </a:bodyPr>
-          <a:lstStyle/>
-          <a:p>
-            <a:r>
-              <a:t>A single experience serves different decisions without collapsing access boundaries.</a:t>
-            </a:r>
-          </a:p>
-        </p:txBody>
-      </p:sp>
-      <p:sp>
-        <p:nvSpPr>
-          <p:cNvPr id="614" name="Google Shape;614;p67"/>
-          <p:cNvSpPr txBox="1"/>
-          <p:nvPr>
-            <p:ph idx="2" type="body"/>
-          </p:nvPr>
-        </p:nvSpPr>
-        <p:spPr>
-          <a:xfrm>
-            <a:off x="761809" y="2691865"/>
-            <a:ext cx="4518900" cy="3367200"/>
-          </a:xfrm>
-          <a:prstGeom prst="rect">
-            <a:avLst/>
-          </a:prstGeom>
-        </p:spPr>
-        <p:txBody>
-          <a:bodyPr anchorCtr="0" anchor="t" bIns="0" lIns="0" spcFirstLastPara="1" rIns="0" wrap="square" tIns="0">
-            <a:noAutofit/>
-          </a:bodyPr>
-          <a:lstStyle/>
-          <a:p>
-            <a:r>
-              <a:t>See aggregate risk concentration, intervention coverage, retention, and estimated tuition exposure—without student detail.</a:t>
-            </a:r>
-          </a:p>
-        </p:txBody>
-      </p:sp>
-      <p:sp>
-        <p:nvSpPr>
-          <p:cNvPr id="615" name="Google Shape;615;p67"/>
-          <p:cNvSpPr txBox="1"/>
-          <p:nvPr>
-            <p:ph idx="3" type="body"/>
-          </p:nvPr>
-        </p:nvSpPr>
-        <p:spPr>
-          <a:xfrm>
-            <a:off x="6916469" y="2691865"/>
-            <a:ext cx="4518900" cy="3367200"/>
-          </a:xfrm>
-          <a:prstGeom prst="rect">
-            <a:avLst/>
-          </a:prstGeom>
-        </p:spPr>
-        <p:txBody>
-          <a:bodyPr anchorCtr="0" anchor="t" bIns="0" lIns="0" spcFirstLastPara="1" rIns="0" wrap="square" tIns="0">
-            <a:noAutofit/>
-          </a:bodyPr>
-          <a:lstStyle/>
-          <a:p>
-            <a:r>
-              <a:t>Reduce signal-to-outreach time with a prioritized caseload, grounded context, and closed-loop follow-up history.</a:t>
-            </a:r>
-          </a:p>
-        </p:txBody>
-      </p:sp>
-      <p:sp>
-        <p:nvSpPr>
-          <p:cNvPr id="616" name="Google Shape;616;p67"/>
-          <p:cNvSpPr txBox="1"/>
-          <p:nvPr>
-            <p:ph idx="4" type="subTitle"/>
-          </p:nvPr>
-        </p:nvSpPr>
-        <p:spPr>
-          <a:xfrm>
-            <a:off x="795814" y="1970333"/>
-            <a:ext cx="4484400" cy="643200"/>
-          </a:xfrm>
-          <a:prstGeom prst="rect">
-            <a:avLst/>
-          </a:prstGeom>
-        </p:spPr>
-        <p:txBody>
-          <a:bodyPr anchorCtr="0" anchor="t" bIns="0" lIns="0" spcFirstLastPara="1" rIns="0" wrap="square" tIns="0">
-            <a:noAutofit/>
-          </a:bodyPr>
-          <a:lstStyle/>
-          <a:p>
-            <a:r>
-              <a:t>Executive sponsor</a:t>
-            </a:r>
-          </a:p>
-        </p:txBody>
-      </p:sp>
-      <p:sp>
-        <p:nvSpPr>
-          <p:cNvPr id="617" name="Google Shape;617;p67"/>
-          <p:cNvSpPr txBox="1"/>
-          <p:nvPr>
-            <p:ph idx="5" type="subTitle"/>
-          </p:nvPr>
-        </p:nvSpPr>
-        <p:spPr>
-          <a:xfrm>
-            <a:off x="6933565" y="1970333"/>
-            <a:ext cx="4485000" cy="643200"/>
-          </a:xfrm>
-          <a:prstGeom prst="rect">
-            <a:avLst/>
-          </a:prstGeom>
-        </p:spPr>
-        <p:txBody>
-          <a:bodyPr anchorCtr="0" anchor="t" bIns="0" lIns="0" spcFirstLastPara="1" rIns="0" wrap="square" tIns="0">
-            <a:noAutofit/>
-          </a:bodyPr>
-          <a:lstStyle/>
-          <a:p>
-            <a:r>
-              <a:t>Student-success owner</a:t>
-            </a:r>
+            <a:pPr indent="0" lvl="0" marL="0" rtl="0" algn="r">
+              <a:spcBef>
+                <a:spcPts val="0"/>
+              </a:spcBef>
+              <a:spcAft>
+                <a:spcPts val="0"/>
+              </a:spcAft>
+              <a:buNone/>
+            </a:pPr>
+            <a:fld id="{00000000-1234-1234-1234-123412341234}" type="slidenum">
+              <a:rPr lang="en"/>
+              <a:t>‹#›</a:t>
+            </a:fld>
+            <a:endParaRPr/>
           </a:p>
         </p:txBody>
       </p:sp>
@@ -29130,28 +30479,75 @@
 </p:sld>
 </file>
 
-<file path=ppt/slides/slide105.xml><?xml version="1.0" encoding="utf-8"?>
-<p:sld xmlns:a="http://schemas.openxmlformats.org/drawingml/2006/main" xmlns:p="http://schemas.openxmlformats.org/presentationml/2006/main" xmlns:r="http://schemas.openxmlformats.org/officeDocument/2006/relationships">
+<file path=ppt/slides/slide3.xml><?xml version="1.0" encoding="utf-8"?>
+<p:sld xmlns:a="http://schemas.openxmlformats.org/drawingml/2006/main" xmlns:r="http://schemas.openxmlformats.org/officeDocument/2006/relationships" xmlns:mc="http://schemas.openxmlformats.org/markup-compatibility/2006" xmlns:mv="urn:schemas-microsoft-com:mac:vml" xmlns:p="http://schemas.openxmlformats.org/presentationml/2006/main" xmlns:c="http://schemas.openxmlformats.org/drawingml/2006/chart" xmlns:dgm="http://schemas.openxmlformats.org/drawingml/2006/diagram" xmlns:o="urn:schemas-microsoft-com:office:office" xmlns:v="urn:schemas-microsoft-com:vml" xmlns:pvml="urn:schemas-microsoft-com:office:powerpoint" xmlns:com="http://schemas.openxmlformats.org/drawingml/2006/compatibility" xmlns:p14="http://schemas.microsoft.com/office/powerpoint/2010/main" xmlns:p15="http://schemas.microsoft.com/office/powerpoint/2012/main" xmlns:ahyp="http://schemas.microsoft.com/office/drawing/2018/hyperlinkcolor">
   <p:cSld>
     <p:spTree>
       <p:nvGrpSpPr>
-        <p:cNvPr id="1" name=""/>
+        <p:cNvPr id="318" name="Shape 318"/>
         <p:cNvGrpSpPr/>
         <p:nvPr/>
       </p:nvGrpSpPr>
-      <p:grpSpPr/>
+      <p:grpSpPr>
+        <a:xfrm>
+          <a:off x="0" y="0"/>
+          <a:ext cx="0" cy="0"/>
+          <a:chOff x="0" y="0"/>
+          <a:chExt cx="0" cy="0"/>
+        </a:xfrm>
+      </p:grpSpPr>
       <p:sp>
         <p:nvSpPr>
-          <p:cNvPr id="603" name="Google Shape;603;p66"/>
+          <p:cNvPr id="319" name="Google Shape;319;p44"/>
           <p:cNvSpPr txBox="1"/>
           <p:nvPr>
-            <p:ph idx="12" type="sldNum"/>
+            <p:ph type="title"/>
           </p:nvPr>
         </p:nvSpPr>
         <p:spPr>
           <a:xfrm>
-            <a:off x="11097669" y="6473300"/>
-            <a:ext cx="324300" cy="186600"/>
+            <a:off x="749245" y="535597"/>
+            <a:ext cx="10659300" cy="583500"/>
+          </a:xfrm>
+          <a:prstGeom prst="rect">
+            <a:avLst/>
+          </a:prstGeom>
+        </p:spPr>
+        <p:txBody>
+          <a:bodyPr anchorCtr="0" anchor="ctr" bIns="0" lIns="0" spcFirstLastPara="1" rIns="0" wrap="square" tIns="0">
+            <a:noAutofit/>
+          </a:bodyPr>
+          <a:lstStyle/>
+          <a:p>
+            <a:pPr indent="0" lvl="0" marL="0" rtl="0" algn="l">
+              <a:spcBef>
+                <a:spcPts val="0"/>
+              </a:spcBef>
+              <a:spcAft>
+                <a:spcPts val="0"/>
+              </a:spcAft>
+              <a:buNone/>
+            </a:pPr>
+            <a:r>
+              <a:rPr lang="en"/>
+              <a:t>Buyer KPIs and synthetic demo baseline</a:t>
+            </a:r>
+            <a:endParaRPr/>
+          </a:p>
+        </p:txBody>
+      </p:sp>
+      <p:sp>
+        <p:nvSpPr>
+          <p:cNvPr id="320" name="Google Shape;320;p44"/>
+          <p:cNvSpPr txBox="1"/>
+          <p:nvPr>
+            <p:ph idx="1" type="subTitle"/>
+          </p:nvPr>
+        </p:nvSpPr>
+        <p:spPr>
+          <a:xfrm>
+            <a:off x="764809" y="1174702"/>
+            <a:ext cx="10659300" cy="583500"/>
           </a:xfrm>
           <a:prstGeom prst="rect">
             <a:avLst/>
@@ -29163,53 +30559,34 @@
           </a:bodyPr>
           <a:lstStyle/>
           <a:p>
+            <a:pPr indent="0" lvl="0" marL="0" rtl="0" algn="l">
+              <a:spcBef>
+                <a:spcPts val="1100"/>
+              </a:spcBef>
+              <a:spcAft>
+                <a:spcPts val="0"/>
+              </a:spcAft>
+              <a:buNone/>
+            </a:pPr>
             <a:r>
-              <a:t>7</a:t>
+              <a:t/>
             </a:r>
+            <a:endParaRPr/>
           </a:p>
         </p:txBody>
       </p:sp>
       <p:sp>
         <p:nvSpPr>
-          <p:cNvPr id="604" name="Google Shape;604;p66"/>
+          <p:cNvPr id="321" name="Google Shape;321;p44"/>
           <p:cNvSpPr txBox="1"/>
           <p:nvPr>
-            <p:ph type="title"/>
+            <p:ph idx="2" type="subTitle"/>
           </p:nvPr>
         </p:nvSpPr>
         <p:spPr>
           <a:xfrm>
-            <a:off x="749245" y="535597"/>
-            <a:ext cx="10659300" cy="583500"/>
-          </a:xfrm>
-          <a:prstGeom prst="rect">
-            <a:avLst/>
-          </a:prstGeom>
-        </p:spPr>
-        <p:txBody>
-          <a:bodyPr anchorCtr="0" anchor="ctr" bIns="0" lIns="0" spcFirstLastPara="1" rIns="0" wrap="square" tIns="0">
-            <a:noAutofit/>
-          </a:bodyPr>
-          <a:lstStyle/>
-          <a:p>
-            <a:r>
-              <a:t>Governed Databricks architecture</a:t>
-            </a:r>
-          </a:p>
-        </p:txBody>
-      </p:sp>
-      <p:sp>
-        <p:nvSpPr>
-          <p:cNvPr id="605" name="Google Shape;605;p66"/>
-          <p:cNvSpPr txBox="1"/>
-          <p:nvPr>
-            <p:ph idx="1" type="subTitle"/>
-          </p:nvPr>
-        </p:nvSpPr>
-        <p:spPr>
-          <a:xfrm>
-            <a:off x="764809" y="1174702"/>
-            <a:ext cx="10659300" cy="583500"/>
+            <a:off x="764709" y="1988833"/>
+            <a:ext cx="5110800" cy="1785300"/>
           </a:xfrm>
           <a:prstGeom prst="rect">
             <a:avLst/>
@@ -29221,24 +30598,51 @@
           </a:bodyPr>
           <a:lstStyle/>
           <a:p>
+            <a:pPr indent="0" lvl="0" marL="0" rtl="0" algn="l">
+              <a:spcBef>
+                <a:spcPts val="1100"/>
+              </a:spcBef>
+              <a:spcAft>
+                <a:spcPts val="0"/>
+              </a:spcAft>
+              <a:buNone/>
+            </a:pPr>
             <a:r>
-              <a:t>Serving refreshes cannot overwrite advisor transactions.</a:t>
+              <a:rPr lang="en"/>
+              <a:t>88.88%</a:t>
             </a:r>
+            <a:endParaRPr/>
+          </a:p>
+          <a:p>
+            <a:pPr indent="0" lvl="0" marL="0" rtl="0" algn="l">
+              <a:spcBef>
+                <a:spcPts val="1100"/>
+              </a:spcBef>
+              <a:spcAft>
+                <a:spcPts val="0"/>
+              </a:spcAft>
+              <a:buNone/>
+            </a:pPr>
+            <a:r>
+              <a:rPr lang="en"/>
+              <a:t>Synthetic retention rate</a:t>
+            </a:r>
+            <a:endParaRPr/>
           </a:p>
         </p:txBody>
       </p:sp>
       <p:sp>
         <p:nvSpPr>
-          <p:cNvPr id="606" name="Google Shape;606;p66"/>
+          <p:cNvPr id="322" name="Google Shape;322;p44"/>
           <p:cNvSpPr txBox="1"/>
           <p:nvPr>
-            <p:ph idx="2" type="body"/>
+            <p:ph idx="3" type="subTitle"/>
           </p:nvPr>
         </p:nvSpPr>
         <p:spPr>
           <a:xfrm>
-            <a:off x="761809" y="1988833"/>
-            <a:ext cx="10659300" cy="4149900"/>
+            <a:off x="6313520" y="1988833"/>
+            <a:ext cx="5110800" cy="1785300"/>
           </a:xfrm>
           <a:prstGeom prst="rect">
             <a:avLst/>
@@ -29250,9 +30654,188 @@
           </a:bodyPr>
           <a:lstStyle/>
           <a:p>
+            <a:pPr indent="0" lvl="0" marL="0" rtl="0" algn="l">
+              <a:spcBef>
+                <a:spcPts val="1100"/>
+              </a:spcBef>
+              <a:spcAft>
+                <a:spcPts val="0"/>
+              </a:spcAft>
+              <a:buNone/>
+            </a:pPr>
             <a:r>
-              <a:t>Synthetic signals → Lakeflow Bronze / Silver → MLflow scoring → Unity Catalog Gold → read-only Lakebase serving → Databricks App + embedded Genie → Lakebase-owned interventions → CDC → governed intervention Gold</a:t>
+              <a:rPr lang="en"/>
+              <a:t>2,664</a:t>
             </a:r>
+            <a:endParaRPr/>
+          </a:p>
+          <a:p>
+            <a:pPr indent="0" lvl="0" marL="0" rtl="0" algn="l">
+              <a:spcBef>
+                <a:spcPts val="1100"/>
+              </a:spcBef>
+              <a:spcAft>
+                <a:spcPts val="0"/>
+              </a:spcAft>
+              <a:buNone/>
+            </a:pPr>
+            <a:r>
+              <a:rPr lang="en"/>
+              <a:t>Initially elevated-risk students</a:t>
+            </a:r>
+            <a:endParaRPr/>
+          </a:p>
+        </p:txBody>
+      </p:sp>
+      <p:sp>
+        <p:nvSpPr>
+          <p:cNvPr id="323" name="Google Shape;323;p44"/>
+          <p:cNvSpPr txBox="1"/>
+          <p:nvPr>
+            <p:ph idx="4" type="subTitle"/>
+          </p:nvPr>
+        </p:nvSpPr>
+        <p:spPr>
+          <a:xfrm>
+            <a:off x="764709" y="4302068"/>
+            <a:ext cx="5110800" cy="1785300"/>
+          </a:xfrm>
+          <a:prstGeom prst="rect">
+            <a:avLst/>
+          </a:prstGeom>
+        </p:spPr>
+        <p:txBody>
+          <a:bodyPr anchorCtr="0" anchor="t" bIns="0" lIns="0" spcFirstLastPara="1" rIns="0" wrap="square" tIns="0">
+            <a:noAutofit/>
+          </a:bodyPr>
+          <a:lstStyle/>
+          <a:p>
+            <a:pPr indent="0" lvl="0" marL="0" rtl="0" algn="l">
+              <a:spcBef>
+                <a:spcPts val="1100"/>
+              </a:spcBef>
+              <a:spcAft>
+                <a:spcPts val="0"/>
+              </a:spcAft>
+              <a:buNone/>
+            </a:pPr>
+            <a:r>
+              <a:rPr lang="en"/>
+              <a:t>$24.1M</a:t>
+            </a:r>
+            <a:endParaRPr/>
+          </a:p>
+          <a:p>
+            <a:pPr indent="0" lvl="0" marL="0" rtl="0" algn="l">
+              <a:spcBef>
+                <a:spcPts val="1100"/>
+              </a:spcBef>
+              <a:spcAft>
+                <a:spcPts val="0"/>
+              </a:spcAft>
+              <a:buNone/>
+            </a:pPr>
+            <a:r>
+              <a:rPr lang="en"/>
+              <a:t>Estimated synthetic tuition exposure</a:t>
+            </a:r>
+            <a:endParaRPr/>
+          </a:p>
+        </p:txBody>
+      </p:sp>
+      <p:sp>
+        <p:nvSpPr>
+          <p:cNvPr id="324" name="Google Shape;324;p44"/>
+          <p:cNvSpPr txBox="1"/>
+          <p:nvPr>
+            <p:ph idx="5" type="subTitle"/>
+          </p:nvPr>
+        </p:nvSpPr>
+        <p:spPr>
+          <a:xfrm>
+            <a:off x="6313520" y="4302068"/>
+            <a:ext cx="5110800" cy="1785300"/>
+          </a:xfrm>
+          <a:prstGeom prst="rect">
+            <a:avLst/>
+          </a:prstGeom>
+        </p:spPr>
+        <p:txBody>
+          <a:bodyPr anchorCtr="0" anchor="t" bIns="0" lIns="0" spcFirstLastPara="1" rIns="0" wrap="square" tIns="0">
+            <a:noAutofit/>
+          </a:bodyPr>
+          <a:lstStyle/>
+          <a:p>
+            <a:pPr indent="0" lvl="0" marL="0" rtl="0" algn="l">
+              <a:spcBef>
+                <a:spcPts val="1100"/>
+              </a:spcBef>
+              <a:spcAft>
+                <a:spcPts val="0"/>
+              </a:spcAft>
+              <a:buNone/>
+            </a:pPr>
+            <a:r>
+              <a:rPr lang="en"/>
+              <a:t>20,000</a:t>
+            </a:r>
+            <a:endParaRPr/>
+          </a:p>
+          <a:p>
+            <a:pPr indent="0" lvl="0" marL="0" rtl="0" algn="l">
+              <a:spcBef>
+                <a:spcPts val="1100"/>
+              </a:spcBef>
+              <a:spcAft>
+                <a:spcPts val="0"/>
+              </a:spcAft>
+              <a:buNone/>
+            </a:pPr>
+            <a:r>
+              <a:rPr lang="en"/>
+              <a:t>Current synthetic students</a:t>
+            </a:r>
+            <a:endParaRPr/>
+          </a:p>
+        </p:txBody>
+      </p:sp>
+      <p:sp>
+        <p:nvSpPr>
+          <p:cNvPr id="325" name="Google Shape;325;p44"/>
+          <p:cNvSpPr txBox="1"/>
+          <p:nvPr>
+            <p:ph idx="12" type="sldNum"/>
+          </p:nvPr>
+        </p:nvSpPr>
+        <p:spPr>
+          <a:xfrm>
+            <a:off x="11097669" y="6473300"/>
+            <a:ext cx="324300" cy="186600"/>
+          </a:xfrm>
+          <a:prstGeom prst="rect">
+            <a:avLst/>
+          </a:prstGeom>
+        </p:spPr>
+        <p:txBody>
+          <a:bodyPr anchorCtr="0" anchor="t" bIns="0" lIns="0" spcFirstLastPara="1" rIns="0" wrap="square" tIns="0">
+            <a:noAutofit/>
+          </a:bodyPr>
+          <a:lstStyle/>
+          <a:p>
+            <a:pPr indent="0" lvl="0" marL="0" rtl="0" algn="r">
+              <a:spcBef>
+                <a:spcPts val="0"/>
+              </a:spcBef>
+              <a:spcAft>
+                <a:spcPts val="0"/>
+              </a:spcAft>
+              <a:buNone/>
+            </a:pPr>
+            <a:fld id="{00000000-1234-1234-1234-123412341234}" type="slidenum">
+              <a:rPr lang="en"/>
+              <a:t>‹#›</a:t>
+            </a:fld>
+            <a:endParaRPr/>
           </a:p>
         </p:txBody>
       </p:sp>
@@ -29264,28 +30847,75 @@
 </p:sld>
 </file>
 
-<file path=ppt/slides/slide106.xml><?xml version="1.0" encoding="utf-8"?>
-<p:sld xmlns:a="http://schemas.openxmlformats.org/drawingml/2006/main" xmlns:p="http://schemas.openxmlformats.org/presentationml/2006/main" xmlns:r="http://schemas.openxmlformats.org/officeDocument/2006/relationships">
+<file path=ppt/slides/slide4.xml><?xml version="1.0" encoding="utf-8"?>
+<p:sld xmlns:a="http://schemas.openxmlformats.org/drawingml/2006/main" xmlns:r="http://schemas.openxmlformats.org/officeDocument/2006/relationships" xmlns:mc="http://schemas.openxmlformats.org/markup-compatibility/2006" xmlns:mv="urn:schemas-microsoft-com:mac:vml" xmlns:p="http://schemas.openxmlformats.org/presentationml/2006/main" xmlns:c="http://schemas.openxmlformats.org/drawingml/2006/chart" xmlns:dgm="http://schemas.openxmlformats.org/drawingml/2006/diagram" xmlns:o="urn:schemas-microsoft-com:office:office" xmlns:v="urn:schemas-microsoft-com:vml" xmlns:pvml="urn:schemas-microsoft-com:office:powerpoint" xmlns:com="http://schemas.openxmlformats.org/drawingml/2006/compatibility" xmlns:p14="http://schemas.microsoft.com/office/powerpoint/2010/main" xmlns:p15="http://schemas.microsoft.com/office/powerpoint/2012/main" xmlns:ahyp="http://schemas.microsoft.com/office/drawing/2018/hyperlinkcolor">
   <p:cSld>
     <p:spTree>
       <p:nvGrpSpPr>
-        <p:cNvPr id="1" name=""/>
+        <p:cNvPr id="329" name="Shape 329"/>
         <p:cNvGrpSpPr/>
         <p:nvPr/>
       </p:nvGrpSpPr>
-      <p:grpSpPr/>
+      <p:grpSpPr>
+        <a:xfrm>
+          <a:off x="0" y="0"/>
+          <a:ext cx="0" cy="0"/>
+          <a:chOff x="0" y="0"/>
+          <a:chExt cx="0" cy="0"/>
+        </a:xfrm>
+      </p:grpSpPr>
       <p:sp>
         <p:nvSpPr>
-          <p:cNvPr id="694" name="Google Shape;694;p76"/>
+          <p:cNvPr id="330" name="Google Shape;330;p45"/>
           <p:cNvSpPr txBox="1"/>
           <p:nvPr>
-            <p:ph idx="12" type="sldNum"/>
+            <p:ph type="title"/>
           </p:nvPr>
         </p:nvSpPr>
         <p:spPr>
           <a:xfrm>
-            <a:off x="11097669" y="6473300"/>
-            <a:ext cx="324300" cy="186600"/>
+            <a:off x="749245" y="535597"/>
+            <a:ext cx="10659300" cy="583500"/>
+          </a:xfrm>
+          <a:prstGeom prst="rect">
+            <a:avLst/>
+          </a:prstGeom>
+        </p:spPr>
+        <p:txBody>
+          <a:bodyPr anchorCtr="0" anchor="ctr" bIns="0" lIns="0" spcFirstLastPara="1" rIns="0" wrap="square" tIns="0">
+            <a:noAutofit/>
+          </a:bodyPr>
+          <a:lstStyle/>
+          <a:p>
+            <a:pPr indent="0" lvl="0" marL="0" rtl="0" algn="l">
+              <a:spcBef>
+                <a:spcPts val="0"/>
+              </a:spcBef>
+              <a:spcAft>
+                <a:spcPts val="0"/>
+              </a:spcAft>
+              <a:buNone/>
+            </a:pPr>
+            <a:r>
+              <a:rPr lang="en"/>
+              <a:t>Current-state friction delays action</a:t>
+            </a:r>
+            <a:endParaRPr/>
+          </a:p>
+        </p:txBody>
+      </p:sp>
+      <p:sp>
+        <p:nvSpPr>
+          <p:cNvPr id="331" name="Google Shape;331;p45"/>
+          <p:cNvSpPr txBox="1"/>
+          <p:nvPr>
+            <p:ph idx="1" type="body"/>
+          </p:nvPr>
+        </p:nvSpPr>
+        <p:spPr>
+          <a:xfrm>
+            <a:off x="761809" y="2825567"/>
+            <a:ext cx="3224100" cy="3233700"/>
           </a:xfrm>
           <a:prstGeom prst="rect">
             <a:avLst/>
@@ -29297,53 +30927,35 @@
           </a:bodyPr>
           <a:lstStyle/>
           <a:p>
+            <a:pPr indent="0" lvl="0" marL="0" rtl="0" algn="l">
+              <a:spcBef>
+                <a:spcPts val="1100"/>
+              </a:spcBef>
+              <a:spcAft>
+                <a:spcPts val="0"/>
+              </a:spcAft>
+              <a:buNone/>
+            </a:pPr>
             <a:r>
-              <a:t>8</a:t>
+              <a:rPr lang="en"/>
+              <a:t>Attendance, LMS, finance, enrollment, and case data arrive on different clocks.</a:t>
             </a:r>
+            <a:endParaRPr/>
           </a:p>
         </p:txBody>
       </p:sp>
       <p:sp>
         <p:nvSpPr>
-          <p:cNvPr id="695" name="Google Shape;695;p76"/>
+          <p:cNvPr id="332" name="Google Shape;332;p45"/>
           <p:cNvSpPr txBox="1"/>
           <p:nvPr>
-            <p:ph type="title"/>
+            <p:ph idx="2" type="subTitle"/>
           </p:nvPr>
         </p:nvSpPr>
         <p:spPr>
           <a:xfrm>
-            <a:off x="749245" y="535597"/>
+            <a:off x="764809" y="1174702"/>
             <a:ext cx="10659300" cy="583500"/>
-          </a:xfrm>
-          <a:prstGeom prst="rect">
-            <a:avLst/>
-          </a:prstGeom>
-        </p:spPr>
-        <p:txBody>
-          <a:bodyPr anchorCtr="0" anchor="ctr" bIns="0" lIns="0" spcFirstLastPara="1" rIns="0" wrap="square" tIns="0">
-            <a:noAutofit/>
-          </a:bodyPr>
-          <a:lstStyle/>
-          <a:p>
-            <a:r>
-              <a:t>Hybrid intelligence keeps each decision explainable</a:t>
-            </a:r>
-          </a:p>
-        </p:txBody>
-      </p:sp>
-      <p:sp>
-        <p:nvSpPr>
-          <p:cNvPr id="696" name="Google Shape;696;p76"/>
-          <p:cNvSpPr txBox="1"/>
-          <p:nvPr>
-            <p:ph idx="1" type="body"/>
-          </p:nvPr>
-        </p:nvSpPr>
-        <p:spPr>
-          <a:xfrm>
-            <a:off x="761809" y="2825567"/>
-            <a:ext cx="3224100" cy="3233700"/>
           </a:xfrm>
           <a:prstGeom prst="rect">
             <a:avLst/>
@@ -29355,24 +30967,34 @@
           </a:bodyPr>
           <a:lstStyle/>
           <a:p>
+            <a:pPr indent="0" lvl="0" marL="0" rtl="0" algn="l">
+              <a:spcBef>
+                <a:spcPts val="1100"/>
+              </a:spcBef>
+              <a:spcAft>
+                <a:spcPts val="0"/>
+              </a:spcAft>
+              <a:buNone/>
+            </a:pPr>
             <a:r>
-              <a:t>Repeatable prioritization, calibrated scores, stable tiers, version history, and baseline comparison.</a:t>
+              <a:t/>
             </a:r>
+            <a:endParaRPr/>
           </a:p>
         </p:txBody>
       </p:sp>
       <p:sp>
         <p:nvSpPr>
-          <p:cNvPr id="697" name="Google Shape;697;p76"/>
+          <p:cNvPr id="333" name="Google Shape;333;p45"/>
           <p:cNvSpPr txBox="1"/>
           <p:nvPr>
-            <p:ph idx="2" type="subTitle"/>
+            <p:ph idx="3" type="body"/>
           </p:nvPr>
         </p:nvSpPr>
         <p:spPr>
           <a:xfrm>
-            <a:off x="764809" y="1174702"/>
-            <a:ext cx="10659300" cy="583500"/>
+            <a:off x="4482478" y="2825567"/>
+            <a:ext cx="3224100" cy="3233700"/>
           </a:xfrm>
           <a:prstGeom prst="rect">
             <a:avLst/>
@@ -29384,23 +31006,34 @@
           </a:bodyPr>
           <a:lstStyle/>
           <a:p>
+            <a:pPr indent="0" lvl="0" marL="0" rtl="0" algn="l">
+              <a:spcBef>
+                <a:spcPts val="1100"/>
+              </a:spcBef>
+              <a:spcAft>
+                <a:spcPts val="0"/>
+              </a:spcAft>
+              <a:buNone/>
+            </a:pPr>
             <a:r>
-              <a:t>Use each capability for what it does best.</a:t>
+              <a:rPr lang="en"/>
+              <a:t>Advisors reconcile data manually and lack a defensible daily queue.</a:t>
             </a:r>
+            <a:endParaRPr/>
           </a:p>
         </p:txBody>
       </p:sp>
       <p:sp>
         <p:nvSpPr>
-          <p:cNvPr id="698" name="Google Shape;698;p76"/>
+          <p:cNvPr id="334" name="Google Shape;334;p45"/>
           <p:cNvSpPr txBox="1"/>
           <p:nvPr>
-            <p:ph idx="3" type="body"/>
+            <p:ph idx="4" type="body"/>
           </p:nvPr>
         </p:nvSpPr>
         <p:spPr>
           <a:xfrm>
-            <a:off x="4482478" y="2825567"/>
+            <a:off x="8167756" y="2825567"/>
             <a:ext cx="3224100" cy="3233700"/>
           </a:xfrm>
           <a:prstGeom prst="rect">
@@ -29413,24 +31046,35 @@
           </a:bodyPr>
           <a:lstStyle/>
           <a:p>
+            <a:pPr indent="0" lvl="0" marL="0" rtl="0" algn="l">
+              <a:spcBef>
+                <a:spcPts val="1100"/>
+              </a:spcBef>
+              <a:spcAft>
+                <a:spcPts val="0"/>
+              </a:spcAft>
+              <a:buNone/>
+            </a:pPr>
             <a:r>
-              <a:t>Allowlisted facts, citations, bounded discussion prompts, and fixed-set evaluation.</a:t>
+              <a:rPr lang="en"/>
+              <a:t>Outreach and outcomes are disconnected from executive coverage and analytics.</a:t>
             </a:r>
+            <a:endParaRPr/>
           </a:p>
         </p:txBody>
       </p:sp>
       <p:sp>
         <p:nvSpPr>
-          <p:cNvPr id="699" name="Google Shape;699;p76"/>
+          <p:cNvPr id="335" name="Google Shape;335;p45"/>
           <p:cNvSpPr txBox="1"/>
           <p:nvPr>
-            <p:ph idx="4" type="body"/>
+            <p:ph idx="5" type="subTitle"/>
           </p:nvPr>
         </p:nvSpPr>
         <p:spPr>
           <a:xfrm>
-            <a:off x="8167756" y="2825567"/>
-            <a:ext cx="3224100" cy="3233700"/>
+            <a:off x="786070" y="1970336"/>
+            <a:ext cx="3199500" cy="643200"/>
           </a:xfrm>
           <a:prstGeom prst="rect">
             <a:avLst/>
@@ -29442,23 +31086,34 @@
           </a:bodyPr>
           <a:lstStyle/>
           <a:p>
+            <a:pPr indent="0" lvl="0" marL="0" rtl="0" algn="l">
+              <a:spcBef>
+                <a:spcPts val="1100"/>
+              </a:spcBef>
+              <a:spcAft>
+                <a:spcPts val="0"/>
+              </a:spcAft>
+              <a:buNone/>
+            </a:pPr>
             <a:r>
-              <a:t>Judgment, outreach, reconciliation, and accountable action remain with people.</a:t>
+              <a:rPr lang="en"/>
+              <a:t>Fragmented signals</a:t>
             </a:r>
+            <a:endParaRPr/>
           </a:p>
         </p:txBody>
       </p:sp>
       <p:sp>
         <p:nvSpPr>
-          <p:cNvPr id="700" name="Google Shape;700;p76"/>
+          <p:cNvPr id="336" name="Google Shape;336;p45"/>
           <p:cNvSpPr txBox="1"/>
           <p:nvPr>
-            <p:ph idx="5" type="subTitle"/>
+            <p:ph idx="6" type="subTitle"/>
           </p:nvPr>
         </p:nvSpPr>
         <p:spPr>
           <a:xfrm>
-            <a:off x="786070" y="1970336"/>
+            <a:off x="4494675" y="1970336"/>
             <a:ext cx="3199500" cy="643200"/>
           </a:xfrm>
           <a:prstGeom prst="rect">
@@ -29471,23 +31126,34 @@
           </a:bodyPr>
           <a:lstStyle/>
           <a:p>
+            <a:pPr indent="0" lvl="0" marL="0" rtl="0" algn="l">
+              <a:spcBef>
+                <a:spcPts val="1100"/>
+              </a:spcBef>
+              <a:spcAft>
+                <a:spcPts val="0"/>
+              </a:spcAft>
+              <a:buNone/>
+            </a:pPr>
             <a:r>
-              <a:t>ML classifier</a:t>
+              <a:rPr lang="en"/>
+              <a:t>Inconsistent prioritization</a:t>
             </a:r>
+            <a:endParaRPr/>
           </a:p>
         </p:txBody>
       </p:sp>
       <p:sp>
         <p:nvSpPr>
-          <p:cNvPr id="701" name="Google Shape;701;p76"/>
+          <p:cNvPr id="337" name="Google Shape;337;p45"/>
           <p:cNvSpPr txBox="1"/>
           <p:nvPr>
-            <p:ph idx="6" type="subTitle"/>
+            <p:ph idx="7" type="subTitle"/>
           </p:nvPr>
         </p:nvSpPr>
         <p:spPr>
           <a:xfrm>
-            <a:off x="4494675" y="1970336"/>
+            <a:off x="8179953" y="1970336"/>
             <a:ext cx="3199500" cy="643200"/>
           </a:xfrm>
           <a:prstGeom prst="rect">
@@ -29500,24 +31166,35 @@
           </a:bodyPr>
           <a:lstStyle/>
           <a:p>
+            <a:pPr indent="0" lvl="0" marL="0" rtl="0" algn="l">
+              <a:spcBef>
+                <a:spcPts val="1100"/>
+              </a:spcBef>
+              <a:spcAft>
+                <a:spcPts val="0"/>
+              </a:spcAft>
+              <a:buNone/>
+            </a:pPr>
             <a:r>
-              <a:t>Grounded GenAI</a:t>
+              <a:rPr lang="en"/>
+              <a:t>Weak feedback loop</a:t>
             </a:r>
+            <a:endParaRPr/>
           </a:p>
         </p:txBody>
       </p:sp>
       <p:sp>
         <p:nvSpPr>
-          <p:cNvPr id="702" name="Google Shape;702;p76"/>
+          <p:cNvPr id="338" name="Google Shape;338;p45"/>
           <p:cNvSpPr txBox="1"/>
           <p:nvPr>
-            <p:ph idx="7" type="subTitle"/>
+            <p:ph idx="12" type="sldNum"/>
           </p:nvPr>
         </p:nvSpPr>
         <p:spPr>
           <a:xfrm>
-            <a:off x="8179953" y="1970336"/>
-            <a:ext cx="3199500" cy="643200"/>
+            <a:off x="11097669" y="6473300"/>
+            <a:ext cx="324300" cy="186600"/>
           </a:xfrm>
           <a:prstGeom prst="rect">
             <a:avLst/>
@@ -29529,9 +31206,20 @@
           </a:bodyPr>
           <a:lstStyle/>
           <a:p>
-            <a:r>
-              <a:t>Human advisor</a:t>
-            </a:r>
+            <a:pPr indent="0" lvl="0" marL="0" rtl="0" algn="r">
+              <a:spcBef>
+                <a:spcPts val="0"/>
+              </a:spcBef>
+              <a:spcAft>
+                <a:spcPts val="0"/>
+              </a:spcAft>
+              <a:buNone/>
+            </a:pPr>
+            <a:fld id="{00000000-1234-1234-1234-123412341234}" type="slidenum">
+              <a:rPr lang="en"/>
+              <a:t>‹#›</a:t>
+            </a:fld>
+            <a:endParaRPr/>
           </a:p>
         </p:txBody>
       </p:sp>
@@ -29543,28 +31231,75 @@
 </p:sld>
 </file>
 
-<file path=ppt/slides/slide107.xml><?xml version="1.0" encoding="utf-8"?>
-<p:sld xmlns:a="http://schemas.openxmlformats.org/drawingml/2006/main" xmlns:p="http://schemas.openxmlformats.org/presentationml/2006/main" xmlns:r="http://schemas.openxmlformats.org/officeDocument/2006/relationships">
+<file path=ppt/slides/slide5.xml><?xml version="1.0" encoding="utf-8"?>
+<p:sld xmlns:a="http://schemas.openxmlformats.org/drawingml/2006/main" xmlns:r="http://schemas.openxmlformats.org/officeDocument/2006/relationships" xmlns:mc="http://schemas.openxmlformats.org/markup-compatibility/2006" xmlns:mv="urn:schemas-microsoft-com:mac:vml" xmlns:p="http://schemas.openxmlformats.org/presentationml/2006/main" xmlns:c="http://schemas.openxmlformats.org/drawingml/2006/chart" xmlns:dgm="http://schemas.openxmlformats.org/drawingml/2006/diagram" xmlns:o="urn:schemas-microsoft-com:office:office" xmlns:v="urn:schemas-microsoft-com:vml" xmlns:pvml="urn:schemas-microsoft-com:office:powerpoint" xmlns:com="http://schemas.openxmlformats.org/drawingml/2006/compatibility" xmlns:p14="http://schemas.microsoft.com/office/powerpoint/2010/main" xmlns:p15="http://schemas.microsoft.com/office/powerpoint/2012/main" xmlns:ahyp="http://schemas.microsoft.com/office/drawing/2018/hyperlinkcolor">
   <p:cSld>
     <p:spTree>
       <p:nvGrpSpPr>
-        <p:cNvPr id="1" name=""/>
+        <p:cNvPr id="342" name="Shape 342"/>
         <p:cNvGrpSpPr/>
         <p:nvPr/>
       </p:nvGrpSpPr>
-      <p:grpSpPr/>
+      <p:grpSpPr>
+        <a:xfrm>
+          <a:off x="0" y="0"/>
+          <a:ext cx="0" cy="0"/>
+          <a:chOff x="0" y="0"/>
+          <a:chExt cx="0" cy="0"/>
+        </a:xfrm>
+      </p:grpSpPr>
       <p:sp>
         <p:nvSpPr>
-          <p:cNvPr id="595" name="Google Shape;595;p65"/>
+          <p:cNvPr id="343" name="Google Shape;343;p46"/>
           <p:cNvSpPr txBox="1"/>
           <p:nvPr>
-            <p:ph idx="12" type="sldNum"/>
+            <p:ph type="title"/>
           </p:nvPr>
         </p:nvSpPr>
         <p:spPr>
           <a:xfrm>
-            <a:off x="11097669" y="6473300"/>
-            <a:ext cx="324300" cy="186600"/>
+            <a:off x="749245" y="535597"/>
+            <a:ext cx="10659300" cy="583500"/>
+          </a:xfrm>
+          <a:prstGeom prst="rect">
+            <a:avLst/>
+          </a:prstGeom>
+        </p:spPr>
+        <p:txBody>
+          <a:bodyPr anchorCtr="0" anchor="ctr" bIns="0" lIns="0" spcFirstLastPara="1" rIns="0" wrap="square" tIns="0">
+            <a:noAutofit/>
+          </a:bodyPr>
+          <a:lstStyle/>
+          <a:p>
+            <a:pPr indent="0" lvl="0" marL="0" rtl="0" algn="l">
+              <a:spcBef>
+                <a:spcPts val="0"/>
+              </a:spcBef>
+              <a:spcAft>
+                <a:spcPts val="0"/>
+              </a:spcAft>
+              <a:buNone/>
+            </a:pPr>
+            <a:r>
+              <a:rPr lang="en"/>
+              <a:t>A closed-loop workflow from signal to action</a:t>
+            </a:r>
+            <a:endParaRPr/>
+          </a:p>
+        </p:txBody>
+      </p:sp>
+      <p:sp>
+        <p:nvSpPr>
+          <p:cNvPr id="344" name="Google Shape;344;p46"/>
+          <p:cNvSpPr txBox="1"/>
+          <p:nvPr>
+            <p:ph idx="1" type="subTitle"/>
+          </p:nvPr>
+        </p:nvSpPr>
+        <p:spPr>
+          <a:xfrm>
+            <a:off x="764809" y="1174702"/>
+            <a:ext cx="10659300" cy="583500"/>
           </a:xfrm>
           <a:prstGeom prst="rect">
             <a:avLst/>
@@ -29576,53 +31311,34 @@
           </a:bodyPr>
           <a:lstStyle/>
           <a:p>
+            <a:pPr indent="0" lvl="0" marL="0" rtl="0" algn="l">
+              <a:spcBef>
+                <a:spcPts val="1100"/>
+              </a:spcBef>
+              <a:spcAft>
+                <a:spcPts val="0"/>
+              </a:spcAft>
+              <a:buNone/>
+            </a:pPr>
             <a:r>
-              <a:t>9</a:t>
+              <a:t/>
             </a:r>
+            <a:endParaRPr/>
           </a:p>
         </p:txBody>
       </p:sp>
       <p:sp>
         <p:nvSpPr>
-          <p:cNvPr id="596" name="Google Shape;596;p65"/>
+          <p:cNvPr id="345" name="Google Shape;345;p46"/>
           <p:cNvSpPr txBox="1"/>
           <p:nvPr>
-            <p:ph type="title"/>
+            <p:ph idx="2" type="body"/>
           </p:nvPr>
         </p:nvSpPr>
         <p:spPr>
           <a:xfrm>
-            <a:off x="749245" y="535597"/>
-            <a:ext cx="10659300" cy="583500"/>
-          </a:xfrm>
-          <a:prstGeom prst="rect">
-            <a:avLst/>
-          </a:prstGeom>
-        </p:spPr>
-        <p:txBody>
-          <a:bodyPr anchorCtr="0" anchor="ctr" bIns="0" lIns="0" spcFirstLastPara="1" rIns="0" wrap="square" tIns="0">
-            <a:noAutofit/>
-          </a:bodyPr>
-          <a:lstStyle/>
-          <a:p>
-            <a:r>
-              <a:t>Live demo: one coherent student-success story</a:t>
-            </a:r>
-          </a:p>
-        </p:txBody>
-      </p:sp>
-      <p:sp>
-        <p:nvSpPr>
-          <p:cNvPr id="597" name="Google Shape;597;p65"/>
-          <p:cNvSpPr txBox="1"/>
-          <p:nvPr>
-            <p:ph idx="1" type="subTitle"/>
-          </p:nvPr>
-        </p:nvSpPr>
-        <p:spPr>
-          <a:xfrm>
-            <a:off x="764809" y="1174702"/>
-            <a:ext cx="10659300" cy="583500"/>
+            <a:off x="761809" y="1988833"/>
+            <a:ext cx="10659300" cy="4149900"/>
           </a:xfrm>
           <a:prstGeom prst="rect">
             <a:avLst/>
@@ -29634,24 +31350,131 @@
           </a:bodyPr>
           <a:lstStyle/>
           <a:p>
+            <a:pPr indent="0" lvl="0" marL="0" rtl="0" algn="l">
+              <a:spcBef>
+                <a:spcPts val="1100"/>
+              </a:spcBef>
+              <a:spcAft>
+                <a:spcPts val="0"/>
+              </a:spcAft>
+              <a:buNone/>
+            </a:pPr>
             <a:r>
-              <a:t>Expected duration: 12–15 minutes; no manual data repair.</a:t>
+              <a:rPr lang="en"/>
+              <a:t>1. Observe — trigger one deterministic synthetic day</a:t>
             </a:r>
+            <a:endParaRPr/>
+          </a:p>
+          <a:p>
+            <a:pPr indent="0" lvl="0" marL="0" rtl="0" algn="l">
+              <a:spcBef>
+                <a:spcPts val="1100"/>
+              </a:spcBef>
+              <a:spcAft>
+                <a:spcPts val="0"/>
+              </a:spcAft>
+              <a:buNone/>
+            </a:pPr>
+            <a:r>
+              <a:rPr lang="en"/>
+              <a:t>2. Govern — apply quality, lineage, grants, and row filters</a:t>
+            </a:r>
+            <a:endParaRPr/>
+          </a:p>
+          <a:p>
+            <a:pPr indent="0" lvl="0" marL="0" rtl="0" algn="l">
+              <a:spcBef>
+                <a:spcPts val="1100"/>
+              </a:spcBef>
+              <a:spcAft>
+                <a:spcPts val="0"/>
+              </a:spcAft>
+              <a:buNone/>
+            </a:pPr>
+            <a:r>
+              <a:rPr lang="en"/>
+              <a:t>3. Prioritize — score current snapshots with a versioned ML model</a:t>
+            </a:r>
+            <a:endParaRPr/>
+          </a:p>
+          <a:p>
+            <a:pPr indent="0" lvl="0" marL="0" rtl="0" algn="l">
+              <a:spcBef>
+                <a:spcPts val="1100"/>
+              </a:spcBef>
+              <a:spcAft>
+                <a:spcPts val="0"/>
+              </a:spcAft>
+              <a:buNone/>
+            </a:pPr>
+            <a:r>
+              <a:rPr lang="en"/>
+              <a:t>4. Assist — generate cited, evaluated advisor briefings</a:t>
+            </a:r>
+            <a:endParaRPr/>
+          </a:p>
+          <a:p>
+            <a:pPr indent="0" lvl="0" marL="0" rtl="0" algn="l">
+              <a:spcBef>
+                <a:spcPts val="1100"/>
+              </a:spcBef>
+              <a:spcAft>
+                <a:spcPts val="0"/>
+              </a:spcAft>
+              <a:buNone/>
+            </a:pPr>
+            <a:r>
+              <a:rPr lang="en"/>
+              <a:t>5. Act — record interventions transactionally in Lakebase</a:t>
+            </a:r>
+            <a:endParaRPr/>
+          </a:p>
+          <a:p>
+            <a:pPr indent="0" lvl="0" marL="0" rtl="0" algn="l">
+              <a:spcBef>
+                <a:spcPts val="1100"/>
+              </a:spcBef>
+              <a:spcAft>
+                <a:spcPts val="0"/>
+              </a:spcAft>
+              <a:buNone/>
+            </a:pPr>
+            <a:r>
+              <a:rPr lang="en"/>
+              <a:t>6. Learn — return CDC to governed Gold</a:t>
+            </a:r>
+            <a:endParaRPr/>
+          </a:p>
+          <a:p>
+            <a:pPr indent="0" lvl="0" marL="0" rtl="0" algn="l">
+              <a:spcBef>
+                <a:spcPts val="1100"/>
+              </a:spcBef>
+              <a:spcAft>
+                <a:spcPts val="0"/>
+              </a:spcAft>
+              <a:buNone/>
+            </a:pPr>
+            <a:r>
+              <a:rPr lang="en"/>
+              <a:t>7. Understand — ask embedded Genie and inspect its SQL</a:t>
+            </a:r>
+            <a:endParaRPr/>
           </a:p>
         </p:txBody>
       </p:sp>
       <p:sp>
         <p:nvSpPr>
-          <p:cNvPr id="598" name="Google Shape;598;p65"/>
+          <p:cNvPr id="346" name="Google Shape;346;p46"/>
           <p:cNvSpPr txBox="1"/>
           <p:nvPr>
-            <p:ph idx="2" type="body"/>
+            <p:ph idx="12" type="sldNum"/>
           </p:nvPr>
         </p:nvSpPr>
         <p:spPr>
           <a:xfrm>
-            <a:off x="761809" y="1988833"/>
-            <a:ext cx="10659300" cy="4149900"/>
+            <a:off x="11097669" y="6473300"/>
+            <a:ext cx="324300" cy="186600"/>
           </a:xfrm>
           <a:prstGeom prst="rect">
             <a:avLst/>
@@ -29663,44 +31486,20 @@
           </a:bodyPr>
           <a:lstStyle/>
           <a:p>
-            <a:r>
-              <a:t>Replay the September 23 synthetic incident day</a:t>
-            </a:r>
-          </a:p>
-          <a:p>
-            <a:r>
-              <a:t>Inspect quality and feature freshness</a:t>
-            </a:r>
-          </a:p>
-          <a:p>
-            <a:r>
-              <a:t>Show a medium-to-high risk transition</a:t>
-            </a:r>
-          </a:p>
-          <a:p>
-            <a:r>
-              <a:t>Review the governed caseload and cited briefing</a:t>
-            </a:r>
-          </a:p>
-          <a:p>
-            <a:r>
-              <a:t>Record outreach and a follow-up</a:t>
-            </a:r>
-          </a:p>
-          <a:p>
-            <a:r>
-              <a:t>Verify Lakebase CDC and intervention Gold</a:t>
-            </a:r>
-          </a:p>
-          <a:p>
-            <a:r>
-              <a:t>View aggregate executive coverage</a:t>
-            </a:r>
-          </a:p>
-          <a:p>
-            <a:r>
-              <a:t>Ask embedded Genie and inspect generated SQL</a:t>
-            </a:r>
+            <a:pPr indent="0" lvl="0" marL="0" rtl="0" algn="r">
+              <a:spcBef>
+                <a:spcPts val="0"/>
+              </a:spcBef>
+              <a:spcAft>
+                <a:spcPts val="0"/>
+              </a:spcAft>
+              <a:buNone/>
+            </a:pPr>
+            <a:fld id="{00000000-1234-1234-1234-123412341234}" type="slidenum">
+              <a:rPr lang="en"/>
+              <a:t>‹#›</a:t>
+            </a:fld>
+            <a:endParaRPr/>
           </a:p>
         </p:txBody>
       </p:sp>
@@ -29712,28 +31511,75 @@
 </p:sld>
 </file>
 
-<file path=ppt/slides/slide108.xml><?xml version="1.0" encoding="utf-8"?>
-<p:sld xmlns:a="http://schemas.openxmlformats.org/drawingml/2006/main" xmlns:p="http://schemas.openxmlformats.org/presentationml/2006/main" xmlns:r="http://schemas.openxmlformats.org/officeDocument/2006/relationships">
+<file path=ppt/slides/slide6.xml><?xml version="1.0" encoding="utf-8"?>
+<p:sld xmlns:a="http://schemas.openxmlformats.org/drawingml/2006/main" xmlns:r="http://schemas.openxmlformats.org/officeDocument/2006/relationships" xmlns:mc="http://schemas.openxmlformats.org/markup-compatibility/2006" xmlns:mv="urn:schemas-microsoft-com:mac:vml" xmlns:p="http://schemas.openxmlformats.org/presentationml/2006/main" xmlns:c="http://schemas.openxmlformats.org/drawingml/2006/chart" xmlns:dgm="http://schemas.openxmlformats.org/drawingml/2006/diagram" xmlns:o="urn:schemas-microsoft-com:office:office" xmlns:v="urn:schemas-microsoft-com:vml" xmlns:pvml="urn:schemas-microsoft-com:office:powerpoint" xmlns:com="http://schemas.openxmlformats.org/drawingml/2006/compatibility" xmlns:p14="http://schemas.microsoft.com/office/powerpoint/2010/main" xmlns:p15="http://schemas.microsoft.com/office/powerpoint/2012/main" xmlns:ahyp="http://schemas.microsoft.com/office/drawing/2018/hyperlinkcolor">
   <p:cSld>
     <p:spTree>
       <p:nvGrpSpPr>
-        <p:cNvPr id="1" name=""/>
+        <p:cNvPr id="350" name="Shape 350"/>
         <p:cNvGrpSpPr/>
         <p:nvPr/>
       </p:nvGrpSpPr>
-      <p:grpSpPr/>
+      <p:grpSpPr>
+        <a:xfrm>
+          <a:off x="0" y="0"/>
+          <a:ext cx="0" cy="0"/>
+          <a:chOff x="0" y="0"/>
+          <a:chExt cx="0" cy="0"/>
+        </a:xfrm>
+      </p:grpSpPr>
       <p:sp>
         <p:nvSpPr>
-          <p:cNvPr id="744" name="Google Shape;744;p81"/>
+          <p:cNvPr id="351" name="Google Shape;351;p47"/>
           <p:cNvSpPr txBox="1"/>
           <p:nvPr>
-            <p:ph idx="12" type="sldNum"/>
+            <p:ph type="title"/>
           </p:nvPr>
         </p:nvSpPr>
         <p:spPr>
           <a:xfrm>
-            <a:off x="11097669" y="6473300"/>
-            <a:ext cx="324300" cy="186600"/>
+            <a:off x="749245" y="535597"/>
+            <a:ext cx="10659300" cy="583500"/>
+          </a:xfrm>
+          <a:prstGeom prst="rect">
+            <a:avLst/>
+          </a:prstGeom>
+        </p:spPr>
+        <p:txBody>
+          <a:bodyPr anchorCtr="0" anchor="ctr" bIns="0" lIns="0" spcFirstLastPara="1" rIns="0" wrap="square" tIns="0">
+            <a:noAutofit/>
+          </a:bodyPr>
+          <a:lstStyle/>
+          <a:p>
+            <a:pPr indent="0" lvl="0" marL="0" rtl="0" algn="l">
+              <a:spcBef>
+                <a:spcPts val="0"/>
+              </a:spcBef>
+              <a:spcAft>
+                <a:spcPts val="0"/>
+              </a:spcAft>
+              <a:buNone/>
+            </a:pPr>
+            <a:r>
+              <a:rPr lang="en"/>
+              <a:t>Business value for two accountable owners</a:t>
+            </a:r>
+            <a:endParaRPr/>
+          </a:p>
+        </p:txBody>
+      </p:sp>
+      <p:sp>
+        <p:nvSpPr>
+          <p:cNvPr id="352" name="Google Shape;352;p47"/>
+          <p:cNvSpPr txBox="1"/>
+          <p:nvPr>
+            <p:ph idx="1" type="subTitle"/>
+          </p:nvPr>
+        </p:nvSpPr>
+        <p:spPr>
+          <a:xfrm>
+            <a:off x="764809" y="1174702"/>
+            <a:ext cx="10659300" cy="583500"/>
           </a:xfrm>
           <a:prstGeom prst="rect">
             <a:avLst/>
@@ -29745,53 +31591,34 @@
           </a:bodyPr>
           <a:lstStyle/>
           <a:p>
+            <a:pPr indent="0" lvl="0" marL="0" rtl="0" algn="l">
+              <a:spcBef>
+                <a:spcPts val="1100"/>
+              </a:spcBef>
+              <a:spcAft>
+                <a:spcPts val="0"/>
+              </a:spcAft>
+              <a:buNone/>
+            </a:pPr>
             <a:r>
-              <a:t>10</a:t>
+              <a:t/>
             </a:r>
+            <a:endParaRPr/>
           </a:p>
         </p:txBody>
       </p:sp>
       <p:sp>
         <p:nvSpPr>
-          <p:cNvPr id="745" name="Google Shape;745;p81"/>
+          <p:cNvPr id="353" name="Google Shape;353;p47"/>
           <p:cNvSpPr txBox="1"/>
           <p:nvPr>
-            <p:ph type="title"/>
+            <p:ph idx="2" type="body"/>
           </p:nvPr>
         </p:nvSpPr>
         <p:spPr>
           <a:xfrm>
-            <a:off x="749245" y="535597"/>
-            <a:ext cx="10659300" cy="583500"/>
-          </a:xfrm>
-          <a:prstGeom prst="rect">
-            <a:avLst/>
-          </a:prstGeom>
-        </p:spPr>
-        <p:txBody>
-          <a:bodyPr anchorCtr="0" anchor="ctr" bIns="0" lIns="0" spcFirstLastPara="1" rIns="0" wrap="square" tIns="0">
-            <a:noAutofit/>
-          </a:bodyPr>
-          <a:lstStyle/>
-          <a:p>
-            <a:r>
-              <a:t>Execution evidence—not screenshots</a:t>
-            </a:r>
-          </a:p>
-        </p:txBody>
-      </p:sp>
-      <p:sp>
-        <p:nvSpPr>
-          <p:cNvPr id="746" name="Google Shape;746;p81"/>
-          <p:cNvSpPr txBox="1"/>
-          <p:nvPr>
-            <p:ph idx="1" type="subTitle"/>
-          </p:nvPr>
-        </p:nvSpPr>
-        <p:spPr>
-          <a:xfrm>
-            <a:off x="764809" y="1174702"/>
-            <a:ext cx="10659300" cy="583500"/>
+            <a:off x="761809" y="2691865"/>
+            <a:ext cx="4518900" cy="3367200"/>
           </a:xfrm>
           <a:prstGeom prst="rect">
             <a:avLst/>
@@ -29803,24 +31630,35 @@
           </a:bodyPr>
           <a:lstStyle/>
           <a:p>
+            <a:pPr indent="0" lvl="0" marL="0" rtl="0" algn="l">
+              <a:spcBef>
+                <a:spcPts val="1100"/>
+              </a:spcBef>
+              <a:spcAft>
+                <a:spcPts val="0"/>
+              </a:spcAft>
+              <a:buNone/>
+            </a:pPr>
             <a:r>
-              <a:t>Every build domain has committed, text-readable proof.</a:t>
+              <a:rPr lang="en"/>
+              <a:t>See aggregate risk concentration, intervention coverage, retention, and estimated tuition exposure—without student detail.</a:t>
             </a:r>
+            <a:endParaRPr/>
           </a:p>
         </p:txBody>
       </p:sp>
       <p:sp>
         <p:nvSpPr>
-          <p:cNvPr id="747" name="Google Shape;747;p81"/>
+          <p:cNvPr id="354" name="Google Shape;354;p47"/>
           <p:cNvSpPr txBox="1"/>
           <p:nvPr>
-            <p:ph idx="2" type="subTitle"/>
+            <p:ph idx="3" type="body"/>
           </p:nvPr>
         </p:nvSpPr>
         <p:spPr>
           <a:xfrm>
-            <a:off x="764709" y="1988833"/>
-            <a:ext cx="5110800" cy="1785300"/>
+            <a:off x="6916469" y="2691865"/>
+            <a:ext cx="4518900" cy="3367200"/>
           </a:xfrm>
           <a:prstGeom prst="rect">
             <a:avLst/>
@@ -29832,29 +31670,35 @@
           </a:bodyPr>
           <a:lstStyle/>
           <a:p>
+            <a:pPr indent="0" lvl="0" marL="0" rtl="0" algn="l">
+              <a:spcBef>
+                <a:spcPts val="1100"/>
+              </a:spcBef>
+              <a:spcAft>
+                <a:spcPts val="0"/>
+              </a:spcAft>
+              <a:buNone/>
+            </a:pPr>
             <a:r>
-              <a:t>60,000</a:t>
+              <a:rPr lang="en"/>
+              <a:t>Reduce signal-to-outreach time with a prioritized caseload, grounded context, and closed-loop follow-up history.</a:t>
             </a:r>
-          </a:p>
-          <a:p>
-            <a:r>
-              <a:t>Immutable daily risk-history rows</a:t>
-            </a:r>
+            <a:endParaRPr/>
           </a:p>
         </p:txBody>
       </p:sp>
       <p:sp>
         <p:nvSpPr>
-          <p:cNvPr id="748" name="Google Shape;748;p81"/>
+          <p:cNvPr id="355" name="Google Shape;355;p47"/>
           <p:cNvSpPr txBox="1"/>
           <p:nvPr>
-            <p:ph idx="3" type="subTitle"/>
+            <p:ph idx="4" type="subTitle"/>
           </p:nvPr>
         </p:nvSpPr>
         <p:spPr>
           <a:xfrm>
-            <a:off x="6313520" y="1988833"/>
-            <a:ext cx="5110800" cy="1785300"/>
+            <a:off x="795814" y="1970333"/>
+            <a:ext cx="4484400" cy="643200"/>
           </a:xfrm>
           <a:prstGeom prst="rect">
             <a:avLst/>
@@ -29866,29 +31710,35 @@
           </a:bodyPr>
           <a:lstStyle/>
           <a:p>
+            <a:pPr indent="0" lvl="0" marL="0" rtl="0" algn="l">
+              <a:spcBef>
+                <a:spcPts val="1100"/>
+              </a:spcBef>
+              <a:spcAft>
+                <a:spcPts val="0"/>
+              </a:spcAft>
+              <a:buNone/>
+            </a:pPr>
             <a:r>
-              <a:t>0.9669</a:t>
+              <a:rPr lang="en"/>
+              <a:t>Executive sponsor</a:t>
             </a:r>
-          </a:p>
-          <a:p>
-            <a:r>
-              <a:t>Synthetic validation PR-AUC</a:t>
-            </a:r>
+            <a:endParaRPr/>
           </a:p>
         </p:txBody>
       </p:sp>
       <p:sp>
         <p:nvSpPr>
-          <p:cNvPr id="749" name="Google Shape;749;p81"/>
+          <p:cNvPr id="356" name="Google Shape;356;p47"/>
           <p:cNvSpPr txBox="1"/>
           <p:nvPr>
-            <p:ph idx="4" type="subTitle"/>
+            <p:ph idx="5" type="subTitle"/>
           </p:nvPr>
         </p:nvSpPr>
         <p:spPr>
           <a:xfrm>
-            <a:off x="764709" y="4302068"/>
-            <a:ext cx="5110800" cy="1785300"/>
+            <a:off x="6933565" y="1970333"/>
+            <a:ext cx="4485000" cy="643200"/>
           </a:xfrm>
           <a:prstGeom prst="rect">
             <a:avLst/>
@@ -29900,29 +31750,35 @@
           </a:bodyPr>
           <a:lstStyle/>
           <a:p>
+            <a:pPr indent="0" lvl="0" marL="0" rtl="0" algn="l">
+              <a:spcBef>
+                <a:spcPts val="1100"/>
+              </a:spcBef>
+              <a:spcAft>
+                <a:spcPts val="0"/>
+              </a:spcAft>
+              <a:buNone/>
+            </a:pPr>
             <a:r>
-              <a:t>SUCCESS</a:t>
+              <a:rPr lang="en"/>
+              <a:t>Student-success owner</a:t>
             </a:r>
-          </a:p>
-          <a:p>
-            <a:r>
-              <a:t>Workflow and idempotent replay</a:t>
-            </a:r>
+            <a:endParaRPr/>
           </a:p>
         </p:txBody>
       </p:sp>
       <p:sp>
         <p:nvSpPr>
-          <p:cNvPr id="750" name="Google Shape;750;p81"/>
+          <p:cNvPr id="357" name="Google Shape;357;p47"/>
           <p:cNvSpPr txBox="1"/>
           <p:nvPr>
-            <p:ph idx="5" type="subTitle"/>
+            <p:ph idx="12" type="sldNum"/>
           </p:nvPr>
         </p:nvSpPr>
         <p:spPr>
           <a:xfrm>
-            <a:off x="6313520" y="4302068"/>
-            <a:ext cx="5110800" cy="1785300"/>
+            <a:off x="11097669" y="6473300"/>
+            <a:ext cx="324300" cy="186600"/>
           </a:xfrm>
           <a:prstGeom prst="rect">
             <a:avLst/>
@@ -29934,14 +31790,20 @@
           </a:bodyPr>
           <a:lstStyle/>
           <a:p>
-            <a:r>
-              <a:t>ONLINE</a:t>
-            </a:r>
-          </a:p>
-          <a:p>
-            <a:r>
-              <a:t>Both serving sync tables</a:t>
-            </a:r>
+            <a:pPr indent="0" lvl="0" marL="0" rtl="0" algn="r">
+              <a:spcBef>
+                <a:spcPts val="0"/>
+              </a:spcBef>
+              <a:spcAft>
+                <a:spcPts val="0"/>
+              </a:spcAft>
+              <a:buNone/>
+            </a:pPr>
+            <a:fld id="{00000000-1234-1234-1234-123412341234}" type="slidenum">
+              <a:rPr lang="en"/>
+              <a:t>‹#›</a:t>
+            </a:fld>
+            <a:endParaRPr/>
           </a:p>
         </p:txBody>
       </p:sp>
@@ -29953,28 +31815,75 @@
 </p:sld>
 </file>
 
-<file path=ppt/slides/slide109.xml><?xml version="1.0" encoding="utf-8"?>
-<p:sld xmlns:a="http://schemas.openxmlformats.org/drawingml/2006/main" xmlns:p="http://schemas.openxmlformats.org/presentationml/2006/main" xmlns:r="http://schemas.openxmlformats.org/officeDocument/2006/relationships">
+<file path=ppt/slides/slide7.xml><?xml version="1.0" encoding="utf-8"?>
+<p:sld xmlns:a="http://schemas.openxmlformats.org/drawingml/2006/main" xmlns:r="http://schemas.openxmlformats.org/officeDocument/2006/relationships" xmlns:mc="http://schemas.openxmlformats.org/markup-compatibility/2006" xmlns:mv="urn:schemas-microsoft-com:mac:vml" xmlns:p="http://schemas.openxmlformats.org/presentationml/2006/main" xmlns:c="http://schemas.openxmlformats.org/drawingml/2006/chart" xmlns:dgm="http://schemas.openxmlformats.org/drawingml/2006/diagram" xmlns:o="urn:schemas-microsoft-com:office:office" xmlns:v="urn:schemas-microsoft-com:vml" xmlns:pvml="urn:schemas-microsoft-com:office:powerpoint" xmlns:com="http://schemas.openxmlformats.org/drawingml/2006/compatibility" xmlns:p14="http://schemas.microsoft.com/office/powerpoint/2010/main" xmlns:p15="http://schemas.microsoft.com/office/powerpoint/2012/main" xmlns:ahyp="http://schemas.microsoft.com/office/drawing/2018/hyperlinkcolor">
   <p:cSld>
     <p:spTree>
       <p:nvGrpSpPr>
-        <p:cNvPr id="1" name=""/>
+        <p:cNvPr id="361" name="Shape 361"/>
         <p:cNvGrpSpPr/>
         <p:nvPr/>
       </p:nvGrpSpPr>
-      <p:grpSpPr/>
+      <p:grpSpPr>
+        <a:xfrm>
+          <a:off x="0" y="0"/>
+          <a:ext cx="0" cy="0"/>
+          <a:chOff x="0" y="0"/>
+          <a:chExt cx="0" cy="0"/>
+        </a:xfrm>
+      </p:grpSpPr>
       <p:sp>
         <p:nvSpPr>
-          <p:cNvPr id="611" name="Google Shape;611;p67"/>
+          <p:cNvPr id="362" name="Google Shape;362;p48"/>
           <p:cNvSpPr txBox="1"/>
           <p:nvPr>
-            <p:ph idx="12" type="sldNum"/>
+            <p:ph type="title"/>
           </p:nvPr>
         </p:nvSpPr>
         <p:spPr>
           <a:xfrm>
-            <a:off x="11097669" y="6473300"/>
-            <a:ext cx="324300" cy="186600"/>
+            <a:off x="749245" y="535597"/>
+            <a:ext cx="10659300" cy="583500"/>
+          </a:xfrm>
+          <a:prstGeom prst="rect">
+            <a:avLst/>
+          </a:prstGeom>
+        </p:spPr>
+        <p:txBody>
+          <a:bodyPr anchorCtr="0" anchor="ctr" bIns="0" lIns="0" spcFirstLastPara="1" rIns="0" wrap="square" tIns="0">
+            <a:noAutofit/>
+          </a:bodyPr>
+          <a:lstStyle/>
+          <a:p>
+            <a:pPr indent="0" lvl="0" marL="0" rtl="0" algn="l">
+              <a:spcBef>
+                <a:spcPts val="0"/>
+              </a:spcBef>
+              <a:spcAft>
+                <a:spcPts val="0"/>
+              </a:spcAft>
+              <a:buNone/>
+            </a:pPr>
+            <a:r>
+              <a:rPr lang="en"/>
+              <a:t>Governed Databricks architecture</a:t>
+            </a:r>
+            <a:endParaRPr/>
+          </a:p>
+        </p:txBody>
+      </p:sp>
+      <p:sp>
+        <p:nvSpPr>
+          <p:cNvPr id="363" name="Google Shape;363;p48"/>
+          <p:cNvSpPr txBox="1"/>
+          <p:nvPr>
+            <p:ph idx="1" type="subTitle"/>
+          </p:nvPr>
+        </p:nvSpPr>
+        <p:spPr>
+          <a:xfrm>
+            <a:off x="764809" y="1174702"/>
+            <a:ext cx="10659300" cy="583500"/>
           </a:xfrm>
           <a:prstGeom prst="rect">
             <a:avLst/>
@@ -29986,53 +31895,34 @@
           </a:bodyPr>
           <a:lstStyle/>
           <a:p>
+            <a:pPr indent="0" lvl="0" marL="0" rtl="0" algn="l">
+              <a:spcBef>
+                <a:spcPts val="1100"/>
+              </a:spcBef>
+              <a:spcAft>
+                <a:spcPts val="0"/>
+              </a:spcAft>
+              <a:buNone/>
+            </a:pPr>
             <a:r>
-              <a:t>11</a:t>
+              <a:t/>
             </a:r>
+            <a:endParaRPr/>
           </a:p>
         </p:txBody>
       </p:sp>
       <p:sp>
         <p:nvSpPr>
-          <p:cNvPr id="612" name="Google Shape;612;p67"/>
+          <p:cNvPr id="364" name="Google Shape;364;p48"/>
           <p:cNvSpPr txBox="1"/>
           <p:nvPr>
-            <p:ph type="title"/>
+            <p:ph idx="2" type="body"/>
           </p:nvPr>
         </p:nvSpPr>
         <p:spPr>
           <a:xfrm>
-            <a:off x="749245" y="535597"/>
-            <a:ext cx="10659300" cy="583500"/>
-          </a:xfrm>
-          <a:prstGeom prst="rect">
-            <a:avLst/>
-          </a:prstGeom>
-        </p:spPr>
-        <p:txBody>
-          <a:bodyPr anchorCtr="0" anchor="ctr" bIns="0" lIns="0" spcFirstLastPara="1" rIns="0" wrap="square" tIns="0">
-            <a:noAutofit/>
-          </a:bodyPr>
-          <a:lstStyle/>
-          <a:p>
-            <a:r>
-              <a:t>Trust is designed in—and limitations stay visible</a:t>
-            </a:r>
-          </a:p>
-        </p:txBody>
-      </p:sp>
-      <p:sp>
-        <p:nvSpPr>
-          <p:cNvPr id="613" name="Google Shape;613;p67"/>
-          <p:cNvSpPr txBox="1"/>
-          <p:nvPr>
-            <p:ph idx="1" type="subTitle"/>
-          </p:nvPr>
-        </p:nvSpPr>
-        <p:spPr>
-          <a:xfrm>
-            <a:off x="764809" y="1174702"/>
-            <a:ext cx="10659300" cy="583500"/>
+            <a:off x="761809" y="2825567"/>
+            <a:ext cx="3224100" cy="3233700"/>
           </a:xfrm>
           <a:prstGeom prst="rect">
             <a:avLst/>
@@ -30044,24 +31934,67 @@
           </a:bodyPr>
           <a:lstStyle/>
           <a:p>
+            <a:pPr indent="0" lvl="0" marL="0" rtl="0" algn="l">
+              <a:spcBef>
+                <a:spcPts val="1100"/>
+              </a:spcBef>
+              <a:spcAft>
+                <a:spcPts val="0"/>
+              </a:spcAft>
+              <a:buNone/>
+            </a:pPr>
             <a:r>
-              <a:t>Responsible use means exposing both controls and boundaries.</a:t>
+              <a:rPr lang="en"/>
+              <a:t>Lakeflow Bronze + Silver</a:t>
             </a:r>
+            <a:endParaRPr/>
+          </a:p>
+          <a:p>
+            <a:pPr indent="0" lvl="0" marL="0" rtl="0" algn="l">
+              <a:spcBef>
+                <a:spcPts val="1100"/>
+              </a:spcBef>
+              <a:spcAft>
+                <a:spcPts val="0"/>
+              </a:spcAft>
+              <a:buNone/>
+            </a:pPr>
+            <a:r>
+              <a:rPr lang="en"/>
+              <a:t>MLflow scoring</a:t>
+            </a:r>
+            <a:endParaRPr/>
+          </a:p>
+          <a:p>
+            <a:pPr indent="0" lvl="0" marL="0" rtl="0" algn="l">
+              <a:spcBef>
+                <a:spcPts val="1100"/>
+              </a:spcBef>
+              <a:spcAft>
+                <a:spcPts val="0"/>
+              </a:spcAft>
+              <a:buNone/>
+            </a:pPr>
+            <a:r>
+              <a:rPr lang="en"/>
+              <a:t>Unity Catalog Gold</a:t>
+            </a:r>
+            <a:endParaRPr/>
           </a:p>
         </p:txBody>
       </p:sp>
       <p:sp>
         <p:nvSpPr>
-          <p:cNvPr id="614" name="Google Shape;614;p67"/>
+          <p:cNvPr id="365" name="Google Shape;365;p48"/>
           <p:cNvSpPr txBox="1"/>
           <p:nvPr>
-            <p:ph idx="2" type="body"/>
+            <p:ph idx="3" type="body"/>
           </p:nvPr>
         </p:nvSpPr>
         <p:spPr>
           <a:xfrm>
-            <a:off x="761809" y="2691865"/>
-            <a:ext cx="4518900" cy="3367200"/>
+            <a:off x="4482478" y="2825567"/>
+            <a:ext cx="3224100" cy="3233700"/>
           </a:xfrm>
           <a:prstGeom prst="rect">
             <a:avLst/>
@@ -30073,44 +32006,67 @@
           </a:bodyPr>
           <a:lstStyle/>
           <a:p>
+            <a:pPr indent="0" lvl="0" marL="0" rtl="0" algn="l">
+              <a:spcBef>
+                <a:spcPts val="1100"/>
+              </a:spcBef>
+              <a:spcAft>
+                <a:spcPts val="0"/>
+              </a:spcAft>
+              <a:buNone/>
+            </a:pPr>
             <a:r>
-              <a:t>Row-filtered advisor access</a:t>
+              <a:rPr lang="en"/>
+              <a:t>Databricks App</a:t>
             </a:r>
+            <a:endParaRPr/>
           </a:p>
           <a:p>
+            <a:pPr indent="0" lvl="0" marL="0" rtl="0" algn="l">
+              <a:spcBef>
+                <a:spcPts val="1100"/>
+              </a:spcBef>
+              <a:spcAft>
+                <a:spcPts val="0"/>
+              </a:spcAft>
+              <a:buNone/>
+            </a:pPr>
             <a:r>
-              <a:t>Aggregate-only executive products</a:t>
+              <a:rPr lang="en"/>
+              <a:t>Read-only Lakebase serving</a:t>
             </a:r>
+            <a:endParaRPr/>
           </a:p>
           <a:p>
+            <a:pPr indent="0" lvl="0" marL="0" rtl="0" algn="l">
+              <a:spcBef>
+                <a:spcPts val="1100"/>
+              </a:spcBef>
+              <a:spcAft>
+                <a:spcPts val="0"/>
+              </a:spcAft>
+              <a:buNone/>
+            </a:pPr>
             <a:r>
-              <a:t>Read-only serving tables</a:t>
+              <a:rPr lang="en"/>
+              <a:t>Embedded Genie Agent</a:t>
             </a:r>
-          </a:p>
-          <a:p>
-            <a:r>
-              <a:t>Cited AI and inspectable SQL</a:t>
-            </a:r>
-          </a:p>
-          <a:p>
-            <a:r>
-              <a:t>Visible stale, partial, and error states</a:t>
-            </a:r>
+            <a:endParaRPr/>
           </a:p>
         </p:txBody>
       </p:sp>
       <p:sp>
         <p:nvSpPr>
-          <p:cNvPr id="615" name="Google Shape;615;p67"/>
+          <p:cNvPr id="366" name="Google Shape;366;p48"/>
           <p:cNvSpPr txBox="1"/>
           <p:nvPr>
-            <p:ph idx="3" type="body"/>
+            <p:ph idx="4" type="body"/>
           </p:nvPr>
         </p:nvSpPr>
         <p:spPr>
           <a:xfrm>
-            <a:off x="6916469" y="2691865"/>
-            <a:ext cx="4518900" cy="3367200"/>
+            <a:off x="8167756" y="2825567"/>
+            <a:ext cx="3224100" cy="3233700"/>
           </a:xfrm>
           <a:prstGeom prst="rect">
             <a:avLst/>
@@ -30122,44 +32078,67 @@
           </a:bodyPr>
           <a:lstStyle/>
           <a:p>
+            <a:pPr indent="0" lvl="0" marL="0" rtl="0" algn="l">
+              <a:spcBef>
+                <a:spcPts val="1100"/>
+              </a:spcBef>
+              <a:spcAft>
+                <a:spcPts val="0"/>
+              </a:spcAft>
+              <a:buNone/>
+            </a:pPr>
             <a:r>
-              <a:t>Synthetic data and designed signals</a:t>
+              <a:rPr lang="en"/>
+              <a:t>Lakebase-owned interventions</a:t>
             </a:r>
+            <a:endParaRPr/>
           </a:p>
           <a:p>
+            <a:pPr indent="0" lvl="0" marL="0" rtl="0" algn="l">
+              <a:spcBef>
+                <a:spcPts val="1100"/>
+              </a:spcBef>
+              <a:spcAft>
+                <a:spcPts val="0"/>
+              </a:spcAft>
+              <a:buNone/>
+            </a:pPr>
             <a:r>
-              <a:t>No causal impact claim</a:t>
+              <a:rPr lang="en"/>
+              <a:t>CDC to governed Gold</a:t>
             </a:r>
+            <a:endParaRPr/>
           </a:p>
           <a:p>
+            <a:pPr indent="0" lvl="0" marL="0" rtl="0" algn="l">
+              <a:spcBef>
+                <a:spcPts val="1100"/>
+              </a:spcBef>
+              <a:spcAft>
+                <a:spcPts val="0"/>
+              </a:spcAft>
+              <a:buNone/>
+            </a:pPr>
             <a:r>
-              <a:t>No automated adverse action</a:t>
+              <a:rPr lang="en"/>
+              <a:t>Serving cannot overwrite writes</a:t>
             </a:r>
-          </a:p>
-          <a:p>
-            <a:r>
-              <a:t>No institutional validation yet</a:t>
-            </a:r>
-          </a:p>
-          <a:p>
-            <a:r>
-              <a:t>Triggered daily—not real time</a:t>
-            </a:r>
+            <a:endParaRPr/>
           </a:p>
         </p:txBody>
       </p:sp>
       <p:sp>
         <p:nvSpPr>
-          <p:cNvPr id="616" name="Google Shape;616;p67"/>
+          <p:cNvPr id="367" name="Google Shape;367;p48"/>
           <p:cNvSpPr txBox="1"/>
           <p:nvPr>
-            <p:ph idx="4" type="subTitle"/>
+            <p:ph idx="5" type="subTitle"/>
           </p:nvPr>
         </p:nvSpPr>
         <p:spPr>
           <a:xfrm>
-            <a:off x="795814" y="1970333"/>
-            <a:ext cx="4484400" cy="643200"/>
+            <a:off x="786070" y="1970336"/>
+            <a:ext cx="3199500" cy="643200"/>
           </a:xfrm>
           <a:prstGeom prst="rect">
             <a:avLst/>
@@ -30171,24 +32150,35 @@
           </a:bodyPr>
           <a:lstStyle/>
           <a:p>
+            <a:pPr indent="0" lvl="0" marL="0" rtl="0" algn="l">
+              <a:spcBef>
+                <a:spcPts val="1100"/>
+              </a:spcBef>
+              <a:spcAft>
+                <a:spcPts val="0"/>
+              </a:spcAft>
+              <a:buNone/>
+            </a:pPr>
             <a:r>
-              <a:t>Trust controls</a:t>
+              <a:rPr lang="en"/>
+              <a:t>Governed intelligence</a:t>
             </a:r>
+            <a:endParaRPr/>
           </a:p>
         </p:txBody>
       </p:sp>
       <p:sp>
         <p:nvSpPr>
-          <p:cNvPr id="617" name="Google Shape;617;p67"/>
+          <p:cNvPr id="368" name="Google Shape;368;p48"/>
           <p:cNvSpPr txBox="1"/>
           <p:nvPr>
-            <p:ph idx="5" type="subTitle"/>
+            <p:ph idx="6" type="subTitle"/>
           </p:nvPr>
         </p:nvSpPr>
         <p:spPr>
           <a:xfrm>
-            <a:off x="6933565" y="1970333"/>
-            <a:ext cx="4485000" cy="643200"/>
+            <a:off x="4494675" y="1970336"/>
+            <a:ext cx="3199500" cy="643200"/>
           </a:xfrm>
           <a:prstGeom prst="rect">
             <a:avLst/>
@@ -30200,9 +32190,100 @@
           </a:bodyPr>
           <a:lstStyle/>
           <a:p>
+            <a:pPr indent="0" lvl="0" marL="0" rtl="0" algn="l">
+              <a:spcBef>
+                <a:spcPts val="1100"/>
+              </a:spcBef>
+              <a:spcAft>
+                <a:spcPts val="0"/>
+              </a:spcAft>
+              <a:buNone/>
+            </a:pPr>
             <a:r>
-              <a:t>Honest boundaries</a:t>
+              <a:rPr lang="en"/>
+              <a:t>Unified experience</a:t>
             </a:r>
+            <a:endParaRPr/>
+          </a:p>
+        </p:txBody>
+      </p:sp>
+      <p:sp>
+        <p:nvSpPr>
+          <p:cNvPr id="369" name="Google Shape;369;p48"/>
+          <p:cNvSpPr txBox="1"/>
+          <p:nvPr>
+            <p:ph idx="7" type="subTitle"/>
+          </p:nvPr>
+        </p:nvSpPr>
+        <p:spPr>
+          <a:xfrm>
+            <a:off x="8179953" y="1970336"/>
+            <a:ext cx="3199500" cy="643200"/>
+          </a:xfrm>
+          <a:prstGeom prst="rect">
+            <a:avLst/>
+          </a:prstGeom>
+        </p:spPr>
+        <p:txBody>
+          <a:bodyPr anchorCtr="0" anchor="t" bIns="0" lIns="0" spcFirstLastPara="1" rIns="0" wrap="square" tIns="0">
+            <a:noAutofit/>
+          </a:bodyPr>
+          <a:lstStyle/>
+          <a:p>
+            <a:pPr indent="0" lvl="0" marL="0" rtl="0" algn="l">
+              <a:spcBef>
+                <a:spcPts val="1100"/>
+              </a:spcBef>
+              <a:spcAft>
+                <a:spcPts val="0"/>
+              </a:spcAft>
+              <a:buNone/>
+            </a:pPr>
+            <a:r>
+              <a:rPr lang="en"/>
+              <a:t>Closed feedback loop</a:t>
+            </a:r>
+            <a:endParaRPr/>
+          </a:p>
+        </p:txBody>
+      </p:sp>
+      <p:sp>
+        <p:nvSpPr>
+          <p:cNvPr id="370" name="Google Shape;370;p48"/>
+          <p:cNvSpPr txBox="1"/>
+          <p:nvPr>
+            <p:ph idx="12" type="sldNum"/>
+          </p:nvPr>
+        </p:nvSpPr>
+        <p:spPr>
+          <a:xfrm>
+            <a:off x="11097669" y="6473300"/>
+            <a:ext cx="324300" cy="186600"/>
+          </a:xfrm>
+          <a:prstGeom prst="rect">
+            <a:avLst/>
+          </a:prstGeom>
+        </p:spPr>
+        <p:txBody>
+          <a:bodyPr anchorCtr="0" anchor="t" bIns="0" lIns="0" spcFirstLastPara="1" rIns="0" wrap="square" tIns="0">
+            <a:noAutofit/>
+          </a:bodyPr>
+          <a:lstStyle/>
+          <a:p>
+            <a:pPr indent="0" lvl="0" marL="0" rtl="0" algn="r">
+              <a:spcBef>
+                <a:spcPts val="0"/>
+              </a:spcBef>
+              <a:spcAft>
+                <a:spcPts val="0"/>
+              </a:spcAft>
+              <a:buNone/>
+            </a:pPr>
+            <a:fld id="{00000000-1234-1234-1234-123412341234}" type="slidenum">
+              <a:rPr lang="en"/>
+              <a:t>‹#›</a:t>
+            </a:fld>
+            <a:endParaRPr/>
           </a:p>
         </p:txBody>
       </p:sp>
@@ -30214,57 +32295,75 @@
 </p:sld>
 </file>
 
-<file path=ppt/slides/slide110.xml><?xml version="1.0" encoding="utf-8"?>
-<p:sld xmlns:a="http://schemas.openxmlformats.org/drawingml/2006/main" xmlns:p="http://schemas.openxmlformats.org/presentationml/2006/main" xmlns:r="http://schemas.openxmlformats.org/officeDocument/2006/relationships">
+<file path=ppt/slides/slide8.xml><?xml version="1.0" encoding="utf-8"?>
+<p:sld xmlns:a="http://schemas.openxmlformats.org/drawingml/2006/main" xmlns:r="http://schemas.openxmlformats.org/officeDocument/2006/relationships" xmlns:mc="http://schemas.openxmlformats.org/markup-compatibility/2006" xmlns:mv="urn:schemas-microsoft-com:mac:vml" xmlns:p="http://schemas.openxmlformats.org/presentationml/2006/main" xmlns:c="http://schemas.openxmlformats.org/drawingml/2006/chart" xmlns:dgm="http://schemas.openxmlformats.org/drawingml/2006/diagram" xmlns:o="urn:schemas-microsoft-com:office:office" xmlns:v="urn:schemas-microsoft-com:vml" xmlns:pvml="urn:schemas-microsoft-com:office:powerpoint" xmlns:com="http://schemas.openxmlformats.org/drawingml/2006/compatibility" xmlns:p14="http://schemas.microsoft.com/office/powerpoint/2010/main" xmlns:p15="http://schemas.microsoft.com/office/powerpoint/2012/main" xmlns:ahyp="http://schemas.microsoft.com/office/drawing/2018/hyperlinkcolor">
   <p:cSld>
     <p:spTree>
       <p:nvGrpSpPr>
-        <p:cNvPr id="1" name=""/>
+        <p:cNvPr id="374" name="Shape 374"/>
         <p:cNvGrpSpPr/>
         <p:nvPr/>
       </p:nvGrpSpPr>
-      <p:grpSpPr/>
+      <p:grpSpPr>
+        <a:xfrm>
+          <a:off x="0" y="0"/>
+          <a:ext cx="0" cy="0"/>
+          <a:chOff x="0" y="0"/>
+          <a:chExt cx="0" cy="0"/>
+        </a:xfrm>
+      </p:grpSpPr>
       <p:sp>
         <p:nvSpPr>
-          <p:cNvPr id="513" name="Google Shape;513;p57"/>
+          <p:cNvPr id="375" name="Google Shape;375;p49"/>
           <p:cNvSpPr txBox="1"/>
           <p:nvPr>
-            <p:ph type="ctrTitle"/>
+            <p:ph type="title"/>
           </p:nvPr>
         </p:nvSpPr>
         <p:spPr>
           <a:xfrm>
-            <a:off x="761800" y="1186975"/>
-            <a:ext cx="5332800" cy="2387700"/>
+            <a:off x="749245" y="535597"/>
+            <a:ext cx="10659300" cy="583500"/>
           </a:xfrm>
           <a:prstGeom prst="rect">
             <a:avLst/>
           </a:prstGeom>
         </p:spPr>
         <p:txBody>
-          <a:bodyPr anchorCtr="0" anchor="b" bIns="0" lIns="0" spcFirstLastPara="1" rIns="0" wrap="square" tIns="0">
+          <a:bodyPr anchorCtr="0" anchor="ctr" bIns="0" lIns="0" spcFirstLastPara="1" rIns="0" wrap="square" tIns="0">
             <a:noAutofit/>
           </a:bodyPr>
           <a:lstStyle/>
           <a:p>
+            <a:pPr indent="0" lvl="0" marL="0" rtl="0" algn="l">
+              <a:spcBef>
+                <a:spcPts val="0"/>
+              </a:spcBef>
+              <a:spcAft>
+                <a:spcPts val="0"/>
+              </a:spcAft>
+              <a:buNone/>
+            </a:pPr>
             <a:r>
-              <a:t>Pilot the workflow—not just the model</a:t>
+              <a:rPr lang="en"/>
+              <a:t>Hybrid intelligence keeps each decision explainable</a:t>
             </a:r>
+            <a:endParaRPr/>
           </a:p>
         </p:txBody>
       </p:sp>
       <p:sp>
         <p:nvSpPr>
-          <p:cNvPr id="514" name="Google Shape;514;p57"/>
+          <p:cNvPr id="376" name="Google Shape;376;p49"/>
           <p:cNvSpPr txBox="1"/>
           <p:nvPr>
-            <p:ph idx="1" type="subTitle"/>
+            <p:ph idx="1" type="body"/>
           </p:nvPr>
         </p:nvSpPr>
         <p:spPr>
           <a:xfrm>
-            <a:off x="761809" y="3835400"/>
-            <a:ext cx="6170100" cy="1224300"/>
+            <a:off x="761809" y="2825567"/>
+            <a:ext cx="3224100" cy="3233700"/>
           </a:xfrm>
           <a:prstGeom prst="rect">
             <a:avLst/>
@@ -30276,24 +32375,35 @@
           </a:bodyPr>
           <a:lstStyle/>
           <a:p>
+            <a:pPr indent="0" lvl="0" marL="0" rtl="0" algn="l">
+              <a:spcBef>
+                <a:spcPts val="1100"/>
+              </a:spcBef>
+              <a:spcAft>
+                <a:spcPts val="0"/>
+              </a:spcAft>
+              <a:buNone/>
+            </a:pPr>
             <a:r>
-              <a:t>Align owners • validate institutional data and thresholds • measure signal-to-outreach time and intervention coverage</a:t>
+              <a:rPr lang="en"/>
+              <a:t>Repeatable prioritization, calibrated scores, stable tiers, version history, and baseline comparison.</a:t>
             </a:r>
+            <a:endParaRPr/>
           </a:p>
         </p:txBody>
       </p:sp>
       <p:sp>
         <p:nvSpPr>
-          <p:cNvPr id="515" name="Google Shape;515;p57"/>
+          <p:cNvPr id="377" name="Google Shape;377;p49"/>
           <p:cNvSpPr txBox="1"/>
           <p:nvPr>
-            <p:ph idx="12" type="sldNum"/>
+            <p:ph idx="2" type="subTitle"/>
           </p:nvPr>
         </p:nvSpPr>
         <p:spPr>
           <a:xfrm>
-            <a:off x="11097669" y="6473300"/>
-            <a:ext cx="324300" cy="186600"/>
+            <a:off x="764809" y="1174702"/>
+            <a:ext cx="10659300" cy="583500"/>
           </a:xfrm>
           <a:prstGeom prst="rect">
             <a:avLst/>
@@ -30305,24 +32415,34 @@
           </a:bodyPr>
           <a:lstStyle/>
           <a:p>
+            <a:pPr indent="0" lvl="0" marL="0" rtl="0" algn="l">
+              <a:spcBef>
+                <a:spcPts val="1100"/>
+              </a:spcBef>
+              <a:spcAft>
+                <a:spcPts val="0"/>
+              </a:spcAft>
+              <a:buNone/>
+            </a:pPr>
             <a:r>
-              <a:t>12</a:t>
+              <a:t/>
             </a:r>
+            <a:endParaRPr/>
           </a:p>
         </p:txBody>
       </p:sp>
       <p:sp>
         <p:nvSpPr>
-          <p:cNvPr id="516" name="Google Shape;516;p57"/>
+          <p:cNvPr id="378" name="Google Shape;378;p49"/>
           <p:cNvSpPr txBox="1"/>
           <p:nvPr>
-            <p:ph idx="2" type="subTitle"/>
+            <p:ph idx="3" type="body"/>
           </p:nvPr>
         </p:nvSpPr>
         <p:spPr>
           <a:xfrm>
-            <a:off x="761809" y="5756000"/>
-            <a:ext cx="5262300" cy="492300"/>
+            <a:off x="4482478" y="2825567"/>
+            <a:ext cx="3224100" cy="3233700"/>
           </a:xfrm>
           <a:prstGeom prst="rect">
             <a:avLst/>
@@ -30334,9 +32454,220 @@
           </a:bodyPr>
           <a:lstStyle/>
           <a:p>
+            <a:pPr indent="0" lvl="0" marL="0" rtl="0" algn="l">
+              <a:spcBef>
+                <a:spcPts val="1100"/>
+              </a:spcBef>
+              <a:spcAft>
+                <a:spcPts val="0"/>
+              </a:spcAft>
+              <a:buNone/>
+            </a:pPr>
             <a:r>
-              <a:t>Governed decisions. Accountable action. Measurable learning.</a:t>
+              <a:rPr lang="en"/>
+              <a:t>Allowlisted facts, citations, bounded discussion prompts, and fixed-set evaluation.</a:t>
             </a:r>
+            <a:endParaRPr/>
+          </a:p>
+        </p:txBody>
+      </p:sp>
+      <p:sp>
+        <p:nvSpPr>
+          <p:cNvPr id="379" name="Google Shape;379;p49"/>
+          <p:cNvSpPr txBox="1"/>
+          <p:nvPr>
+            <p:ph idx="4" type="body"/>
+          </p:nvPr>
+        </p:nvSpPr>
+        <p:spPr>
+          <a:xfrm>
+            <a:off x="8167756" y="2825567"/>
+            <a:ext cx="3224100" cy="3233700"/>
+          </a:xfrm>
+          <a:prstGeom prst="rect">
+            <a:avLst/>
+          </a:prstGeom>
+        </p:spPr>
+        <p:txBody>
+          <a:bodyPr anchorCtr="0" anchor="t" bIns="0" lIns="0" spcFirstLastPara="1" rIns="0" wrap="square" tIns="0">
+            <a:noAutofit/>
+          </a:bodyPr>
+          <a:lstStyle/>
+          <a:p>
+            <a:pPr indent="0" lvl="0" marL="0" rtl="0" algn="l">
+              <a:spcBef>
+                <a:spcPts val="1100"/>
+              </a:spcBef>
+              <a:spcAft>
+                <a:spcPts val="0"/>
+              </a:spcAft>
+              <a:buNone/>
+            </a:pPr>
+            <a:r>
+              <a:rPr lang="en"/>
+              <a:t>Judgment, outreach, reconciliation, and accountable action remain with people.</a:t>
+            </a:r>
+            <a:endParaRPr/>
+          </a:p>
+        </p:txBody>
+      </p:sp>
+      <p:sp>
+        <p:nvSpPr>
+          <p:cNvPr id="380" name="Google Shape;380;p49"/>
+          <p:cNvSpPr txBox="1"/>
+          <p:nvPr>
+            <p:ph idx="5" type="subTitle"/>
+          </p:nvPr>
+        </p:nvSpPr>
+        <p:spPr>
+          <a:xfrm>
+            <a:off x="786070" y="1970336"/>
+            <a:ext cx="3199500" cy="643200"/>
+          </a:xfrm>
+          <a:prstGeom prst="rect">
+            <a:avLst/>
+          </a:prstGeom>
+        </p:spPr>
+        <p:txBody>
+          <a:bodyPr anchorCtr="0" anchor="t" bIns="0" lIns="0" spcFirstLastPara="1" rIns="0" wrap="square" tIns="0">
+            <a:noAutofit/>
+          </a:bodyPr>
+          <a:lstStyle/>
+          <a:p>
+            <a:pPr indent="0" lvl="0" marL="0" rtl="0" algn="l">
+              <a:spcBef>
+                <a:spcPts val="1100"/>
+              </a:spcBef>
+              <a:spcAft>
+                <a:spcPts val="0"/>
+              </a:spcAft>
+              <a:buNone/>
+            </a:pPr>
+            <a:r>
+              <a:rPr lang="en"/>
+              <a:t>ML classifier</a:t>
+            </a:r>
+            <a:endParaRPr/>
+          </a:p>
+        </p:txBody>
+      </p:sp>
+      <p:sp>
+        <p:nvSpPr>
+          <p:cNvPr id="381" name="Google Shape;381;p49"/>
+          <p:cNvSpPr txBox="1"/>
+          <p:nvPr>
+            <p:ph idx="6" type="subTitle"/>
+          </p:nvPr>
+        </p:nvSpPr>
+        <p:spPr>
+          <a:xfrm>
+            <a:off x="4494675" y="1970336"/>
+            <a:ext cx="3199500" cy="643200"/>
+          </a:xfrm>
+          <a:prstGeom prst="rect">
+            <a:avLst/>
+          </a:prstGeom>
+        </p:spPr>
+        <p:txBody>
+          <a:bodyPr anchorCtr="0" anchor="t" bIns="0" lIns="0" spcFirstLastPara="1" rIns="0" wrap="square" tIns="0">
+            <a:noAutofit/>
+          </a:bodyPr>
+          <a:lstStyle/>
+          <a:p>
+            <a:pPr indent="0" lvl="0" marL="0" rtl="0" algn="l">
+              <a:spcBef>
+                <a:spcPts val="1100"/>
+              </a:spcBef>
+              <a:spcAft>
+                <a:spcPts val="0"/>
+              </a:spcAft>
+              <a:buNone/>
+            </a:pPr>
+            <a:r>
+              <a:rPr lang="en"/>
+              <a:t>Grounded GenAI</a:t>
+            </a:r>
+            <a:endParaRPr/>
+          </a:p>
+        </p:txBody>
+      </p:sp>
+      <p:sp>
+        <p:nvSpPr>
+          <p:cNvPr id="382" name="Google Shape;382;p49"/>
+          <p:cNvSpPr txBox="1"/>
+          <p:nvPr>
+            <p:ph idx="7" type="subTitle"/>
+          </p:nvPr>
+        </p:nvSpPr>
+        <p:spPr>
+          <a:xfrm>
+            <a:off x="8179953" y="1970336"/>
+            <a:ext cx="3199500" cy="643200"/>
+          </a:xfrm>
+          <a:prstGeom prst="rect">
+            <a:avLst/>
+          </a:prstGeom>
+        </p:spPr>
+        <p:txBody>
+          <a:bodyPr anchorCtr="0" anchor="t" bIns="0" lIns="0" spcFirstLastPara="1" rIns="0" wrap="square" tIns="0">
+            <a:noAutofit/>
+          </a:bodyPr>
+          <a:lstStyle/>
+          <a:p>
+            <a:pPr indent="0" lvl="0" marL="0" rtl="0" algn="l">
+              <a:spcBef>
+                <a:spcPts val="1100"/>
+              </a:spcBef>
+              <a:spcAft>
+                <a:spcPts val="0"/>
+              </a:spcAft>
+              <a:buNone/>
+            </a:pPr>
+            <a:r>
+              <a:rPr lang="en"/>
+              <a:t>Human advisor</a:t>
+            </a:r>
+            <a:endParaRPr/>
+          </a:p>
+        </p:txBody>
+      </p:sp>
+      <p:sp>
+        <p:nvSpPr>
+          <p:cNvPr id="383" name="Google Shape;383;p49"/>
+          <p:cNvSpPr txBox="1"/>
+          <p:nvPr>
+            <p:ph idx="12" type="sldNum"/>
+          </p:nvPr>
+        </p:nvSpPr>
+        <p:spPr>
+          <a:xfrm>
+            <a:off x="11097669" y="6473300"/>
+            <a:ext cx="324300" cy="186600"/>
+          </a:xfrm>
+          <a:prstGeom prst="rect">
+            <a:avLst/>
+          </a:prstGeom>
+        </p:spPr>
+        <p:txBody>
+          <a:bodyPr anchorCtr="0" anchor="t" bIns="0" lIns="0" spcFirstLastPara="1" rIns="0" wrap="square" tIns="0">
+            <a:noAutofit/>
+          </a:bodyPr>
+          <a:lstStyle/>
+          <a:p>
+            <a:pPr indent="0" lvl="0" marL="0" rtl="0" algn="r">
+              <a:spcBef>
+                <a:spcPts val="0"/>
+              </a:spcBef>
+              <a:spcAft>
+                <a:spcPts val="0"/>
+              </a:spcAft>
+              <a:buNone/>
+            </a:pPr>
+            <a:fld id="{00000000-1234-1234-1234-123412341234}" type="slidenum">
+              <a:rPr lang="en"/>
+              <a:t>‹#›</a:t>
+            </a:fld>
+            <a:endParaRPr/>
           </a:p>
         </p:txBody>
       </p:sp>
@@ -30348,48 +32679,66 @@
 </p:sld>
 </file>
 
-<file path=ppt/slides/slide99.xml><?xml version="1.0" encoding="utf-8"?>
-<p:sld xmlns:a="http://schemas.openxmlformats.org/drawingml/2006/main" xmlns:p="http://schemas.openxmlformats.org/presentationml/2006/main" xmlns:r="http://schemas.openxmlformats.org/officeDocument/2006/relationships">
+<file path=ppt/slides/slide9.xml><?xml version="1.0" encoding="utf-8"?>
+<p:sld xmlns:a="http://schemas.openxmlformats.org/drawingml/2006/main" xmlns:r="http://schemas.openxmlformats.org/officeDocument/2006/relationships" xmlns:mc="http://schemas.openxmlformats.org/markup-compatibility/2006" xmlns:mv="urn:schemas-microsoft-com:mac:vml" xmlns:p="http://schemas.openxmlformats.org/presentationml/2006/main" xmlns:c="http://schemas.openxmlformats.org/drawingml/2006/chart" xmlns:dgm="http://schemas.openxmlformats.org/drawingml/2006/diagram" xmlns:o="urn:schemas-microsoft-com:office:office" xmlns:v="urn:schemas-microsoft-com:vml" xmlns:pvml="urn:schemas-microsoft-com:office:powerpoint" xmlns:com="http://schemas.openxmlformats.org/drawingml/2006/compatibility" xmlns:p14="http://schemas.microsoft.com/office/powerpoint/2010/main" xmlns:p15="http://schemas.microsoft.com/office/powerpoint/2012/main" xmlns:ahyp="http://schemas.microsoft.com/office/drawing/2018/hyperlinkcolor">
   <p:cSld>
     <p:spTree>
       <p:nvGrpSpPr>
-        <p:cNvPr id="1" name=""/>
+        <p:cNvPr id="387" name="Shape 387"/>
         <p:cNvGrpSpPr/>
         <p:nvPr/>
       </p:nvGrpSpPr>
-      <p:grpSpPr/>
+      <p:grpSpPr>
+        <a:xfrm>
+          <a:off x="0" y="0"/>
+          <a:ext cx="0" cy="0"/>
+          <a:chOff x="0" y="0"/>
+          <a:chExt cx="0" cy="0"/>
+        </a:xfrm>
+      </p:grpSpPr>
       <p:sp>
         <p:nvSpPr>
-          <p:cNvPr id="505" name="Google Shape;505;p56"/>
+          <p:cNvPr id="388" name="Google Shape;388;p50"/>
           <p:cNvSpPr txBox="1"/>
           <p:nvPr>
-            <p:ph type="ctrTitle"/>
+            <p:ph type="title"/>
           </p:nvPr>
         </p:nvSpPr>
         <p:spPr>
           <a:xfrm>
-            <a:off x="761800" y="1186975"/>
-            <a:ext cx="5332800" cy="2387700"/>
+            <a:off x="749245" y="535597"/>
+            <a:ext cx="10659300" cy="583500"/>
           </a:xfrm>
           <a:prstGeom prst="rect">
             <a:avLst/>
           </a:prstGeom>
         </p:spPr>
         <p:txBody>
-          <a:bodyPr anchorCtr="0" anchor="b" bIns="0" lIns="0" spcFirstLastPara="1" rIns="0" wrap="square" tIns="0">
+          <a:bodyPr anchorCtr="0" anchor="ctr" bIns="0" lIns="0" spcFirstLastPara="1" rIns="0" wrap="square" tIns="0">
             <a:noAutofit/>
           </a:bodyPr>
           <a:lstStyle/>
           <a:p>
+            <a:pPr indent="0" lvl="0" marL="0" rtl="0" algn="l">
+              <a:spcBef>
+                <a:spcPts val="0"/>
+              </a:spcBef>
+              <a:spcAft>
+                <a:spcPts val="0"/>
+              </a:spcAft>
+              <a:buNone/>
+            </a:pPr>
             <a:r>
-              <a:t>From Fragmented Signals to Timely Student Support</a:t>
+              <a:rPr lang="en"/>
+              <a:t>Live demo: one coherent student-success story</a:t>
             </a:r>
+            <a:endParaRPr/>
           </a:p>
         </p:txBody>
       </p:sp>
       <p:sp>
         <p:nvSpPr>
-          <p:cNvPr id="506" name="Google Shape;506;p56"/>
+          <p:cNvPr id="389" name="Google Shape;389;p50"/>
           <p:cNvSpPr txBox="1"/>
           <p:nvPr>
             <p:ph idx="1" type="subTitle"/>
@@ -30397,8 +32746,8 @@
         </p:nvSpPr>
         <p:spPr>
           <a:xfrm>
-            <a:off x="761809" y="3835400"/>
-            <a:ext cx="6170100" cy="1224300"/>
+            <a:off x="764809" y="1174702"/>
+            <a:ext cx="10659300" cy="583500"/>
           </a:xfrm>
           <a:prstGeom prst="rect">
             <a:avLst/>
@@ -30410,24 +32759,34 @@
           </a:bodyPr>
           <a:lstStyle/>
           <a:p>
+            <a:pPr indent="0" lvl="0" marL="0" rtl="0" algn="l">
+              <a:spcBef>
+                <a:spcPts val="1100"/>
+              </a:spcBef>
+              <a:spcAft>
+                <a:spcPts val="0"/>
+              </a:spcAft>
+              <a:buNone/>
+            </a:pPr>
             <a:r>
-              <a:t>A governed student-retention workflow on Databricks</a:t>
+              <a:t/>
             </a:r>
+            <a:endParaRPr/>
           </a:p>
         </p:txBody>
       </p:sp>
       <p:sp>
         <p:nvSpPr>
-          <p:cNvPr id="507" name="Google Shape;507;p56"/>
+          <p:cNvPr id="390" name="Google Shape;390;p50"/>
           <p:cNvSpPr txBox="1"/>
           <p:nvPr>
-            <p:ph idx="2" type="subTitle"/>
+            <p:ph idx="2" type="body"/>
           </p:nvPr>
         </p:nvSpPr>
         <p:spPr>
           <a:xfrm>
-            <a:off x="761809" y="5756000"/>
-            <a:ext cx="5262300" cy="492300"/>
+            <a:off x="761809" y="2691865"/>
+            <a:ext cx="4518900" cy="3367200"/>
           </a:xfrm>
           <a:prstGeom prst="rect">
             <a:avLst/>
@@ -30439,24 +32798,83 @@
           </a:bodyPr>
           <a:lstStyle/>
           <a:p>
+            <a:pPr indent="0" lvl="0" marL="0" rtl="0" algn="l">
+              <a:spcBef>
+                <a:spcPts val="1100"/>
+              </a:spcBef>
+              <a:spcAft>
+                <a:spcPts val="0"/>
+              </a:spcAft>
+              <a:buNone/>
+            </a:pPr>
             <a:r>
-              <a:t>Public Sector • Higher Education • Synthetic demonstration</a:t>
+              <a:rPr lang="en"/>
+              <a:t>Replay the synthetic incident day</a:t>
             </a:r>
+            <a:endParaRPr/>
+          </a:p>
+          <a:p>
+            <a:pPr indent="0" lvl="0" marL="0" rtl="0" algn="l">
+              <a:spcBef>
+                <a:spcPts val="1100"/>
+              </a:spcBef>
+              <a:spcAft>
+                <a:spcPts val="0"/>
+              </a:spcAft>
+              <a:buNone/>
+            </a:pPr>
+            <a:r>
+              <a:rPr lang="en"/>
+              <a:t>Inspect quality and feature freshness</a:t>
+            </a:r>
+            <a:endParaRPr/>
+          </a:p>
+          <a:p>
+            <a:pPr indent="0" lvl="0" marL="0" rtl="0" algn="l">
+              <a:spcBef>
+                <a:spcPts val="1100"/>
+              </a:spcBef>
+              <a:spcAft>
+                <a:spcPts val="0"/>
+              </a:spcAft>
+              <a:buNone/>
+            </a:pPr>
+            <a:r>
+              <a:rPr lang="en"/>
+              <a:t>Show a medium-to-high risk transition</a:t>
+            </a:r>
+            <a:endParaRPr/>
+          </a:p>
+          <a:p>
+            <a:pPr indent="0" lvl="0" marL="0" rtl="0" algn="l">
+              <a:spcBef>
+                <a:spcPts val="1100"/>
+              </a:spcBef>
+              <a:spcAft>
+                <a:spcPts val="0"/>
+              </a:spcAft>
+              <a:buNone/>
+            </a:pPr>
+            <a:r>
+              <a:rPr lang="en"/>
+              <a:t>Review the cited advisor briefing</a:t>
+            </a:r>
+            <a:endParaRPr/>
           </a:p>
         </p:txBody>
       </p:sp>
       <p:sp>
         <p:nvSpPr>
-          <p:cNvPr id="508" name="Google Shape;508;p56"/>
+          <p:cNvPr id="391" name="Google Shape;391;p50"/>
           <p:cNvSpPr txBox="1"/>
           <p:nvPr>
-            <p:ph idx="12" type="sldNum"/>
+            <p:ph idx="3" type="body"/>
           </p:nvPr>
         </p:nvSpPr>
         <p:spPr>
           <a:xfrm>
-            <a:off x="11097669" y="6473300"/>
-            <a:ext cx="324300" cy="186600"/>
+            <a:off x="6916469" y="2691865"/>
+            <a:ext cx="4518900" cy="3367200"/>
           </a:xfrm>
           <a:prstGeom prst="rect">
             <a:avLst/>
@@ -30468,9 +32886,188 @@
           </a:bodyPr>
           <a:lstStyle/>
           <a:p>
+            <a:pPr indent="0" lvl="0" marL="0" rtl="0" algn="l">
+              <a:spcBef>
+                <a:spcPts val="1100"/>
+              </a:spcBef>
+              <a:spcAft>
+                <a:spcPts val="0"/>
+              </a:spcAft>
+              <a:buNone/>
+            </a:pPr>
             <a:r>
-              <a:t>1</a:t>
+              <a:rPr lang="en"/>
+              <a:t>Record outreach and follow-up</a:t>
             </a:r>
+            <a:endParaRPr/>
+          </a:p>
+          <a:p>
+            <a:pPr indent="0" lvl="0" marL="0" rtl="0" algn="l">
+              <a:spcBef>
+                <a:spcPts val="1100"/>
+              </a:spcBef>
+              <a:spcAft>
+                <a:spcPts val="0"/>
+              </a:spcAft>
+              <a:buNone/>
+            </a:pPr>
+            <a:r>
+              <a:rPr lang="en"/>
+              <a:t>Verify CDC and intervention Gold</a:t>
+            </a:r>
+            <a:endParaRPr/>
+          </a:p>
+          <a:p>
+            <a:pPr indent="0" lvl="0" marL="0" rtl="0" algn="l">
+              <a:spcBef>
+                <a:spcPts val="1100"/>
+              </a:spcBef>
+              <a:spcAft>
+                <a:spcPts val="0"/>
+              </a:spcAft>
+              <a:buNone/>
+            </a:pPr>
+            <a:r>
+              <a:rPr lang="en"/>
+              <a:t>View aggregate executive coverage</a:t>
+            </a:r>
+            <a:endParaRPr/>
+          </a:p>
+          <a:p>
+            <a:pPr indent="0" lvl="0" marL="0" rtl="0" algn="l">
+              <a:spcBef>
+                <a:spcPts val="1100"/>
+              </a:spcBef>
+              <a:spcAft>
+                <a:spcPts val="0"/>
+              </a:spcAft>
+              <a:buNone/>
+            </a:pPr>
+            <a:r>
+              <a:rPr lang="en"/>
+              <a:t>Ask embedded Genie and inspect its SQL</a:t>
+            </a:r>
+            <a:endParaRPr/>
+          </a:p>
+        </p:txBody>
+      </p:sp>
+      <p:sp>
+        <p:nvSpPr>
+          <p:cNvPr id="392" name="Google Shape;392;p50"/>
+          <p:cNvSpPr txBox="1"/>
+          <p:nvPr>
+            <p:ph idx="4" type="subTitle"/>
+          </p:nvPr>
+        </p:nvSpPr>
+        <p:spPr>
+          <a:xfrm>
+            <a:off x="795814" y="1970333"/>
+            <a:ext cx="4484400" cy="643200"/>
+          </a:xfrm>
+          <a:prstGeom prst="rect">
+            <a:avLst/>
+          </a:prstGeom>
+        </p:spPr>
+        <p:txBody>
+          <a:bodyPr anchorCtr="0" anchor="t" bIns="0" lIns="0" spcFirstLastPara="1" rIns="0" wrap="square" tIns="0">
+            <a:noAutofit/>
+          </a:bodyPr>
+          <a:lstStyle/>
+          <a:p>
+            <a:pPr indent="0" lvl="0" marL="0" rtl="0" algn="l">
+              <a:spcBef>
+                <a:spcPts val="1100"/>
+              </a:spcBef>
+              <a:spcAft>
+                <a:spcPts val="0"/>
+              </a:spcAft>
+              <a:buNone/>
+            </a:pPr>
+            <a:r>
+              <a:rPr lang="en"/>
+              <a:t>Signal → action</a:t>
+            </a:r>
+            <a:endParaRPr/>
+          </a:p>
+        </p:txBody>
+      </p:sp>
+      <p:sp>
+        <p:nvSpPr>
+          <p:cNvPr id="393" name="Google Shape;393;p50"/>
+          <p:cNvSpPr txBox="1"/>
+          <p:nvPr>
+            <p:ph idx="5" type="subTitle"/>
+          </p:nvPr>
+        </p:nvSpPr>
+        <p:spPr>
+          <a:xfrm>
+            <a:off x="6933565" y="1970333"/>
+            <a:ext cx="4485000" cy="643200"/>
+          </a:xfrm>
+          <a:prstGeom prst="rect">
+            <a:avLst/>
+          </a:prstGeom>
+        </p:spPr>
+        <p:txBody>
+          <a:bodyPr anchorCtr="0" anchor="t" bIns="0" lIns="0" spcFirstLastPara="1" rIns="0" wrap="square" tIns="0">
+            <a:noAutofit/>
+          </a:bodyPr>
+          <a:lstStyle/>
+          <a:p>
+            <a:pPr indent="0" lvl="0" marL="0" rtl="0" algn="l">
+              <a:spcBef>
+                <a:spcPts val="1100"/>
+              </a:spcBef>
+              <a:spcAft>
+                <a:spcPts val="0"/>
+              </a:spcAft>
+              <a:buNone/>
+            </a:pPr>
+            <a:r>
+              <a:rPr lang="en"/>
+              <a:t>Action → learning</a:t>
+            </a:r>
+            <a:endParaRPr/>
+          </a:p>
+        </p:txBody>
+      </p:sp>
+      <p:sp>
+        <p:nvSpPr>
+          <p:cNvPr id="394" name="Google Shape;394;p50"/>
+          <p:cNvSpPr txBox="1"/>
+          <p:nvPr>
+            <p:ph idx="12" type="sldNum"/>
+          </p:nvPr>
+        </p:nvSpPr>
+        <p:spPr>
+          <a:xfrm>
+            <a:off x="11097669" y="6473300"/>
+            <a:ext cx="324300" cy="186600"/>
+          </a:xfrm>
+          <a:prstGeom prst="rect">
+            <a:avLst/>
+          </a:prstGeom>
+        </p:spPr>
+        <p:txBody>
+          <a:bodyPr anchorCtr="0" anchor="t" bIns="0" lIns="0" spcFirstLastPara="1" rIns="0" wrap="square" tIns="0">
+            <a:noAutofit/>
+          </a:bodyPr>
+          <a:lstStyle/>
+          <a:p>
+            <a:pPr indent="0" lvl="0" marL="0" rtl="0" algn="r">
+              <a:spcBef>
+                <a:spcPts val="0"/>
+              </a:spcBef>
+              <a:spcAft>
+                <a:spcPts val="0"/>
+              </a:spcAft>
+              <a:buNone/>
+            </a:pPr>
+            <a:fld id="{00000000-1234-1234-1234-123412341234}" type="slidenum">
+              <a:rPr lang="en"/>
+              <a:t>‹#›</a:t>
+            </a:fld>
+            <a:endParaRPr/>
           </a:p>
         </p:txBody>
       </p:sp>
@@ -30483,44 +33080,44 @@
 </file>
 
 <file path=ppt/theme/theme1.xml><?xml version="1.0" encoding="utf-8"?>
-<a:theme xmlns:a="http://schemas.openxmlformats.org/drawingml/2006/main" xmlns:r="http://schemas.openxmlformats.org/officeDocument/2006/relationships" name="Databricks Theme">
+<a:theme xmlns:a="http://schemas.openxmlformats.org/drawingml/2006/main" xmlns:r="http://schemas.openxmlformats.org/officeDocument/2006/relationships" name="Simple Light">
   <a:themeElements>
-    <a:clrScheme name="Office">
+    <a:clrScheme name="Simple Light">
       <a:dk1>
-        <a:srgbClr val="1B3139"/>
+        <a:srgbClr val="000000"/>
       </a:dk1>
       <a:lt1>
-        <a:srgbClr val="F9F7F4"/>
+        <a:srgbClr val="FFFFFF"/>
       </a:lt1>
       <a:dk2>
-        <a:srgbClr val="FF5F46"/>
+        <a:srgbClr val="595959"/>
       </a:dk2>
       <a:lt2>
-        <a:srgbClr val="EEEDE9"/>
+        <a:srgbClr val="EEEEEE"/>
       </a:lt2>
       <a:accent1>
-        <a:srgbClr val="1B5162"/>
+        <a:srgbClr val="4285F4"/>
       </a:accent1>
       <a:accent2>
-        <a:srgbClr val="00A972"/>
+        <a:srgbClr val="212121"/>
       </a:accent2>
       <a:accent3>
-        <a:srgbClr val="98102A"/>
+        <a:srgbClr val="78909C"/>
       </a:accent3>
       <a:accent4>
-        <a:srgbClr val="FFAB00"/>
+        <a:srgbClr val="FFAB40"/>
       </a:accent4>
       <a:accent5>
-        <a:srgbClr val="618794"/>
+        <a:srgbClr val="0097A7"/>
       </a:accent5>
       <a:accent6>
-        <a:srgbClr val="4359FF"/>
+        <a:srgbClr val="EEFF41"/>
       </a:accent6>
       <a:hlink>
-        <a:srgbClr val="FF3621"/>
+        <a:srgbClr val="0097A7"/>
       </a:hlink>
       <a:folHlink>
-        <a:srgbClr val="954F72"/>
+        <a:srgbClr val="0097A7"/>
       </a:folHlink>
     </a:clrScheme>
     <a:fontScheme name="Office">
@@ -31041,44 +33638,44 @@
 </file>
 
 <file path=ppt/theme/theme3.xml><?xml version="1.0" encoding="utf-8"?>
-<a:theme xmlns:a="http://schemas.openxmlformats.org/drawingml/2006/main" xmlns:r="http://schemas.openxmlformats.org/officeDocument/2006/relationships" name="Simple Light">
+<a:theme xmlns:a="http://schemas.openxmlformats.org/drawingml/2006/main" xmlns:r="http://schemas.openxmlformats.org/officeDocument/2006/relationships" name="Databricks Theme">
   <a:themeElements>
-    <a:clrScheme name="Simple Light">
+    <a:clrScheme name="Office">
       <a:dk1>
-        <a:srgbClr val="000000"/>
+        <a:srgbClr val="1B3139"/>
       </a:dk1>
       <a:lt1>
-        <a:srgbClr val="FFFFFF"/>
+        <a:srgbClr val="F9F7F4"/>
       </a:lt1>
       <a:dk2>
-        <a:srgbClr val="595959"/>
+        <a:srgbClr val="FF5F46"/>
       </a:dk2>
       <a:lt2>
-        <a:srgbClr val="EEEEEE"/>
+        <a:srgbClr val="EEEDE9"/>
       </a:lt2>
       <a:accent1>
-        <a:srgbClr val="4285F4"/>
+        <a:srgbClr val="1B5162"/>
       </a:accent1>
       <a:accent2>
-        <a:srgbClr val="212121"/>
+        <a:srgbClr val="00A972"/>
       </a:accent2>
       <a:accent3>
-        <a:srgbClr val="78909C"/>
+        <a:srgbClr val="98102A"/>
       </a:accent3>
       <a:accent4>
-        <a:srgbClr val="FFAB40"/>
+        <a:srgbClr val="FFAB00"/>
       </a:accent4>
       <a:accent5>
-        <a:srgbClr val="0097A7"/>
+        <a:srgbClr val="618794"/>
       </a:accent5>
       <a:accent6>
-        <a:srgbClr val="EEFF41"/>
+        <a:srgbClr val="4359FF"/>
       </a:accent6>
       <a:hlink>
-        <a:srgbClr val="0097A7"/>
+        <a:srgbClr val="FF3621"/>
       </a:hlink>
       <a:folHlink>
-        <a:srgbClr val="0097A7"/>
+        <a:srgbClr val="954F72"/>
       </a:folHlink>
     </a:clrScheme>
     <a:fontScheme name="Office">
